--- a/test.pptx
+++ b/test.pptx
@@ -5,10 +5,13 @@
     <p:sldMasterId id="2147483648" r:id="rId1"/>
   </p:sldMasterIdLst>
   <p:notesMasterIdLst>
-    <p:notesMasterId r:id="rId3"/>
+    <p:notesMasterId r:id="rId6"/>
   </p:notesMasterIdLst>
   <p:sldIdLst>
     <p:sldId id="256" r:id="rId2"/>
+    <p:sldId id="257" r:id="rId3"/>
+    <p:sldId id="258" r:id="rId4"/>
+    <p:sldId id="259" r:id="rId5"/>
   </p:sldIdLst>
   <p:sldSz cx="12192000" cy="6858000"/>
   <p:notesSz cx="6858000" cy="9144000"/>
@@ -3802,6 +3805,8016 @@
     <p:extLst>
       <p:ext uri="{BB962C8B-B14F-4D97-AF65-F5344CB8AC3E}">
         <p14:creationId xmlns:p14="http://schemas.microsoft.com/office/powerpoint/2010/main" val="4014144078"/>
+      </p:ext>
+    </p:extLst>
+  </p:cSld>
+  <p:clrMapOvr>
+    <a:masterClrMapping/>
+  </p:clrMapOvr>
+</p:sld>
+</file>
+
+<file path=ppt/slides/slide2.xml><?xml version="1.0" encoding="utf-8"?>
+<p:sld xmlns:a="http://schemas.openxmlformats.org/drawingml/2006/main" xmlns:r="http://schemas.openxmlformats.org/officeDocument/2006/relationships" xmlns:p="http://schemas.openxmlformats.org/presentationml/2006/main">
+  <p:cSld>
+    <p:spTree>
+      <p:nvGrpSpPr>
+        <p:cNvPr id="1" name=""/>
+        <p:cNvGrpSpPr/>
+        <p:nvPr/>
+      </p:nvGrpSpPr>
+      <p:grpSpPr>
+        <a:xfrm>
+          <a:off x="0" y="0"/>
+          <a:ext cx="0" cy="0"/>
+          <a:chOff x="0" y="0"/>
+          <a:chExt cx="0" cy="0"/>
+        </a:xfrm>
+      </p:grpSpPr>
+      <p:sp>
+        <p:nvSpPr>
+          <p:cNvPr id="77" name="TextBox 76">
+            <a:extLst>
+              <a:ext uri="{FF2B5EF4-FFF2-40B4-BE49-F238E27FC236}">
+                <a16:creationId xmlns:a16="http://schemas.microsoft.com/office/drawing/2014/main" id="{3A2B913B-CB57-48A7-72B6-692CBCEA2C9E}"/>
+              </a:ext>
+            </a:extLst>
+          </p:cNvPr>
+          <p:cNvSpPr txBox="1"/>
+          <p:nvPr/>
+        </p:nvSpPr>
+        <p:spPr>
+          <a:xfrm>
+            <a:off x="6650942" y="2095667"/>
+            <a:ext cx="3013496" cy="523220"/>
+          </a:xfrm>
+          <a:custGeom>
+            <a:avLst/>
+            <a:gdLst>
+              <a:gd name="csX0" fmla="*/ 0 w 3013496"/>
+              <a:gd name="csY0" fmla="*/ 0 h 523220"/>
+              <a:gd name="csX1" fmla="*/ 472114 w 3013496"/>
+              <a:gd name="csY1" fmla="*/ 0 h 523220"/>
+              <a:gd name="csX2" fmla="*/ 883959 w 3013496"/>
+              <a:gd name="csY2" fmla="*/ 0 h 523220"/>
+              <a:gd name="csX3" fmla="*/ 1446478 w 3013496"/>
+              <a:gd name="csY3" fmla="*/ 0 h 523220"/>
+              <a:gd name="csX4" fmla="*/ 1918592 w 3013496"/>
+              <a:gd name="csY4" fmla="*/ 0 h 523220"/>
+              <a:gd name="csX5" fmla="*/ 2390707 w 3013496"/>
+              <a:gd name="csY5" fmla="*/ 0 h 523220"/>
+              <a:gd name="csX6" fmla="*/ 3013496 w 3013496"/>
+              <a:gd name="csY6" fmla="*/ 0 h 523220"/>
+              <a:gd name="csX7" fmla="*/ 3013496 w 3013496"/>
+              <a:gd name="csY7" fmla="*/ 523220 h 523220"/>
+              <a:gd name="csX8" fmla="*/ 2511247 w 3013496"/>
+              <a:gd name="csY8" fmla="*/ 523220 h 523220"/>
+              <a:gd name="csX9" fmla="*/ 2099402 w 3013496"/>
+              <a:gd name="csY9" fmla="*/ 523220 h 523220"/>
+              <a:gd name="csX10" fmla="*/ 1597153 w 3013496"/>
+              <a:gd name="csY10" fmla="*/ 523220 h 523220"/>
+              <a:gd name="csX11" fmla="*/ 1094904 w 3013496"/>
+              <a:gd name="csY11" fmla="*/ 523220 h 523220"/>
+              <a:gd name="csX12" fmla="*/ 622789 w 3013496"/>
+              <a:gd name="csY12" fmla="*/ 523220 h 523220"/>
+              <a:gd name="csX13" fmla="*/ 0 w 3013496"/>
+              <a:gd name="csY13" fmla="*/ 523220 h 523220"/>
+              <a:gd name="csX14" fmla="*/ 0 w 3013496"/>
+              <a:gd name="csY14" fmla="*/ 0 h 523220"/>
+            </a:gdLst>
+            <a:ahLst/>
+            <a:cxnLst>
+              <a:cxn ang="0">
+                <a:pos x="csX0" y="csY0"/>
+              </a:cxn>
+              <a:cxn ang="0">
+                <a:pos x="csX1" y="csY1"/>
+              </a:cxn>
+              <a:cxn ang="0">
+                <a:pos x="csX2" y="csY2"/>
+              </a:cxn>
+              <a:cxn ang="0">
+                <a:pos x="csX3" y="csY3"/>
+              </a:cxn>
+              <a:cxn ang="0">
+                <a:pos x="csX4" y="csY4"/>
+              </a:cxn>
+              <a:cxn ang="0">
+                <a:pos x="csX5" y="csY5"/>
+              </a:cxn>
+              <a:cxn ang="0">
+                <a:pos x="csX6" y="csY6"/>
+              </a:cxn>
+              <a:cxn ang="0">
+                <a:pos x="csX7" y="csY7"/>
+              </a:cxn>
+              <a:cxn ang="0">
+                <a:pos x="csX8" y="csY8"/>
+              </a:cxn>
+              <a:cxn ang="0">
+                <a:pos x="csX9" y="csY9"/>
+              </a:cxn>
+              <a:cxn ang="0">
+                <a:pos x="csX10" y="csY10"/>
+              </a:cxn>
+              <a:cxn ang="0">
+                <a:pos x="csX11" y="csY11"/>
+              </a:cxn>
+              <a:cxn ang="0">
+                <a:pos x="csX12" y="csY12"/>
+              </a:cxn>
+              <a:cxn ang="0">
+                <a:pos x="csX13" y="csY13"/>
+              </a:cxn>
+              <a:cxn ang="0">
+                <a:pos x="csX14" y="csY14"/>
+              </a:cxn>
+            </a:cxnLst>
+            <a:rect l="l" t="t" r="r" b="b"/>
+            <a:pathLst>
+              <a:path w="3013496" h="523220" extrusionOk="0">
+                <a:moveTo>
+                  <a:pt x="0" y="0"/>
+                </a:moveTo>
+                <a:cubicBezTo>
+                  <a:pt x="178591" y="-18476"/>
+                  <a:pt x="258274" y="14828"/>
+                  <a:pt x="472114" y="0"/>
+                </a:cubicBezTo>
+                <a:cubicBezTo>
+                  <a:pt x="685954" y="-14828"/>
+                  <a:pt x="738703" y="37308"/>
+                  <a:pt x="883959" y="0"/>
+                </a:cubicBezTo>
+                <a:cubicBezTo>
+                  <a:pt x="1029216" y="-37308"/>
+                  <a:pt x="1257349" y="751"/>
+                  <a:pt x="1446478" y="0"/>
+                </a:cubicBezTo>
+                <a:cubicBezTo>
+                  <a:pt x="1635607" y="-751"/>
+                  <a:pt x="1751149" y="38921"/>
+                  <a:pt x="1918592" y="0"/>
+                </a:cubicBezTo>
+                <a:cubicBezTo>
+                  <a:pt x="2086035" y="-38921"/>
+                  <a:pt x="2198579" y="8883"/>
+                  <a:pt x="2390707" y="0"/>
+                </a:cubicBezTo>
+                <a:cubicBezTo>
+                  <a:pt x="2582835" y="-8883"/>
+                  <a:pt x="2778145" y="48306"/>
+                  <a:pt x="3013496" y="0"/>
+                </a:cubicBezTo>
+                <a:cubicBezTo>
+                  <a:pt x="3041803" y="213097"/>
+                  <a:pt x="3004382" y="279283"/>
+                  <a:pt x="3013496" y="523220"/>
+                </a:cubicBezTo>
+                <a:cubicBezTo>
+                  <a:pt x="2816850" y="548616"/>
+                  <a:pt x="2736183" y="483357"/>
+                  <a:pt x="2511247" y="523220"/>
+                </a:cubicBezTo>
+                <a:cubicBezTo>
+                  <a:pt x="2286311" y="563083"/>
+                  <a:pt x="2263862" y="513624"/>
+                  <a:pt x="2099402" y="523220"/>
+                </a:cubicBezTo>
+                <a:cubicBezTo>
+                  <a:pt x="1934943" y="532816"/>
+                  <a:pt x="1840703" y="475680"/>
+                  <a:pt x="1597153" y="523220"/>
+                </a:cubicBezTo>
+                <a:cubicBezTo>
+                  <a:pt x="1353603" y="570760"/>
+                  <a:pt x="1342868" y="486356"/>
+                  <a:pt x="1094904" y="523220"/>
+                </a:cubicBezTo>
+                <a:cubicBezTo>
+                  <a:pt x="846940" y="560084"/>
+                  <a:pt x="763760" y="494826"/>
+                  <a:pt x="622789" y="523220"/>
+                </a:cubicBezTo>
+                <a:cubicBezTo>
+                  <a:pt x="481818" y="551614"/>
+                  <a:pt x="237513" y="474944"/>
+                  <a:pt x="0" y="523220"/>
+                </a:cubicBezTo>
+                <a:cubicBezTo>
+                  <a:pt x="-48283" y="282564"/>
+                  <a:pt x="3191" y="249525"/>
+                  <a:pt x="0" y="0"/>
+                </a:cubicBezTo>
+                <a:close/>
+              </a:path>
+            </a:pathLst>
+          </a:custGeom>
+          <a:noFill/>
+          <a:ln>
+            <a:solidFill>
+              <a:schemeClr val="tx1"/>
+            </a:solidFill>
+            <a:prstDash val="dash"/>
+            <a:extLst>
+              <a:ext uri="{C807C97D-BFC1-408E-A445-0C87EB9F89A2}">
+                <ask:lineSketchStyleProps xmlns:ask="http://schemas.microsoft.com/office/drawing/2018/sketchyshapes" sd="1219033472">
+                  <a:prstGeom prst="rect">
+                    <a:avLst/>
+                  </a:prstGeom>
+                  <ask:type>
+                    <ask:lineSketchScribble/>
+                  </ask:type>
+                </ask:lineSketchStyleProps>
+              </a:ext>
+            </a:extLst>
+          </a:ln>
+        </p:spPr>
+        <p:txBody>
+          <a:bodyPr wrap="square" rtlCol="0">
+            <a:spAutoFit/>
+          </a:bodyPr>
+          <a:lstStyle/>
+          <a:p>
+            <a:pPr algn="ctr"/>
+            <a:r>
+              <a:rPr lang="en-US" sz="1400" dirty="0"/>
+              <a:t>Core Training Stack (UM/</a:t>
+            </a:r>
+          </a:p>
+          <a:p>
+            <a:pPr algn="ctr"/>
+            <a:r>
+              <a:rPr lang="en-US" sz="1400" dirty="0" err="1"/>
+              <a:t>OmegaT</a:t>
+            </a:r>
+            <a:r>
+              <a:rPr lang="en-US" sz="1400" dirty="0"/>
+              <a:t>/Nemo/Megatron-LM/...)</a:t>
+            </a:r>
+          </a:p>
+        </p:txBody>
+      </p:sp>
+      <p:sp>
+        <p:nvSpPr>
+          <p:cNvPr id="13" name="Rounded Rectangle 12">
+            <a:extLst>
+              <a:ext uri="{FF2B5EF4-FFF2-40B4-BE49-F238E27FC236}">
+                <a16:creationId xmlns:a16="http://schemas.microsoft.com/office/drawing/2014/main" id="{8D04C069-C815-9471-99D4-1112B4EFDAF8}"/>
+              </a:ext>
+            </a:extLst>
+          </p:cNvPr>
+          <p:cNvSpPr/>
+          <p:nvPr/>
+        </p:nvSpPr>
+        <p:spPr>
+          <a:xfrm>
+            <a:off x="113496" y="179140"/>
+            <a:ext cx="3681170" cy="4886450"/>
+          </a:xfrm>
+          <a:custGeom>
+            <a:avLst/>
+            <a:gdLst>
+              <a:gd name="csX0" fmla="*/ 0 w 3681170"/>
+              <a:gd name="csY0" fmla="*/ 277376 h 4886450"/>
+              <a:gd name="csX1" fmla="*/ 277376 w 3681170"/>
+              <a:gd name="csY1" fmla="*/ 0 h 4886450"/>
+              <a:gd name="csX2" fmla="*/ 902660 w 3681170"/>
+              <a:gd name="csY2" fmla="*/ 0 h 4886450"/>
+              <a:gd name="csX3" fmla="*/ 1465415 w 3681170"/>
+              <a:gd name="csY3" fmla="*/ 0 h 4886450"/>
+              <a:gd name="csX4" fmla="*/ 1996906 w 3681170"/>
+              <a:gd name="csY4" fmla="*/ 0 h 4886450"/>
+              <a:gd name="csX5" fmla="*/ 2559661 w 3681170"/>
+              <a:gd name="csY5" fmla="*/ 0 h 4886450"/>
+              <a:gd name="csX6" fmla="*/ 3403794 w 3681170"/>
+              <a:gd name="csY6" fmla="*/ 0 h 4886450"/>
+              <a:gd name="csX7" fmla="*/ 3681170 w 3681170"/>
+              <a:gd name="csY7" fmla="*/ 277376 h 4886450"/>
+              <a:gd name="csX8" fmla="*/ 3681170 w 3681170"/>
+              <a:gd name="csY8" fmla="*/ 809556 h 4886450"/>
+              <a:gd name="csX9" fmla="*/ 3681170 w 3681170"/>
+              <a:gd name="csY9" fmla="*/ 1385053 h 4886450"/>
+              <a:gd name="csX10" fmla="*/ 3681170 w 3681170"/>
+              <a:gd name="csY10" fmla="*/ 2003867 h 4886450"/>
+              <a:gd name="csX11" fmla="*/ 3681170 w 3681170"/>
+              <a:gd name="csY11" fmla="*/ 2536047 h 4886450"/>
+              <a:gd name="csX12" fmla="*/ 3681170 w 3681170"/>
+              <a:gd name="csY12" fmla="*/ 3241495 h 4886450"/>
+              <a:gd name="csX13" fmla="*/ 3681170 w 3681170"/>
+              <a:gd name="csY13" fmla="*/ 3860309 h 4886450"/>
+              <a:gd name="csX14" fmla="*/ 3681170 w 3681170"/>
+              <a:gd name="csY14" fmla="*/ 4609074 h 4886450"/>
+              <a:gd name="csX15" fmla="*/ 3403794 w 3681170"/>
+              <a:gd name="csY15" fmla="*/ 4886450 h 4886450"/>
+              <a:gd name="csX16" fmla="*/ 2715982 w 3681170"/>
+              <a:gd name="csY16" fmla="*/ 4886450 h 4886450"/>
+              <a:gd name="csX17" fmla="*/ 2153227 w 3681170"/>
+              <a:gd name="csY17" fmla="*/ 4886450 h 4886450"/>
+              <a:gd name="csX18" fmla="*/ 1527943 w 3681170"/>
+              <a:gd name="csY18" fmla="*/ 4886450 h 4886450"/>
+              <a:gd name="csX19" fmla="*/ 996452 w 3681170"/>
+              <a:gd name="csY19" fmla="*/ 4886450 h 4886450"/>
+              <a:gd name="csX20" fmla="*/ 277376 w 3681170"/>
+              <a:gd name="csY20" fmla="*/ 4886450 h 4886450"/>
+              <a:gd name="csX21" fmla="*/ 0 w 3681170"/>
+              <a:gd name="csY21" fmla="*/ 4609074 h 4886450"/>
+              <a:gd name="csX22" fmla="*/ 0 w 3681170"/>
+              <a:gd name="csY22" fmla="*/ 3903626 h 4886450"/>
+              <a:gd name="csX23" fmla="*/ 0 w 3681170"/>
+              <a:gd name="csY23" fmla="*/ 3371446 h 4886450"/>
+              <a:gd name="csX24" fmla="*/ 0 w 3681170"/>
+              <a:gd name="csY24" fmla="*/ 2752632 h 4886450"/>
+              <a:gd name="csX25" fmla="*/ 0 w 3681170"/>
+              <a:gd name="csY25" fmla="*/ 2090501 h 4886450"/>
+              <a:gd name="csX26" fmla="*/ 0 w 3681170"/>
+              <a:gd name="csY26" fmla="*/ 1385053 h 4886450"/>
+              <a:gd name="csX27" fmla="*/ 0 w 3681170"/>
+              <a:gd name="csY27" fmla="*/ 277376 h 4886450"/>
+            </a:gdLst>
+            <a:ahLst/>
+            <a:cxnLst>
+              <a:cxn ang="0">
+                <a:pos x="csX0" y="csY0"/>
+              </a:cxn>
+              <a:cxn ang="0">
+                <a:pos x="csX1" y="csY1"/>
+              </a:cxn>
+              <a:cxn ang="0">
+                <a:pos x="csX2" y="csY2"/>
+              </a:cxn>
+              <a:cxn ang="0">
+                <a:pos x="csX3" y="csY3"/>
+              </a:cxn>
+              <a:cxn ang="0">
+                <a:pos x="csX4" y="csY4"/>
+              </a:cxn>
+              <a:cxn ang="0">
+                <a:pos x="csX5" y="csY5"/>
+              </a:cxn>
+              <a:cxn ang="0">
+                <a:pos x="csX6" y="csY6"/>
+              </a:cxn>
+              <a:cxn ang="0">
+                <a:pos x="csX7" y="csY7"/>
+              </a:cxn>
+              <a:cxn ang="0">
+                <a:pos x="csX8" y="csY8"/>
+              </a:cxn>
+              <a:cxn ang="0">
+                <a:pos x="csX9" y="csY9"/>
+              </a:cxn>
+              <a:cxn ang="0">
+                <a:pos x="csX10" y="csY10"/>
+              </a:cxn>
+              <a:cxn ang="0">
+                <a:pos x="csX11" y="csY11"/>
+              </a:cxn>
+              <a:cxn ang="0">
+                <a:pos x="csX12" y="csY12"/>
+              </a:cxn>
+              <a:cxn ang="0">
+                <a:pos x="csX13" y="csY13"/>
+              </a:cxn>
+              <a:cxn ang="0">
+                <a:pos x="csX14" y="csY14"/>
+              </a:cxn>
+              <a:cxn ang="0">
+                <a:pos x="csX15" y="csY15"/>
+              </a:cxn>
+              <a:cxn ang="0">
+                <a:pos x="csX16" y="csY16"/>
+              </a:cxn>
+              <a:cxn ang="0">
+                <a:pos x="csX17" y="csY17"/>
+              </a:cxn>
+              <a:cxn ang="0">
+                <a:pos x="csX18" y="csY18"/>
+              </a:cxn>
+              <a:cxn ang="0">
+                <a:pos x="csX19" y="csY19"/>
+              </a:cxn>
+              <a:cxn ang="0">
+                <a:pos x="csX20" y="csY20"/>
+              </a:cxn>
+              <a:cxn ang="0">
+                <a:pos x="csX21" y="csY21"/>
+              </a:cxn>
+              <a:cxn ang="0">
+                <a:pos x="csX22" y="csY22"/>
+              </a:cxn>
+              <a:cxn ang="0">
+                <a:pos x="csX23" y="csY23"/>
+              </a:cxn>
+              <a:cxn ang="0">
+                <a:pos x="csX24" y="csY24"/>
+              </a:cxn>
+              <a:cxn ang="0">
+                <a:pos x="csX25" y="csY25"/>
+              </a:cxn>
+              <a:cxn ang="0">
+                <a:pos x="csX26" y="csY26"/>
+              </a:cxn>
+              <a:cxn ang="0">
+                <a:pos x="csX27" y="csY27"/>
+              </a:cxn>
+            </a:cxnLst>
+            <a:rect l="l" t="t" r="r" b="b"/>
+            <a:pathLst>
+              <a:path w="3681170" h="4886450" fill="none" extrusionOk="0">
+                <a:moveTo>
+                  <a:pt x="0" y="277376"/>
+                </a:moveTo>
+                <a:cubicBezTo>
+                  <a:pt x="-2382" y="131610"/>
+                  <a:pt x="114005" y="-32059"/>
+                  <a:pt x="277376" y="0"/>
+                </a:cubicBezTo>
+                <a:cubicBezTo>
+                  <a:pt x="482998" y="-19818"/>
+                  <a:pt x="590090" y="1395"/>
+                  <a:pt x="902660" y="0"/>
+                </a:cubicBezTo>
+                <a:cubicBezTo>
+                  <a:pt x="1215230" y="-1395"/>
+                  <a:pt x="1198704" y="-26082"/>
+                  <a:pt x="1465415" y="0"/>
+                </a:cubicBezTo>
+                <a:cubicBezTo>
+                  <a:pt x="1732126" y="26082"/>
+                  <a:pt x="1804049" y="-795"/>
+                  <a:pt x="1996906" y="0"/>
+                </a:cubicBezTo>
+                <a:cubicBezTo>
+                  <a:pt x="2189763" y="795"/>
+                  <a:pt x="2290560" y="27988"/>
+                  <a:pt x="2559661" y="0"/>
+                </a:cubicBezTo>
+                <a:cubicBezTo>
+                  <a:pt x="2828762" y="-27988"/>
+                  <a:pt x="3068028" y="-16970"/>
+                  <a:pt x="3403794" y="0"/>
+                </a:cubicBezTo>
+                <a:cubicBezTo>
+                  <a:pt x="3575267" y="-4839"/>
+                  <a:pt x="3677616" y="148803"/>
+                  <a:pt x="3681170" y="277376"/>
+                </a:cubicBezTo>
+                <a:cubicBezTo>
+                  <a:pt x="3675914" y="413158"/>
+                  <a:pt x="3687449" y="682561"/>
+                  <a:pt x="3681170" y="809556"/>
+                </a:cubicBezTo>
+                <a:cubicBezTo>
+                  <a:pt x="3674891" y="936551"/>
+                  <a:pt x="3656324" y="1211219"/>
+                  <a:pt x="3681170" y="1385053"/>
+                </a:cubicBezTo>
+                <a:cubicBezTo>
+                  <a:pt x="3706016" y="1558887"/>
+                  <a:pt x="3679381" y="1866662"/>
+                  <a:pt x="3681170" y="2003867"/>
+                </a:cubicBezTo>
+                <a:cubicBezTo>
+                  <a:pt x="3682959" y="2141072"/>
+                  <a:pt x="3697198" y="2280725"/>
+                  <a:pt x="3681170" y="2536047"/>
+                </a:cubicBezTo>
+                <a:cubicBezTo>
+                  <a:pt x="3665142" y="2791369"/>
+                  <a:pt x="3689146" y="3063644"/>
+                  <a:pt x="3681170" y="3241495"/>
+                </a:cubicBezTo>
+                <a:cubicBezTo>
+                  <a:pt x="3673194" y="3419346"/>
+                  <a:pt x="3707910" y="3582484"/>
+                  <a:pt x="3681170" y="3860309"/>
+                </a:cubicBezTo>
+                <a:cubicBezTo>
+                  <a:pt x="3654430" y="4138134"/>
+                  <a:pt x="3698136" y="4338688"/>
+                  <a:pt x="3681170" y="4609074"/>
+                </a:cubicBezTo>
+                <a:cubicBezTo>
+                  <a:pt x="3662154" y="4740508"/>
+                  <a:pt x="3566323" y="4876347"/>
+                  <a:pt x="3403794" y="4886450"/>
+                </a:cubicBezTo>
+                <a:cubicBezTo>
+                  <a:pt x="3189474" y="4915631"/>
+                  <a:pt x="2911552" y="4857163"/>
+                  <a:pt x="2715982" y="4886450"/>
+                </a:cubicBezTo>
+                <a:cubicBezTo>
+                  <a:pt x="2520412" y="4915737"/>
+                  <a:pt x="2397115" y="4865802"/>
+                  <a:pt x="2153227" y="4886450"/>
+                </a:cubicBezTo>
+                <a:cubicBezTo>
+                  <a:pt x="1909340" y="4907098"/>
+                  <a:pt x="1836319" y="4867010"/>
+                  <a:pt x="1527943" y="4886450"/>
+                </a:cubicBezTo>
+                <a:cubicBezTo>
+                  <a:pt x="1219567" y="4905890"/>
+                  <a:pt x="1232835" y="4903876"/>
+                  <a:pt x="996452" y="4886450"/>
+                </a:cubicBezTo>
+                <a:cubicBezTo>
+                  <a:pt x="760069" y="4869024"/>
+                  <a:pt x="556389" y="4920066"/>
+                  <a:pt x="277376" y="4886450"/>
+                </a:cubicBezTo>
+                <a:cubicBezTo>
+                  <a:pt x="134591" y="4849902"/>
+                  <a:pt x="-10165" y="4744197"/>
+                  <a:pt x="0" y="4609074"/>
+                </a:cubicBezTo>
+                <a:cubicBezTo>
+                  <a:pt x="5921" y="4353501"/>
+                  <a:pt x="-4072" y="4165107"/>
+                  <a:pt x="0" y="3903626"/>
+                </a:cubicBezTo>
+                <a:cubicBezTo>
+                  <a:pt x="4072" y="3642145"/>
+                  <a:pt x="18162" y="3573699"/>
+                  <a:pt x="0" y="3371446"/>
+                </a:cubicBezTo>
+                <a:cubicBezTo>
+                  <a:pt x="-18162" y="3169193"/>
+                  <a:pt x="947" y="2933425"/>
+                  <a:pt x="0" y="2752632"/>
+                </a:cubicBezTo>
+                <a:cubicBezTo>
+                  <a:pt x="-947" y="2571839"/>
+                  <a:pt x="-26918" y="2357410"/>
+                  <a:pt x="0" y="2090501"/>
+                </a:cubicBezTo>
+                <a:cubicBezTo>
+                  <a:pt x="26918" y="1823592"/>
+                  <a:pt x="-6843" y="1635630"/>
+                  <a:pt x="0" y="1385053"/>
+                </a:cubicBezTo>
+                <a:cubicBezTo>
+                  <a:pt x="6843" y="1134476"/>
+                  <a:pt x="-30945" y="608287"/>
+                  <a:pt x="0" y="277376"/>
+                </a:cubicBezTo>
+                <a:close/>
+              </a:path>
+              <a:path w="3681170" h="4886450" stroke="0" extrusionOk="0">
+                <a:moveTo>
+                  <a:pt x="0" y="277376"/>
+                </a:moveTo>
+                <a:cubicBezTo>
+                  <a:pt x="-27355" y="107312"/>
+                  <a:pt x="120859" y="1248"/>
+                  <a:pt x="277376" y="0"/>
+                </a:cubicBezTo>
+                <a:cubicBezTo>
+                  <a:pt x="481496" y="27229"/>
+                  <a:pt x="735329" y="-5509"/>
+                  <a:pt x="965188" y="0"/>
+                </a:cubicBezTo>
+                <a:cubicBezTo>
+                  <a:pt x="1195047" y="5509"/>
+                  <a:pt x="1384983" y="-3805"/>
+                  <a:pt x="1559207" y="0"/>
+                </a:cubicBezTo>
+                <a:cubicBezTo>
+                  <a:pt x="1733431" y="3805"/>
+                  <a:pt x="1894247" y="-14241"/>
+                  <a:pt x="2121963" y="0"/>
+                </a:cubicBezTo>
+                <a:cubicBezTo>
+                  <a:pt x="2349679" y="14241"/>
+                  <a:pt x="2501809" y="22840"/>
+                  <a:pt x="2778510" y="0"/>
+                </a:cubicBezTo>
+                <a:cubicBezTo>
+                  <a:pt x="3055211" y="-22840"/>
+                  <a:pt x="3176106" y="10708"/>
+                  <a:pt x="3403794" y="0"/>
+                </a:cubicBezTo>
+                <a:cubicBezTo>
+                  <a:pt x="3575691" y="-30442"/>
+                  <a:pt x="3661472" y="141496"/>
+                  <a:pt x="3681170" y="277376"/>
+                </a:cubicBezTo>
+                <a:cubicBezTo>
+                  <a:pt x="3703248" y="437584"/>
+                  <a:pt x="3691417" y="754179"/>
+                  <a:pt x="3681170" y="896190"/>
+                </a:cubicBezTo>
+                <a:cubicBezTo>
+                  <a:pt x="3670923" y="1038201"/>
+                  <a:pt x="3674583" y="1190638"/>
+                  <a:pt x="3681170" y="1385053"/>
+                </a:cubicBezTo>
+                <a:cubicBezTo>
+                  <a:pt x="3687757" y="1579468"/>
+                  <a:pt x="3700939" y="1832329"/>
+                  <a:pt x="3681170" y="2003867"/>
+                </a:cubicBezTo>
+                <a:cubicBezTo>
+                  <a:pt x="3661401" y="2175405"/>
+                  <a:pt x="3668510" y="2375401"/>
+                  <a:pt x="3681170" y="2622681"/>
+                </a:cubicBezTo>
+                <a:cubicBezTo>
+                  <a:pt x="3693830" y="2869961"/>
+                  <a:pt x="3703660" y="2923250"/>
+                  <a:pt x="3681170" y="3198178"/>
+                </a:cubicBezTo>
+                <a:cubicBezTo>
+                  <a:pt x="3658680" y="3473106"/>
+                  <a:pt x="3647919" y="3590011"/>
+                  <a:pt x="3681170" y="3903626"/>
+                </a:cubicBezTo>
+                <a:cubicBezTo>
+                  <a:pt x="3714421" y="4217241"/>
+                  <a:pt x="3669488" y="4373022"/>
+                  <a:pt x="3681170" y="4609074"/>
+                </a:cubicBezTo>
+                <a:cubicBezTo>
+                  <a:pt x="3663055" y="4765240"/>
+                  <a:pt x="3551675" y="4882786"/>
+                  <a:pt x="3403794" y="4886450"/>
+                </a:cubicBezTo>
+                <a:cubicBezTo>
+                  <a:pt x="3208466" y="4885396"/>
+                  <a:pt x="2964667" y="4878518"/>
+                  <a:pt x="2747246" y="4886450"/>
+                </a:cubicBezTo>
+                <a:cubicBezTo>
+                  <a:pt x="2529825" y="4894382"/>
+                  <a:pt x="2249307" y="4883734"/>
+                  <a:pt x="2121963" y="4886450"/>
+                </a:cubicBezTo>
+                <a:cubicBezTo>
+                  <a:pt x="1994619" y="4889166"/>
+                  <a:pt x="1806976" y="4889284"/>
+                  <a:pt x="1590472" y="4886450"/>
+                </a:cubicBezTo>
+                <a:cubicBezTo>
+                  <a:pt x="1373968" y="4883616"/>
+                  <a:pt x="1203623" y="4900068"/>
+                  <a:pt x="1027716" y="4886450"/>
+                </a:cubicBezTo>
+                <a:cubicBezTo>
+                  <a:pt x="851809" y="4872832"/>
+                  <a:pt x="551365" y="4906009"/>
+                  <a:pt x="277376" y="4886450"/>
+                </a:cubicBezTo>
+                <a:cubicBezTo>
+                  <a:pt x="141528" y="4882780"/>
+                  <a:pt x="1970" y="4780971"/>
+                  <a:pt x="0" y="4609074"/>
+                </a:cubicBezTo>
+                <a:cubicBezTo>
+                  <a:pt x="-18540" y="4414515"/>
+                  <a:pt x="16711" y="4197945"/>
+                  <a:pt x="0" y="4076894"/>
+                </a:cubicBezTo>
+                <a:cubicBezTo>
+                  <a:pt x="-16711" y="3955843"/>
+                  <a:pt x="16179" y="3745725"/>
+                  <a:pt x="0" y="3588031"/>
+                </a:cubicBezTo>
+                <a:cubicBezTo>
+                  <a:pt x="-16179" y="3430337"/>
+                  <a:pt x="-8111" y="3324562"/>
+                  <a:pt x="0" y="3099168"/>
+                </a:cubicBezTo>
+                <a:cubicBezTo>
+                  <a:pt x="8111" y="2873774"/>
+                  <a:pt x="21471" y="2639673"/>
+                  <a:pt x="0" y="2480354"/>
+                </a:cubicBezTo>
+                <a:cubicBezTo>
+                  <a:pt x="-21471" y="2321035"/>
+                  <a:pt x="-19940" y="2141130"/>
+                  <a:pt x="0" y="1948174"/>
+                </a:cubicBezTo>
+                <a:cubicBezTo>
+                  <a:pt x="19940" y="1755218"/>
+                  <a:pt x="-3809" y="1608928"/>
+                  <a:pt x="0" y="1286043"/>
+                </a:cubicBezTo>
+                <a:cubicBezTo>
+                  <a:pt x="3809" y="963158"/>
+                  <a:pt x="40026" y="756601"/>
+                  <a:pt x="0" y="277376"/>
+                </a:cubicBezTo>
+                <a:close/>
+              </a:path>
+            </a:pathLst>
+          </a:custGeom>
+          <a:solidFill>
+            <a:srgbClr val="C00000">
+              <a:alpha val="6998"/>
+            </a:srgbClr>
+          </a:solidFill>
+          <a:ln>
+            <a:solidFill>
+              <a:srgbClr val="F7EBEA"/>
+            </a:solidFill>
+            <a:extLst>
+              <a:ext uri="{C807C97D-BFC1-408E-A445-0C87EB9F89A2}">
+                <ask:lineSketchStyleProps xmlns:ask="http://schemas.microsoft.com/office/drawing/2018/sketchyshapes" sd="1219033472">
+                  <a:prstGeom prst="roundRect">
+                    <a:avLst>
+                      <a:gd name="adj" fmla="val 7535"/>
+                    </a:avLst>
+                  </a:prstGeom>
+                  <ask:type>
+                    <ask:lineSketchFreehand/>
+                  </ask:type>
+                </ask:lineSketchStyleProps>
+              </a:ext>
+            </a:extLst>
+          </a:ln>
+        </p:spPr>
+        <p:style>
+          <a:lnRef idx="2">
+            <a:schemeClr val="accent1">
+              <a:shade val="15000"/>
+            </a:schemeClr>
+          </a:lnRef>
+          <a:fillRef idx="1">
+            <a:schemeClr val="accent1"/>
+          </a:fillRef>
+          <a:effectRef idx="0">
+            <a:schemeClr val="accent1"/>
+          </a:effectRef>
+          <a:fontRef idx="minor">
+            <a:schemeClr val="lt1"/>
+          </a:fontRef>
+        </p:style>
+        <p:txBody>
+          <a:bodyPr rtlCol="0" anchor="ctr"/>
+          <a:lstStyle/>
+          <a:p>
+            <a:pPr algn="ctr"/>
+            <a:endParaRPr lang="en-US" dirty="0"/>
+          </a:p>
+        </p:txBody>
+      </p:sp>
+      <p:sp>
+        <p:nvSpPr>
+          <p:cNvPr id="14" name="Rounded Rectangle 13">
+            <a:extLst>
+              <a:ext uri="{FF2B5EF4-FFF2-40B4-BE49-F238E27FC236}">
+                <a16:creationId xmlns:a16="http://schemas.microsoft.com/office/drawing/2014/main" id="{A2871A05-D86F-1A25-7625-8BE81AE2725E}"/>
+              </a:ext>
+            </a:extLst>
+          </p:cNvPr>
+          <p:cNvSpPr/>
+          <p:nvPr/>
+        </p:nvSpPr>
+        <p:spPr>
+          <a:xfrm>
+            <a:off x="1533625" y="2724687"/>
+            <a:ext cx="10316273" cy="2527225"/>
+          </a:xfrm>
+          <a:custGeom>
+            <a:avLst/>
+            <a:gdLst>
+              <a:gd name="csX0" fmla="*/ 0 w 10316273"/>
+              <a:gd name="csY0" fmla="*/ 421213 h 2527225"/>
+              <a:gd name="csX1" fmla="*/ 421213 w 10316273"/>
+              <a:gd name="csY1" fmla="*/ 0 h 2527225"/>
+              <a:gd name="csX2" fmla="*/ 918590 w 10316273"/>
+              <a:gd name="csY2" fmla="*/ 0 h 2527225"/>
+              <a:gd name="csX3" fmla="*/ 1226490 w 10316273"/>
+              <a:gd name="csY3" fmla="*/ 0 h 2527225"/>
+              <a:gd name="csX4" fmla="*/ 2008082 w 10316273"/>
+              <a:gd name="csY4" fmla="*/ 0 h 2527225"/>
+              <a:gd name="csX5" fmla="*/ 2600198 w 10316273"/>
+              <a:gd name="csY5" fmla="*/ 0 h 2527225"/>
+              <a:gd name="csX6" fmla="*/ 3381790 w 10316273"/>
+              <a:gd name="csY6" fmla="*/ 0 h 2527225"/>
+              <a:gd name="csX7" fmla="*/ 3879167 w 10316273"/>
+              <a:gd name="csY7" fmla="*/ 0 h 2527225"/>
+              <a:gd name="csX8" fmla="*/ 4281806 w 10316273"/>
+              <a:gd name="csY8" fmla="*/ 0 h 2527225"/>
+              <a:gd name="csX9" fmla="*/ 4873921 w 10316273"/>
+              <a:gd name="csY9" fmla="*/ 0 h 2527225"/>
+              <a:gd name="csX10" fmla="*/ 5560775 w 10316273"/>
+              <a:gd name="csY10" fmla="*/ 0 h 2527225"/>
+              <a:gd name="csX11" fmla="*/ 6342367 w 10316273"/>
+              <a:gd name="csY11" fmla="*/ 0 h 2527225"/>
+              <a:gd name="csX12" fmla="*/ 7029221 w 10316273"/>
+              <a:gd name="csY12" fmla="*/ 0 h 2527225"/>
+              <a:gd name="csX13" fmla="*/ 7810814 w 10316273"/>
+              <a:gd name="csY13" fmla="*/ 0 h 2527225"/>
+              <a:gd name="csX14" fmla="*/ 8497668 w 10316273"/>
+              <a:gd name="csY14" fmla="*/ 0 h 2527225"/>
+              <a:gd name="csX15" fmla="*/ 8900306 w 10316273"/>
+              <a:gd name="csY15" fmla="*/ 0 h 2527225"/>
+              <a:gd name="csX16" fmla="*/ 9895060 w 10316273"/>
+              <a:gd name="csY16" fmla="*/ 0 h 2527225"/>
+              <a:gd name="csX17" fmla="*/ 10316273 w 10316273"/>
+              <a:gd name="csY17" fmla="*/ 421213 h 2527225"/>
+              <a:gd name="csX18" fmla="*/ 10316273 w 10316273"/>
+              <a:gd name="csY18" fmla="*/ 999661 h 2527225"/>
+              <a:gd name="csX19" fmla="*/ 10316273 w 10316273"/>
+              <a:gd name="csY19" fmla="*/ 1527564 h 2527225"/>
+              <a:gd name="csX20" fmla="*/ 10316273 w 10316273"/>
+              <a:gd name="csY20" fmla="*/ 2106012 h 2527225"/>
+              <a:gd name="csX21" fmla="*/ 9895060 w 10316273"/>
+              <a:gd name="csY21" fmla="*/ 2527225 h 2527225"/>
+              <a:gd name="csX22" fmla="*/ 9113468 w 10316273"/>
+              <a:gd name="csY22" fmla="*/ 2527225 h 2527225"/>
+              <a:gd name="csX23" fmla="*/ 8331875 w 10316273"/>
+              <a:gd name="csY23" fmla="*/ 2527225 h 2527225"/>
+              <a:gd name="csX24" fmla="*/ 7929237 w 10316273"/>
+              <a:gd name="csY24" fmla="*/ 2527225 h 2527225"/>
+              <a:gd name="csX25" fmla="*/ 7147644 w 10316273"/>
+              <a:gd name="csY25" fmla="*/ 2527225 h 2527225"/>
+              <a:gd name="csX26" fmla="*/ 6745006 w 10316273"/>
+              <a:gd name="csY26" fmla="*/ 2527225 h 2527225"/>
+              <a:gd name="csX27" fmla="*/ 6058152 w 10316273"/>
+              <a:gd name="csY27" fmla="*/ 2527225 h 2527225"/>
+              <a:gd name="csX28" fmla="*/ 5276560 w 10316273"/>
+              <a:gd name="csY28" fmla="*/ 2527225 h 2527225"/>
+              <a:gd name="csX29" fmla="*/ 4968660 w 10316273"/>
+              <a:gd name="csY29" fmla="*/ 2527225 h 2527225"/>
+              <a:gd name="csX30" fmla="*/ 4187067 w 10316273"/>
+              <a:gd name="csY30" fmla="*/ 2527225 h 2527225"/>
+              <a:gd name="csX31" fmla="*/ 3405475 w 10316273"/>
+              <a:gd name="csY31" fmla="*/ 2527225 h 2527225"/>
+              <a:gd name="csX32" fmla="*/ 3097575 w 10316273"/>
+              <a:gd name="csY32" fmla="*/ 2527225 h 2527225"/>
+              <a:gd name="csX33" fmla="*/ 2505459 w 10316273"/>
+              <a:gd name="csY33" fmla="*/ 2527225 h 2527225"/>
+              <a:gd name="csX34" fmla="*/ 2008082 w 10316273"/>
+              <a:gd name="csY34" fmla="*/ 2527225 h 2527225"/>
+              <a:gd name="csX35" fmla="*/ 1510705 w 10316273"/>
+              <a:gd name="csY35" fmla="*/ 2527225 h 2527225"/>
+              <a:gd name="csX36" fmla="*/ 1013328 w 10316273"/>
+              <a:gd name="csY36" fmla="*/ 2527225 h 2527225"/>
+              <a:gd name="csX37" fmla="*/ 421213 w 10316273"/>
+              <a:gd name="csY37" fmla="*/ 2527225 h 2527225"/>
+              <a:gd name="csX38" fmla="*/ 0 w 10316273"/>
+              <a:gd name="csY38" fmla="*/ 2106012 h 2527225"/>
+              <a:gd name="csX39" fmla="*/ 0 w 10316273"/>
+              <a:gd name="csY39" fmla="*/ 1544412 h 2527225"/>
+              <a:gd name="csX40" fmla="*/ 0 w 10316273"/>
+              <a:gd name="csY40" fmla="*/ 1016509 h 2527225"/>
+              <a:gd name="csX41" fmla="*/ 0 w 10316273"/>
+              <a:gd name="csY41" fmla="*/ 421213 h 2527225"/>
+            </a:gdLst>
+            <a:ahLst/>
+            <a:cxnLst>
+              <a:cxn ang="0">
+                <a:pos x="csX0" y="csY0"/>
+              </a:cxn>
+              <a:cxn ang="0">
+                <a:pos x="csX1" y="csY1"/>
+              </a:cxn>
+              <a:cxn ang="0">
+                <a:pos x="csX2" y="csY2"/>
+              </a:cxn>
+              <a:cxn ang="0">
+                <a:pos x="csX3" y="csY3"/>
+              </a:cxn>
+              <a:cxn ang="0">
+                <a:pos x="csX4" y="csY4"/>
+              </a:cxn>
+              <a:cxn ang="0">
+                <a:pos x="csX5" y="csY5"/>
+              </a:cxn>
+              <a:cxn ang="0">
+                <a:pos x="csX6" y="csY6"/>
+              </a:cxn>
+              <a:cxn ang="0">
+                <a:pos x="csX7" y="csY7"/>
+              </a:cxn>
+              <a:cxn ang="0">
+                <a:pos x="csX8" y="csY8"/>
+              </a:cxn>
+              <a:cxn ang="0">
+                <a:pos x="csX9" y="csY9"/>
+              </a:cxn>
+              <a:cxn ang="0">
+                <a:pos x="csX10" y="csY10"/>
+              </a:cxn>
+              <a:cxn ang="0">
+                <a:pos x="csX11" y="csY11"/>
+              </a:cxn>
+              <a:cxn ang="0">
+                <a:pos x="csX12" y="csY12"/>
+              </a:cxn>
+              <a:cxn ang="0">
+                <a:pos x="csX13" y="csY13"/>
+              </a:cxn>
+              <a:cxn ang="0">
+                <a:pos x="csX14" y="csY14"/>
+              </a:cxn>
+              <a:cxn ang="0">
+                <a:pos x="csX15" y="csY15"/>
+              </a:cxn>
+              <a:cxn ang="0">
+                <a:pos x="csX16" y="csY16"/>
+              </a:cxn>
+              <a:cxn ang="0">
+                <a:pos x="csX17" y="csY17"/>
+              </a:cxn>
+              <a:cxn ang="0">
+                <a:pos x="csX18" y="csY18"/>
+              </a:cxn>
+              <a:cxn ang="0">
+                <a:pos x="csX19" y="csY19"/>
+              </a:cxn>
+              <a:cxn ang="0">
+                <a:pos x="csX20" y="csY20"/>
+              </a:cxn>
+              <a:cxn ang="0">
+                <a:pos x="csX21" y="csY21"/>
+              </a:cxn>
+              <a:cxn ang="0">
+                <a:pos x="csX22" y="csY22"/>
+              </a:cxn>
+              <a:cxn ang="0">
+                <a:pos x="csX23" y="csY23"/>
+              </a:cxn>
+              <a:cxn ang="0">
+                <a:pos x="csX24" y="csY24"/>
+              </a:cxn>
+              <a:cxn ang="0">
+                <a:pos x="csX25" y="csY25"/>
+              </a:cxn>
+              <a:cxn ang="0">
+                <a:pos x="csX26" y="csY26"/>
+              </a:cxn>
+              <a:cxn ang="0">
+                <a:pos x="csX27" y="csY27"/>
+              </a:cxn>
+              <a:cxn ang="0">
+                <a:pos x="csX28" y="csY28"/>
+              </a:cxn>
+              <a:cxn ang="0">
+                <a:pos x="csX29" y="csY29"/>
+              </a:cxn>
+              <a:cxn ang="0">
+                <a:pos x="csX30" y="csY30"/>
+              </a:cxn>
+              <a:cxn ang="0">
+                <a:pos x="csX31" y="csY31"/>
+              </a:cxn>
+              <a:cxn ang="0">
+                <a:pos x="csX32" y="csY32"/>
+              </a:cxn>
+              <a:cxn ang="0">
+                <a:pos x="csX33" y="csY33"/>
+              </a:cxn>
+              <a:cxn ang="0">
+                <a:pos x="csX34" y="csY34"/>
+              </a:cxn>
+              <a:cxn ang="0">
+                <a:pos x="csX35" y="csY35"/>
+              </a:cxn>
+              <a:cxn ang="0">
+                <a:pos x="csX36" y="csY36"/>
+              </a:cxn>
+              <a:cxn ang="0">
+                <a:pos x="csX37" y="csY37"/>
+              </a:cxn>
+              <a:cxn ang="0">
+                <a:pos x="csX38" y="csY38"/>
+              </a:cxn>
+              <a:cxn ang="0">
+                <a:pos x="csX39" y="csY39"/>
+              </a:cxn>
+              <a:cxn ang="0">
+                <a:pos x="csX40" y="csY40"/>
+              </a:cxn>
+              <a:cxn ang="0">
+                <a:pos x="csX41" y="csY41"/>
+              </a:cxn>
+            </a:cxnLst>
+            <a:rect l="l" t="t" r="r" b="b"/>
+            <a:pathLst>
+              <a:path w="10316273" h="2527225" fill="none" extrusionOk="0">
+                <a:moveTo>
+                  <a:pt x="0" y="421213"/>
+                </a:moveTo>
+                <a:cubicBezTo>
+                  <a:pt x="51669" y="197441"/>
+                  <a:pt x="141022" y="17401"/>
+                  <a:pt x="421213" y="0"/>
+                </a:cubicBezTo>
+                <a:cubicBezTo>
+                  <a:pt x="594885" y="-24275"/>
+                  <a:pt x="695638" y="26976"/>
+                  <a:pt x="918590" y="0"/>
+                </a:cubicBezTo>
+                <a:cubicBezTo>
+                  <a:pt x="1141542" y="-26976"/>
+                  <a:pt x="1109971" y="18389"/>
+                  <a:pt x="1226490" y="0"/>
+                </a:cubicBezTo>
+                <a:cubicBezTo>
+                  <a:pt x="1343009" y="-18389"/>
+                  <a:pt x="1680361" y="25761"/>
+                  <a:pt x="2008082" y="0"/>
+                </a:cubicBezTo>
+                <a:cubicBezTo>
+                  <a:pt x="2335803" y="-25761"/>
+                  <a:pt x="2438399" y="23755"/>
+                  <a:pt x="2600198" y="0"/>
+                </a:cubicBezTo>
+                <a:cubicBezTo>
+                  <a:pt x="2761997" y="-23755"/>
+                  <a:pt x="3214636" y="93775"/>
+                  <a:pt x="3381790" y="0"/>
+                </a:cubicBezTo>
+                <a:cubicBezTo>
+                  <a:pt x="3548944" y="-93775"/>
+                  <a:pt x="3761836" y="31522"/>
+                  <a:pt x="3879167" y="0"/>
+                </a:cubicBezTo>
+                <a:cubicBezTo>
+                  <a:pt x="3996498" y="-31522"/>
+                  <a:pt x="4089565" y="32560"/>
+                  <a:pt x="4281806" y="0"/>
+                </a:cubicBezTo>
+                <a:cubicBezTo>
+                  <a:pt x="4474047" y="-32560"/>
+                  <a:pt x="4727404" y="13273"/>
+                  <a:pt x="4873921" y="0"/>
+                </a:cubicBezTo>
+                <a:cubicBezTo>
+                  <a:pt x="5020439" y="-13273"/>
+                  <a:pt x="5244867" y="78989"/>
+                  <a:pt x="5560775" y="0"/>
+                </a:cubicBezTo>
+                <a:cubicBezTo>
+                  <a:pt x="5876683" y="-78989"/>
+                  <a:pt x="6130897" y="38074"/>
+                  <a:pt x="6342367" y="0"/>
+                </a:cubicBezTo>
+                <a:cubicBezTo>
+                  <a:pt x="6553837" y="-38074"/>
+                  <a:pt x="6688108" y="69510"/>
+                  <a:pt x="7029221" y="0"/>
+                </a:cubicBezTo>
+                <a:cubicBezTo>
+                  <a:pt x="7370334" y="-69510"/>
+                  <a:pt x="7543316" y="81914"/>
+                  <a:pt x="7810814" y="0"/>
+                </a:cubicBezTo>
+                <a:cubicBezTo>
+                  <a:pt x="8078312" y="-81914"/>
+                  <a:pt x="8161840" y="6457"/>
+                  <a:pt x="8497668" y="0"/>
+                </a:cubicBezTo>
+                <a:cubicBezTo>
+                  <a:pt x="8833496" y="-6457"/>
+                  <a:pt x="8769077" y="44030"/>
+                  <a:pt x="8900306" y="0"/>
+                </a:cubicBezTo>
+                <a:cubicBezTo>
+                  <a:pt x="9031535" y="-44030"/>
+                  <a:pt x="9679429" y="78718"/>
+                  <a:pt x="9895060" y="0"/>
+                </a:cubicBezTo>
+                <a:cubicBezTo>
+                  <a:pt x="10141354" y="2105"/>
+                  <a:pt x="10345572" y="233534"/>
+                  <a:pt x="10316273" y="421213"/>
+                </a:cubicBezTo>
+                <a:cubicBezTo>
+                  <a:pt x="10334182" y="599830"/>
+                  <a:pt x="10260369" y="880741"/>
+                  <a:pt x="10316273" y="999661"/>
+                </a:cubicBezTo>
+                <a:cubicBezTo>
+                  <a:pt x="10372177" y="1118581"/>
+                  <a:pt x="10275617" y="1285408"/>
+                  <a:pt x="10316273" y="1527564"/>
+                </a:cubicBezTo>
+                <a:cubicBezTo>
+                  <a:pt x="10356929" y="1769720"/>
+                  <a:pt x="10249670" y="1972884"/>
+                  <a:pt x="10316273" y="2106012"/>
+                </a:cubicBezTo>
+                <a:cubicBezTo>
+                  <a:pt x="10352401" y="2313759"/>
+                  <a:pt x="10179570" y="2483341"/>
+                  <a:pt x="9895060" y="2527225"/>
+                </a:cubicBezTo>
+                <a:cubicBezTo>
+                  <a:pt x="9705636" y="2543820"/>
+                  <a:pt x="9401348" y="2510440"/>
+                  <a:pt x="9113468" y="2527225"/>
+                </a:cubicBezTo>
+                <a:cubicBezTo>
+                  <a:pt x="8825588" y="2544010"/>
+                  <a:pt x="8590653" y="2527020"/>
+                  <a:pt x="8331875" y="2527225"/>
+                </a:cubicBezTo>
+                <a:cubicBezTo>
+                  <a:pt x="8073097" y="2527430"/>
+                  <a:pt x="8023038" y="2482627"/>
+                  <a:pt x="7929237" y="2527225"/>
+                </a:cubicBezTo>
+                <a:cubicBezTo>
+                  <a:pt x="7835436" y="2571823"/>
+                  <a:pt x="7312929" y="2466538"/>
+                  <a:pt x="7147644" y="2527225"/>
+                </a:cubicBezTo>
+                <a:cubicBezTo>
+                  <a:pt x="6982359" y="2587912"/>
+                  <a:pt x="6913830" y="2525705"/>
+                  <a:pt x="6745006" y="2527225"/>
+                </a:cubicBezTo>
+                <a:cubicBezTo>
+                  <a:pt x="6576182" y="2528745"/>
+                  <a:pt x="6237367" y="2525023"/>
+                  <a:pt x="6058152" y="2527225"/>
+                </a:cubicBezTo>
+                <a:cubicBezTo>
+                  <a:pt x="5878937" y="2529427"/>
+                  <a:pt x="5478096" y="2450476"/>
+                  <a:pt x="5276560" y="2527225"/>
+                </a:cubicBezTo>
+                <a:cubicBezTo>
+                  <a:pt x="5075024" y="2603974"/>
+                  <a:pt x="5041307" y="2503253"/>
+                  <a:pt x="4968660" y="2527225"/>
+                </a:cubicBezTo>
+                <a:cubicBezTo>
+                  <a:pt x="4896013" y="2551197"/>
+                  <a:pt x="4388701" y="2465481"/>
+                  <a:pt x="4187067" y="2527225"/>
+                </a:cubicBezTo>
+                <a:cubicBezTo>
+                  <a:pt x="3985433" y="2588969"/>
+                  <a:pt x="3603599" y="2485440"/>
+                  <a:pt x="3405475" y="2527225"/>
+                </a:cubicBezTo>
+                <a:cubicBezTo>
+                  <a:pt x="3207351" y="2569010"/>
+                  <a:pt x="3168852" y="2511164"/>
+                  <a:pt x="3097575" y="2527225"/>
+                </a:cubicBezTo>
+                <a:cubicBezTo>
+                  <a:pt x="3026298" y="2543286"/>
+                  <a:pt x="2687707" y="2476276"/>
+                  <a:pt x="2505459" y="2527225"/>
+                </a:cubicBezTo>
+                <a:cubicBezTo>
+                  <a:pt x="2323211" y="2578174"/>
+                  <a:pt x="2155111" y="2498137"/>
+                  <a:pt x="2008082" y="2527225"/>
+                </a:cubicBezTo>
+                <a:cubicBezTo>
+                  <a:pt x="1861053" y="2556313"/>
+                  <a:pt x="1749454" y="2469366"/>
+                  <a:pt x="1510705" y="2527225"/>
+                </a:cubicBezTo>
+                <a:cubicBezTo>
+                  <a:pt x="1271956" y="2585084"/>
+                  <a:pt x="1200846" y="2514079"/>
+                  <a:pt x="1013328" y="2527225"/>
+                </a:cubicBezTo>
+                <a:cubicBezTo>
+                  <a:pt x="825810" y="2540371"/>
+                  <a:pt x="710100" y="2502683"/>
+                  <a:pt x="421213" y="2527225"/>
+                </a:cubicBezTo>
+                <a:cubicBezTo>
+                  <a:pt x="197323" y="2475324"/>
+                  <a:pt x="-2300" y="2333565"/>
+                  <a:pt x="0" y="2106012"/>
+                </a:cubicBezTo>
+                <a:cubicBezTo>
+                  <a:pt x="-53514" y="1893537"/>
+                  <a:pt x="13293" y="1808911"/>
+                  <a:pt x="0" y="1544412"/>
+                </a:cubicBezTo>
+                <a:cubicBezTo>
+                  <a:pt x="-13293" y="1279913"/>
+                  <a:pt x="19314" y="1153245"/>
+                  <a:pt x="0" y="1016509"/>
+                </a:cubicBezTo>
+                <a:cubicBezTo>
+                  <a:pt x="-19314" y="879773"/>
+                  <a:pt x="63383" y="568095"/>
+                  <a:pt x="0" y="421213"/>
+                </a:cubicBezTo>
+                <a:close/>
+              </a:path>
+              <a:path w="10316273" h="2527225" stroke="0" extrusionOk="0">
+                <a:moveTo>
+                  <a:pt x="0" y="421213"/>
+                </a:moveTo>
+                <a:cubicBezTo>
+                  <a:pt x="-30517" y="169759"/>
+                  <a:pt x="169406" y="7197"/>
+                  <a:pt x="421213" y="0"/>
+                </a:cubicBezTo>
+                <a:cubicBezTo>
+                  <a:pt x="762070" y="-37070"/>
+                  <a:pt x="983768" y="50349"/>
+                  <a:pt x="1202805" y="0"/>
+                </a:cubicBezTo>
+                <a:cubicBezTo>
+                  <a:pt x="1421842" y="-50349"/>
+                  <a:pt x="1492711" y="13786"/>
+                  <a:pt x="1700182" y="0"/>
+                </a:cubicBezTo>
+                <a:cubicBezTo>
+                  <a:pt x="1907653" y="-13786"/>
+                  <a:pt x="1961557" y="26407"/>
+                  <a:pt x="2102821" y="0"/>
+                </a:cubicBezTo>
+                <a:cubicBezTo>
+                  <a:pt x="2244085" y="-26407"/>
+                  <a:pt x="2561592" y="71793"/>
+                  <a:pt x="2789675" y="0"/>
+                </a:cubicBezTo>
+                <a:cubicBezTo>
+                  <a:pt x="3017758" y="-71793"/>
+                  <a:pt x="3162127" y="58117"/>
+                  <a:pt x="3287052" y="0"/>
+                </a:cubicBezTo>
+                <a:cubicBezTo>
+                  <a:pt x="3411977" y="-58117"/>
+                  <a:pt x="3690737" y="61456"/>
+                  <a:pt x="4068644" y="0"/>
+                </a:cubicBezTo>
+                <a:cubicBezTo>
+                  <a:pt x="4446551" y="-61456"/>
+                  <a:pt x="4344043" y="18433"/>
+                  <a:pt x="4471283" y="0"/>
+                </a:cubicBezTo>
+                <a:cubicBezTo>
+                  <a:pt x="4598523" y="-18433"/>
+                  <a:pt x="4925927" y="62641"/>
+                  <a:pt x="5252875" y="0"/>
+                </a:cubicBezTo>
+                <a:cubicBezTo>
+                  <a:pt x="5579823" y="-62641"/>
+                  <a:pt x="5477464" y="20399"/>
+                  <a:pt x="5560775" y="0"/>
+                </a:cubicBezTo>
+                <a:cubicBezTo>
+                  <a:pt x="5644086" y="-20399"/>
+                  <a:pt x="5988154" y="11283"/>
+                  <a:pt x="6152890" y="0"/>
+                </a:cubicBezTo>
+                <a:cubicBezTo>
+                  <a:pt x="6317627" y="-11283"/>
+                  <a:pt x="6491509" y="28199"/>
+                  <a:pt x="6745006" y="0"/>
+                </a:cubicBezTo>
+                <a:cubicBezTo>
+                  <a:pt x="6998503" y="-28199"/>
+                  <a:pt x="7093597" y="31347"/>
+                  <a:pt x="7242383" y="0"/>
+                </a:cubicBezTo>
+                <a:cubicBezTo>
+                  <a:pt x="7391169" y="-31347"/>
+                  <a:pt x="7653382" y="8363"/>
+                  <a:pt x="8023975" y="0"/>
+                </a:cubicBezTo>
+                <a:cubicBezTo>
+                  <a:pt x="8394568" y="-8363"/>
+                  <a:pt x="8562267" y="60961"/>
+                  <a:pt x="8805568" y="0"/>
+                </a:cubicBezTo>
+                <a:cubicBezTo>
+                  <a:pt x="9048869" y="-60961"/>
+                  <a:pt x="9037505" y="4037"/>
+                  <a:pt x="9208206" y="0"/>
+                </a:cubicBezTo>
+                <a:cubicBezTo>
+                  <a:pt x="9378907" y="-4037"/>
+                  <a:pt x="9643337" y="15666"/>
+                  <a:pt x="9895060" y="0"/>
+                </a:cubicBezTo>
+                <a:cubicBezTo>
+                  <a:pt x="10103083" y="-50159"/>
+                  <a:pt x="10319985" y="138376"/>
+                  <a:pt x="10316273" y="421213"/>
+                </a:cubicBezTo>
+                <a:cubicBezTo>
+                  <a:pt x="10370052" y="541271"/>
+                  <a:pt x="10267542" y="780949"/>
+                  <a:pt x="10316273" y="999661"/>
+                </a:cubicBezTo>
+                <a:cubicBezTo>
+                  <a:pt x="10365004" y="1218373"/>
+                  <a:pt x="10277465" y="1285620"/>
+                  <a:pt x="10316273" y="1527564"/>
+                </a:cubicBezTo>
+                <a:cubicBezTo>
+                  <a:pt x="10355081" y="1769508"/>
+                  <a:pt x="10288624" y="1949729"/>
+                  <a:pt x="10316273" y="2106012"/>
+                </a:cubicBezTo>
+                <a:cubicBezTo>
+                  <a:pt x="10345560" y="2332445"/>
+                  <a:pt x="10131548" y="2563856"/>
+                  <a:pt x="9895060" y="2527225"/>
+                </a:cubicBezTo>
+                <a:cubicBezTo>
+                  <a:pt x="9732707" y="2561845"/>
+                  <a:pt x="9650439" y="2520924"/>
+                  <a:pt x="9492422" y="2527225"/>
+                </a:cubicBezTo>
+                <a:cubicBezTo>
+                  <a:pt x="9334405" y="2533526"/>
+                  <a:pt x="9324242" y="2498991"/>
+                  <a:pt x="9184521" y="2527225"/>
+                </a:cubicBezTo>
+                <a:cubicBezTo>
+                  <a:pt x="9044800" y="2555459"/>
+                  <a:pt x="8981433" y="2495479"/>
+                  <a:pt x="8876621" y="2527225"/>
+                </a:cubicBezTo>
+                <a:cubicBezTo>
+                  <a:pt x="8771809" y="2558971"/>
+                  <a:pt x="8504762" y="2474306"/>
+                  <a:pt x="8284506" y="2527225"/>
+                </a:cubicBezTo>
+                <a:cubicBezTo>
+                  <a:pt x="8064250" y="2580144"/>
+                  <a:pt x="8037944" y="2479809"/>
+                  <a:pt x="7881868" y="2527225"/>
+                </a:cubicBezTo>
+                <a:cubicBezTo>
+                  <a:pt x="7725792" y="2574641"/>
+                  <a:pt x="7371608" y="2515575"/>
+                  <a:pt x="7195014" y="2527225"/>
+                </a:cubicBezTo>
+                <a:cubicBezTo>
+                  <a:pt x="7018420" y="2538875"/>
+                  <a:pt x="6990983" y="2484193"/>
+                  <a:pt x="6792375" y="2527225"/>
+                </a:cubicBezTo>
+                <a:cubicBezTo>
+                  <a:pt x="6593767" y="2570257"/>
+                  <a:pt x="6390629" y="2482726"/>
+                  <a:pt x="6105521" y="2527225"/>
+                </a:cubicBezTo>
+                <a:cubicBezTo>
+                  <a:pt x="5820413" y="2571724"/>
+                  <a:pt x="5869722" y="2515119"/>
+                  <a:pt x="5797621" y="2527225"/>
+                </a:cubicBezTo>
+                <a:cubicBezTo>
+                  <a:pt x="5725520" y="2539331"/>
+                  <a:pt x="5410820" y="2472178"/>
+                  <a:pt x="5110767" y="2527225"/>
+                </a:cubicBezTo>
+                <a:cubicBezTo>
+                  <a:pt x="4810714" y="2582272"/>
+                  <a:pt x="4847454" y="2517669"/>
+                  <a:pt x="4708129" y="2527225"/>
+                </a:cubicBezTo>
+                <a:cubicBezTo>
+                  <a:pt x="4568804" y="2536781"/>
+                  <a:pt x="4471706" y="2517152"/>
+                  <a:pt x="4400229" y="2527225"/>
+                </a:cubicBezTo>
+                <a:cubicBezTo>
+                  <a:pt x="4328752" y="2537298"/>
+                  <a:pt x="4165276" y="2482620"/>
+                  <a:pt x="3997590" y="2527225"/>
+                </a:cubicBezTo>
+                <a:cubicBezTo>
+                  <a:pt x="3829904" y="2571830"/>
+                  <a:pt x="3472110" y="2489610"/>
+                  <a:pt x="3310736" y="2527225"/>
+                </a:cubicBezTo>
+                <a:cubicBezTo>
+                  <a:pt x="3149362" y="2564840"/>
+                  <a:pt x="3004242" y="2492067"/>
+                  <a:pt x="2908098" y="2527225"/>
+                </a:cubicBezTo>
+                <a:cubicBezTo>
+                  <a:pt x="2811954" y="2562383"/>
+                  <a:pt x="2694697" y="2497771"/>
+                  <a:pt x="2600198" y="2527225"/>
+                </a:cubicBezTo>
+                <a:cubicBezTo>
+                  <a:pt x="2505699" y="2556679"/>
+                  <a:pt x="2314371" y="2517868"/>
+                  <a:pt x="2197559" y="2527225"/>
+                </a:cubicBezTo>
+                <a:cubicBezTo>
+                  <a:pt x="2080747" y="2536582"/>
+                  <a:pt x="1846770" y="2496742"/>
+                  <a:pt x="1700182" y="2527225"/>
+                </a:cubicBezTo>
+                <a:cubicBezTo>
+                  <a:pt x="1553594" y="2557708"/>
+                  <a:pt x="1237905" y="2460531"/>
+                  <a:pt x="1108067" y="2527225"/>
+                </a:cubicBezTo>
+                <a:cubicBezTo>
+                  <a:pt x="978230" y="2593919"/>
+                  <a:pt x="651726" y="2500802"/>
+                  <a:pt x="421213" y="2527225"/>
+                </a:cubicBezTo>
+                <a:cubicBezTo>
+                  <a:pt x="211858" y="2587052"/>
+                  <a:pt x="20932" y="2348380"/>
+                  <a:pt x="0" y="2106012"/>
+                </a:cubicBezTo>
+                <a:cubicBezTo>
+                  <a:pt x="-48283" y="1906135"/>
+                  <a:pt x="66219" y="1800603"/>
+                  <a:pt x="0" y="1544412"/>
+                </a:cubicBezTo>
+                <a:cubicBezTo>
+                  <a:pt x="-66219" y="1288221"/>
+                  <a:pt x="30460" y="1216228"/>
+                  <a:pt x="0" y="965965"/>
+                </a:cubicBezTo>
+                <a:cubicBezTo>
+                  <a:pt x="-30460" y="715702"/>
+                  <a:pt x="41895" y="562396"/>
+                  <a:pt x="0" y="421213"/>
+                </a:cubicBezTo>
+                <a:close/>
+              </a:path>
+            </a:pathLst>
+          </a:custGeom>
+          <a:solidFill>
+            <a:schemeClr val="bg1">
+              <a:lumMod val="65000"/>
+              <a:alpha val="6998"/>
+            </a:schemeClr>
+          </a:solidFill>
+          <a:ln>
+            <a:solidFill>
+              <a:schemeClr val="bg1">
+                <a:lumMod val="85000"/>
+              </a:schemeClr>
+            </a:solidFill>
+            <a:extLst>
+              <a:ext uri="{C807C97D-BFC1-408E-A445-0C87EB9F89A2}">
+                <ask:lineSketchStyleProps xmlns:ask="http://schemas.microsoft.com/office/drawing/2018/sketchyshapes" sd="1219033472">
+                  <a:prstGeom prst="roundRect">
+                    <a:avLst/>
+                  </a:prstGeom>
+                  <ask:type>
+                    <ask:lineSketchScribble/>
+                  </ask:type>
+                </ask:lineSketchStyleProps>
+              </a:ext>
+            </a:extLst>
+          </a:ln>
+        </p:spPr>
+        <p:style>
+          <a:lnRef idx="2">
+            <a:schemeClr val="accent1">
+              <a:shade val="15000"/>
+            </a:schemeClr>
+          </a:lnRef>
+          <a:fillRef idx="1">
+            <a:schemeClr val="accent1"/>
+          </a:fillRef>
+          <a:effectRef idx="0">
+            <a:schemeClr val="accent1"/>
+          </a:effectRef>
+          <a:fontRef idx="minor">
+            <a:schemeClr val="lt1"/>
+          </a:fontRef>
+        </p:style>
+        <p:txBody>
+          <a:bodyPr rtlCol="0" anchor="ctr"/>
+          <a:lstStyle/>
+          <a:p>
+            <a:pPr algn="ctr"/>
+            <a:endParaRPr lang="en-US"/>
+          </a:p>
+        </p:txBody>
+      </p:sp>
+      <p:sp>
+        <p:nvSpPr>
+          <p:cNvPr id="15" name="Rounded Rectangle 14">
+            <a:extLst>
+              <a:ext uri="{FF2B5EF4-FFF2-40B4-BE49-F238E27FC236}">
+                <a16:creationId xmlns:a16="http://schemas.microsoft.com/office/drawing/2014/main" id="{FB23CB5C-6906-86F8-C38F-DD48108E8704}"/>
+              </a:ext>
+            </a:extLst>
+          </p:cNvPr>
+          <p:cNvSpPr/>
+          <p:nvPr/>
+        </p:nvSpPr>
+        <p:spPr>
+          <a:xfrm>
+            <a:off x="1897060" y="272324"/>
+            <a:ext cx="9952839" cy="1826474"/>
+          </a:xfrm>
+          <a:prstGeom prst="roundRect">
+            <a:avLst>
+              <a:gd name="adj" fmla="val 13170"/>
+            </a:avLst>
+          </a:prstGeom>
+          <a:solidFill>
+            <a:schemeClr val="accent4">
+              <a:alpha val="6998"/>
+            </a:schemeClr>
+          </a:solidFill>
+          <a:ln>
+            <a:noFill/>
+          </a:ln>
+        </p:spPr>
+        <p:style>
+          <a:lnRef idx="2">
+            <a:schemeClr val="accent1">
+              <a:shade val="15000"/>
+            </a:schemeClr>
+          </a:lnRef>
+          <a:fillRef idx="1">
+            <a:schemeClr val="accent1"/>
+          </a:fillRef>
+          <a:effectRef idx="0">
+            <a:schemeClr val="accent1"/>
+          </a:effectRef>
+          <a:fontRef idx="minor">
+            <a:schemeClr val="lt1"/>
+          </a:fontRef>
+        </p:style>
+        <p:txBody>
+          <a:bodyPr rtlCol="0" anchor="ctr"/>
+          <a:lstStyle/>
+          <a:p>
+            <a:pPr algn="ctr"/>
+            <a:endParaRPr lang="en-US"/>
+          </a:p>
+        </p:txBody>
+      </p:sp>
+      <p:sp>
+        <p:nvSpPr>
+          <p:cNvPr id="4" name="Can 3">
+            <a:extLst>
+              <a:ext uri="{FF2B5EF4-FFF2-40B4-BE49-F238E27FC236}">
+                <a16:creationId xmlns:a16="http://schemas.microsoft.com/office/drawing/2014/main" id="{8E8C1AB7-3F31-D4EA-0F33-DE2CD24B511F}"/>
+              </a:ext>
+            </a:extLst>
+          </p:cNvPr>
+          <p:cNvSpPr/>
+          <p:nvPr/>
+        </p:nvSpPr>
+        <p:spPr>
+          <a:xfrm>
+            <a:off x="670193" y="750372"/>
+            <a:ext cx="1127707" cy="1138550"/>
+          </a:xfrm>
+          <a:prstGeom prst="can">
+            <a:avLst/>
+          </a:prstGeom>
+          <a:noFill/>
+          <a:ln>
+            <a:solidFill>
+              <a:schemeClr val="tx1"/>
+            </a:solidFill>
+          </a:ln>
+        </p:spPr>
+        <p:style>
+          <a:lnRef idx="2">
+            <a:schemeClr val="accent1">
+              <a:shade val="15000"/>
+            </a:schemeClr>
+          </a:lnRef>
+          <a:fillRef idx="1">
+            <a:schemeClr val="accent1"/>
+          </a:fillRef>
+          <a:effectRef idx="0">
+            <a:schemeClr val="accent1"/>
+          </a:effectRef>
+          <a:fontRef idx="minor">
+            <a:schemeClr val="lt1"/>
+          </a:fontRef>
+        </p:style>
+        <p:txBody>
+          <a:bodyPr rtlCol="0" anchor="ctr"/>
+          <a:lstStyle/>
+          <a:p>
+            <a:pPr algn="ctr"/>
+            <a:endParaRPr lang="en-US" dirty="0"/>
+          </a:p>
+        </p:txBody>
+      </p:sp>
+      <p:sp>
+        <p:nvSpPr>
+          <p:cNvPr id="6" name="Rounded Rectangle 5">
+            <a:extLst>
+              <a:ext uri="{FF2B5EF4-FFF2-40B4-BE49-F238E27FC236}">
+                <a16:creationId xmlns:a16="http://schemas.microsoft.com/office/drawing/2014/main" id="{C84CA077-6CF6-AF8E-88CB-7CB50831879A}"/>
+              </a:ext>
+            </a:extLst>
+          </p:cNvPr>
+          <p:cNvSpPr/>
+          <p:nvPr/>
+        </p:nvSpPr>
+        <p:spPr>
+          <a:xfrm>
+            <a:off x="8404268" y="821773"/>
+            <a:ext cx="3039491" cy="1042939"/>
+          </a:xfrm>
+          <a:prstGeom prst="roundRect">
+            <a:avLst/>
+          </a:prstGeom>
+          <a:noFill/>
+          <a:ln>
+            <a:solidFill>
+              <a:schemeClr val="tx1"/>
+            </a:solidFill>
+          </a:ln>
+        </p:spPr>
+        <p:style>
+          <a:lnRef idx="2">
+            <a:schemeClr val="accent1">
+              <a:shade val="15000"/>
+            </a:schemeClr>
+          </a:lnRef>
+          <a:fillRef idx="1">
+            <a:schemeClr val="accent1"/>
+          </a:fillRef>
+          <a:effectRef idx="0">
+            <a:schemeClr val="accent1"/>
+          </a:effectRef>
+          <a:fontRef idx="minor">
+            <a:schemeClr val="lt1"/>
+          </a:fontRef>
+        </p:style>
+        <p:txBody>
+          <a:bodyPr rtlCol="0" anchor="ctr"/>
+          <a:lstStyle/>
+          <a:p>
+            <a:pPr algn="ctr"/>
+            <a:r>
+              <a:rPr lang="en-US" dirty="0">
+                <a:solidFill>
+                  <a:schemeClr val="tx1"/>
+                </a:solidFill>
+              </a:rPr>
+              <a:t>Shadowing/</a:t>
+            </a:r>
+          </a:p>
+          <a:p>
+            <a:pPr algn="ctr"/>
+            <a:r>
+              <a:rPr lang="en-US" dirty="0">
+                <a:solidFill>
+                  <a:schemeClr val="tx1"/>
+                </a:solidFill>
+              </a:rPr>
+              <a:t>AB Testing/</a:t>
+            </a:r>
+          </a:p>
+          <a:p>
+            <a:pPr algn="ctr"/>
+            <a:r>
+              <a:rPr lang="en-US" dirty="0">
+                <a:solidFill>
+                  <a:schemeClr val="tx1"/>
+                </a:solidFill>
+              </a:rPr>
+              <a:t>Guardrail Policy</a:t>
+            </a:r>
+          </a:p>
+        </p:txBody>
+      </p:sp>
+      <p:sp>
+        <p:nvSpPr>
+          <p:cNvPr id="7" name="Rounded Rectangle 6">
+            <a:extLst>
+              <a:ext uri="{FF2B5EF4-FFF2-40B4-BE49-F238E27FC236}">
+                <a16:creationId xmlns:a16="http://schemas.microsoft.com/office/drawing/2014/main" id="{E9C60BF8-6413-5710-3880-79599342507F}"/>
+              </a:ext>
+            </a:extLst>
+          </p:cNvPr>
+          <p:cNvSpPr/>
+          <p:nvPr/>
+        </p:nvSpPr>
+        <p:spPr>
+          <a:xfrm>
+            <a:off x="5263464" y="2918953"/>
+            <a:ext cx="2010920" cy="756401"/>
+          </a:xfrm>
+          <a:prstGeom prst="roundRect">
+            <a:avLst/>
+          </a:prstGeom>
+          <a:noFill/>
+          <a:ln>
+            <a:solidFill>
+              <a:schemeClr val="tx1"/>
+            </a:solidFill>
+          </a:ln>
+        </p:spPr>
+        <p:style>
+          <a:lnRef idx="2">
+            <a:schemeClr val="accent1">
+              <a:shade val="15000"/>
+            </a:schemeClr>
+          </a:lnRef>
+          <a:fillRef idx="1">
+            <a:schemeClr val="accent1"/>
+          </a:fillRef>
+          <a:effectRef idx="0">
+            <a:schemeClr val="accent1"/>
+          </a:effectRef>
+          <a:fontRef idx="minor">
+            <a:schemeClr val="lt1"/>
+          </a:fontRef>
+        </p:style>
+        <p:txBody>
+          <a:bodyPr rtlCol="0" anchor="ctr"/>
+          <a:lstStyle/>
+          <a:p>
+            <a:pPr algn="ctr"/>
+            <a:r>
+              <a:rPr lang="en-US" dirty="0">
+                <a:solidFill>
+                  <a:schemeClr val="tx1"/>
+                </a:solidFill>
+              </a:rPr>
+              <a:t>Ablation Engine</a:t>
+            </a:r>
+          </a:p>
+        </p:txBody>
+      </p:sp>
+      <p:sp>
+        <p:nvSpPr>
+          <p:cNvPr id="8" name="Rounded Rectangle 7">
+            <a:extLst>
+              <a:ext uri="{FF2B5EF4-FFF2-40B4-BE49-F238E27FC236}">
+                <a16:creationId xmlns:a16="http://schemas.microsoft.com/office/drawing/2014/main" id="{39CF5C6B-248C-8ECA-042F-58547843F403}"/>
+              </a:ext>
+            </a:extLst>
+          </p:cNvPr>
+          <p:cNvSpPr/>
+          <p:nvPr/>
+        </p:nvSpPr>
+        <p:spPr>
+          <a:xfrm>
+            <a:off x="1633663" y="4053556"/>
+            <a:ext cx="2010920" cy="756401"/>
+          </a:xfrm>
+          <a:prstGeom prst="roundRect">
+            <a:avLst/>
+          </a:prstGeom>
+          <a:noFill/>
+          <a:ln>
+            <a:solidFill>
+              <a:schemeClr val="tx1"/>
+            </a:solidFill>
+          </a:ln>
+        </p:spPr>
+        <p:style>
+          <a:lnRef idx="2">
+            <a:schemeClr val="accent1">
+              <a:shade val="15000"/>
+            </a:schemeClr>
+          </a:lnRef>
+          <a:fillRef idx="1">
+            <a:schemeClr val="accent1"/>
+          </a:fillRef>
+          <a:effectRef idx="0">
+            <a:schemeClr val="accent1"/>
+          </a:effectRef>
+          <a:fontRef idx="minor">
+            <a:schemeClr val="lt1"/>
+          </a:fontRef>
+        </p:style>
+        <p:txBody>
+          <a:bodyPr rtlCol="0" anchor="ctr"/>
+          <a:lstStyle/>
+          <a:p>
+            <a:pPr algn="ctr"/>
+            <a:r>
+              <a:rPr lang="en-US" dirty="0">
+                <a:solidFill>
+                  <a:schemeClr val="tx1"/>
+                </a:solidFill>
+              </a:rPr>
+              <a:t>Data Engine</a:t>
+            </a:r>
+          </a:p>
+          <a:p>
+            <a:pPr algn="ctr"/>
+            <a:r>
+              <a:rPr lang="en-US" dirty="0">
+                <a:solidFill>
+                  <a:schemeClr val="tx1"/>
+                </a:solidFill>
+              </a:rPr>
+              <a:t>(Filter/Lineage)</a:t>
+            </a:r>
+          </a:p>
+        </p:txBody>
+      </p:sp>
+      <p:sp>
+        <p:nvSpPr>
+          <p:cNvPr id="9" name="Rounded Rectangle 8">
+            <a:extLst>
+              <a:ext uri="{FF2B5EF4-FFF2-40B4-BE49-F238E27FC236}">
+                <a16:creationId xmlns:a16="http://schemas.microsoft.com/office/drawing/2014/main" id="{6A6ABD0F-D2D5-616A-0050-3F02D3DFFB96}"/>
+              </a:ext>
+            </a:extLst>
+          </p:cNvPr>
+          <p:cNvSpPr/>
+          <p:nvPr/>
+        </p:nvSpPr>
+        <p:spPr>
+          <a:xfrm>
+            <a:off x="8161571" y="4053555"/>
+            <a:ext cx="3478660" cy="756401"/>
+          </a:xfrm>
+          <a:prstGeom prst="roundRect">
+            <a:avLst/>
+          </a:prstGeom>
+          <a:noFill/>
+          <a:ln>
+            <a:solidFill>
+              <a:schemeClr val="tx1"/>
+            </a:solidFill>
+          </a:ln>
+        </p:spPr>
+        <p:style>
+          <a:lnRef idx="2">
+            <a:schemeClr val="accent1">
+              <a:shade val="15000"/>
+            </a:schemeClr>
+          </a:lnRef>
+          <a:fillRef idx="1">
+            <a:schemeClr val="accent1"/>
+          </a:fillRef>
+          <a:effectRef idx="0">
+            <a:schemeClr val="accent1"/>
+          </a:effectRef>
+          <a:fontRef idx="minor">
+            <a:schemeClr val="lt1"/>
+          </a:fontRef>
+        </p:style>
+        <p:txBody>
+          <a:bodyPr rtlCol="0" anchor="ctr"/>
+          <a:lstStyle/>
+          <a:p>
+            <a:pPr algn="ctr"/>
+            <a:r>
+              <a:rPr lang="en-US" dirty="0">
+                <a:solidFill>
+                  <a:schemeClr val="tx1"/>
+                </a:solidFill>
+              </a:rPr>
+              <a:t>Incremental Learning Engine</a:t>
+            </a:r>
+          </a:p>
+          <a:p>
+            <a:pPr algn="ctr"/>
+            <a:r>
+              <a:rPr lang="en-US" dirty="0">
+                <a:solidFill>
+                  <a:schemeClr val="tx1"/>
+                </a:solidFill>
+              </a:rPr>
+              <a:t>(CPT/SFT/DPO)</a:t>
+            </a:r>
+          </a:p>
+        </p:txBody>
+      </p:sp>
+      <p:sp>
+        <p:nvSpPr>
+          <p:cNvPr id="10" name="Rounded Rectangle 9">
+            <a:extLst>
+              <a:ext uri="{FF2B5EF4-FFF2-40B4-BE49-F238E27FC236}">
+                <a16:creationId xmlns:a16="http://schemas.microsoft.com/office/drawing/2014/main" id="{8A7F29AE-4A8B-CBE4-B00C-295D927F620C}"/>
+              </a:ext>
+            </a:extLst>
+          </p:cNvPr>
+          <p:cNvSpPr/>
+          <p:nvPr/>
+        </p:nvSpPr>
+        <p:spPr>
+          <a:xfrm>
+            <a:off x="5263464" y="4053556"/>
+            <a:ext cx="2010920" cy="756401"/>
+          </a:xfrm>
+          <a:prstGeom prst="roundRect">
+            <a:avLst/>
+          </a:prstGeom>
+          <a:noFill/>
+          <a:ln>
+            <a:solidFill>
+              <a:schemeClr val="tx1"/>
+            </a:solidFill>
+            <a:prstDash val="solid"/>
+          </a:ln>
+        </p:spPr>
+        <p:style>
+          <a:lnRef idx="2">
+            <a:schemeClr val="accent1">
+              <a:shade val="15000"/>
+            </a:schemeClr>
+          </a:lnRef>
+          <a:fillRef idx="1">
+            <a:schemeClr val="accent1"/>
+          </a:fillRef>
+          <a:effectRef idx="0">
+            <a:schemeClr val="accent1"/>
+          </a:effectRef>
+          <a:fontRef idx="minor">
+            <a:schemeClr val="lt1"/>
+          </a:fontRef>
+        </p:style>
+        <p:txBody>
+          <a:bodyPr rtlCol="0" anchor="ctr"/>
+          <a:lstStyle/>
+          <a:p>
+            <a:pPr algn="ctr"/>
+            <a:r>
+              <a:rPr lang="en-US" dirty="0">
+                <a:solidFill>
+                  <a:schemeClr val="tx1"/>
+                </a:solidFill>
+              </a:rPr>
+              <a:t>Blender</a:t>
+            </a:r>
+          </a:p>
+        </p:txBody>
+      </p:sp>
+      <p:sp>
+        <p:nvSpPr>
+          <p:cNvPr id="11" name="Rounded Rectangle 10">
+            <a:extLst>
+              <a:ext uri="{FF2B5EF4-FFF2-40B4-BE49-F238E27FC236}">
+                <a16:creationId xmlns:a16="http://schemas.microsoft.com/office/drawing/2014/main" id="{194D7883-65AC-49BE-5353-0D0CB975029A}"/>
+              </a:ext>
+            </a:extLst>
+          </p:cNvPr>
+          <p:cNvSpPr/>
+          <p:nvPr/>
+        </p:nvSpPr>
+        <p:spPr>
+          <a:xfrm>
+            <a:off x="5263464" y="960947"/>
+            <a:ext cx="2206928" cy="756401"/>
+          </a:xfrm>
+          <a:prstGeom prst="roundRect">
+            <a:avLst/>
+          </a:prstGeom>
+          <a:noFill/>
+          <a:ln>
+            <a:solidFill>
+              <a:schemeClr val="tx1"/>
+            </a:solidFill>
+            <a:prstDash val="solid"/>
+          </a:ln>
+        </p:spPr>
+        <p:style>
+          <a:lnRef idx="2">
+            <a:schemeClr val="accent1">
+              <a:shade val="15000"/>
+            </a:schemeClr>
+          </a:lnRef>
+          <a:fillRef idx="1">
+            <a:schemeClr val="accent1"/>
+          </a:fillRef>
+          <a:effectRef idx="0">
+            <a:schemeClr val="accent1"/>
+          </a:effectRef>
+          <a:fontRef idx="minor">
+            <a:schemeClr val="lt1"/>
+          </a:fontRef>
+        </p:style>
+        <p:txBody>
+          <a:bodyPr rtlCol="0" anchor="ctr"/>
+          <a:lstStyle/>
+          <a:p>
+            <a:pPr algn="ctr"/>
+            <a:r>
+              <a:rPr lang="en-US" dirty="0">
+                <a:solidFill>
+                  <a:schemeClr val="tx1"/>
+                </a:solidFill>
+              </a:rPr>
+              <a:t>Inference/</a:t>
+            </a:r>
+          </a:p>
+          <a:p>
+            <a:pPr algn="ctr"/>
+            <a:r>
+              <a:rPr lang="en-US" dirty="0">
+                <a:solidFill>
+                  <a:schemeClr val="tx1"/>
+                </a:solidFill>
+              </a:rPr>
+              <a:t>Runtime Service</a:t>
+            </a:r>
+          </a:p>
+        </p:txBody>
+      </p:sp>
+      <p:sp>
+        <p:nvSpPr>
+          <p:cNvPr id="12" name="Rounded Rectangle 11">
+            <a:extLst>
+              <a:ext uri="{FF2B5EF4-FFF2-40B4-BE49-F238E27FC236}">
+                <a16:creationId xmlns:a16="http://schemas.microsoft.com/office/drawing/2014/main" id="{92659AF6-41E8-8F58-73BD-C81837A06880}"/>
+              </a:ext>
+            </a:extLst>
+          </p:cNvPr>
+          <p:cNvSpPr/>
+          <p:nvPr/>
+        </p:nvSpPr>
+        <p:spPr>
+          <a:xfrm>
+            <a:off x="8893267" y="2918954"/>
+            <a:ext cx="2010920" cy="756401"/>
+          </a:xfrm>
+          <a:prstGeom prst="roundRect">
+            <a:avLst/>
+          </a:prstGeom>
+          <a:noFill/>
+          <a:ln>
+            <a:solidFill>
+              <a:schemeClr val="tx1"/>
+            </a:solidFill>
+            <a:prstDash val="solid"/>
+          </a:ln>
+        </p:spPr>
+        <p:style>
+          <a:lnRef idx="2">
+            <a:schemeClr val="accent1">
+              <a:shade val="15000"/>
+            </a:schemeClr>
+          </a:lnRef>
+          <a:fillRef idx="1">
+            <a:schemeClr val="accent1"/>
+          </a:fillRef>
+          <a:effectRef idx="0">
+            <a:schemeClr val="accent1"/>
+          </a:effectRef>
+          <a:fontRef idx="minor">
+            <a:schemeClr val="lt1"/>
+          </a:fontRef>
+        </p:style>
+        <p:txBody>
+          <a:bodyPr rtlCol="0" anchor="ctr"/>
+          <a:lstStyle/>
+          <a:p>
+            <a:pPr algn="ctr"/>
+            <a:r>
+              <a:rPr lang="en-US" dirty="0">
+                <a:solidFill>
+                  <a:schemeClr val="tx1"/>
+                </a:solidFill>
+              </a:rPr>
+              <a:t>Offline OCE</a:t>
+            </a:r>
+          </a:p>
+        </p:txBody>
+      </p:sp>
+      <p:sp>
+        <p:nvSpPr>
+          <p:cNvPr id="16" name="TextBox 15">
+            <a:extLst>
+              <a:ext uri="{FF2B5EF4-FFF2-40B4-BE49-F238E27FC236}">
+                <a16:creationId xmlns:a16="http://schemas.microsoft.com/office/drawing/2014/main" id="{8D823B46-D690-DA9C-4203-CEF618BD0538}"/>
+              </a:ext>
+            </a:extLst>
+          </p:cNvPr>
+          <p:cNvSpPr txBox="1"/>
+          <p:nvPr/>
+        </p:nvSpPr>
+        <p:spPr>
+          <a:xfrm>
+            <a:off x="655336" y="1042910"/>
+            <a:ext cx="1226867" cy="643009"/>
+          </a:xfrm>
+          <a:prstGeom prst="rect">
+            <a:avLst/>
+          </a:prstGeom>
+          <a:noFill/>
+        </p:spPr>
+        <p:txBody>
+          <a:bodyPr wrap="none" rtlCol="0">
+            <a:spAutoFit/>
+          </a:bodyPr>
+          <a:lstStyle/>
+          <a:p>
+            <a:r>
+              <a:rPr lang="en-US" sz="1600" dirty="0"/>
+              <a:t>Offline</a:t>
+            </a:r>
+          </a:p>
+          <a:p>
+            <a:r>
+              <a:rPr lang="en-US" sz="1600" dirty="0"/>
+              <a:t>Data Store</a:t>
+            </a:r>
+          </a:p>
+        </p:txBody>
+      </p:sp>
+      <p:grpSp>
+        <p:nvGrpSpPr>
+          <p:cNvPr id="36" name="Group 35">
+            <a:extLst>
+              <a:ext uri="{FF2B5EF4-FFF2-40B4-BE49-F238E27FC236}">
+                <a16:creationId xmlns:a16="http://schemas.microsoft.com/office/drawing/2014/main" id="{7C036E89-AAED-9CF1-3546-A19652AAE62B}"/>
+              </a:ext>
+            </a:extLst>
+          </p:cNvPr>
+          <p:cNvGrpSpPr/>
+          <p:nvPr/>
+        </p:nvGrpSpPr>
+        <p:grpSpPr>
+          <a:xfrm>
+            <a:off x="2020425" y="750372"/>
+            <a:ext cx="1226867" cy="1138550"/>
+            <a:chOff x="3117593" y="1730157"/>
+            <a:chExt cx="1115755" cy="1035437"/>
+          </a:xfrm>
+        </p:grpSpPr>
+        <p:sp>
+          <p:nvSpPr>
+            <p:cNvPr id="5" name="Can 4">
+              <a:extLst>
+                <a:ext uri="{FF2B5EF4-FFF2-40B4-BE49-F238E27FC236}">
+                  <a16:creationId xmlns:a16="http://schemas.microsoft.com/office/drawing/2014/main" id="{2C367D7F-C0F5-5585-4B68-113614485C8C}"/>
+                </a:ext>
+              </a:extLst>
+            </p:cNvPr>
+            <p:cNvSpPr/>
+            <p:nvPr/>
+          </p:nvSpPr>
+          <p:spPr>
+            <a:xfrm>
+              <a:off x="3122008" y="1730157"/>
+              <a:ext cx="1025576" cy="1035437"/>
+            </a:xfrm>
+            <a:prstGeom prst="can">
+              <a:avLst/>
+            </a:prstGeom>
+            <a:noFill/>
+            <a:ln>
+              <a:solidFill>
+                <a:schemeClr val="tx1"/>
+              </a:solidFill>
+            </a:ln>
+          </p:spPr>
+          <p:style>
+            <a:lnRef idx="2">
+              <a:schemeClr val="accent1">
+                <a:shade val="15000"/>
+              </a:schemeClr>
+            </a:lnRef>
+            <a:fillRef idx="1">
+              <a:schemeClr val="accent1"/>
+            </a:fillRef>
+            <a:effectRef idx="0">
+              <a:schemeClr val="accent1"/>
+            </a:effectRef>
+            <a:fontRef idx="minor">
+              <a:schemeClr val="lt1"/>
+            </a:fontRef>
+          </p:style>
+          <p:txBody>
+            <a:bodyPr rtlCol="0" anchor="ctr"/>
+            <a:lstStyle/>
+            <a:p>
+              <a:pPr algn="ctr"/>
+              <a:endParaRPr lang="en-US" dirty="0"/>
+            </a:p>
+          </p:txBody>
+        </p:sp>
+        <p:sp>
+          <p:nvSpPr>
+            <p:cNvPr id="17" name="TextBox 16">
+              <a:extLst>
+                <a:ext uri="{FF2B5EF4-FFF2-40B4-BE49-F238E27FC236}">
+                  <a16:creationId xmlns:a16="http://schemas.microsoft.com/office/drawing/2014/main" id="{36E2243F-0FA8-4019-470E-7D155CFD969F}"/>
+                </a:ext>
+              </a:extLst>
+            </p:cNvPr>
+            <p:cNvSpPr txBox="1"/>
+            <p:nvPr/>
+          </p:nvSpPr>
+          <p:spPr>
+            <a:xfrm>
+              <a:off x="3117593" y="1996200"/>
+              <a:ext cx="1115755" cy="584775"/>
+            </a:xfrm>
+            <a:prstGeom prst="rect">
+              <a:avLst/>
+            </a:prstGeom>
+            <a:noFill/>
+          </p:spPr>
+          <p:txBody>
+            <a:bodyPr wrap="none" rtlCol="0">
+              <a:spAutoFit/>
+            </a:bodyPr>
+            <a:lstStyle/>
+            <a:p>
+              <a:r>
+                <a:rPr lang="en-US" sz="1600" dirty="0"/>
+                <a:t>Online</a:t>
+              </a:r>
+            </a:p>
+            <a:p>
+              <a:r>
+                <a:rPr lang="en-US" sz="1600" dirty="0"/>
+                <a:t>Data Store</a:t>
+              </a:r>
+            </a:p>
+          </p:txBody>
+        </p:sp>
+      </p:grpSp>
+      <p:cxnSp>
+        <p:nvCxnSpPr>
+          <p:cNvPr id="23" name="Straight Arrow Connector 22">
+            <a:extLst>
+              <a:ext uri="{FF2B5EF4-FFF2-40B4-BE49-F238E27FC236}">
+                <a16:creationId xmlns:a16="http://schemas.microsoft.com/office/drawing/2014/main" id="{B438FC34-AE67-C9FE-B501-F12C00AC148A}"/>
+              </a:ext>
+            </a:extLst>
+          </p:cNvPr>
+          <p:cNvCxnSpPr>
+            <a:stCxn id="8" idx="3"/>
+            <a:endCxn id="10" idx="1"/>
+          </p:cNvCxnSpPr>
+          <p:nvPr/>
+        </p:nvCxnSpPr>
+        <p:spPr>
+          <a:xfrm>
+            <a:off x="3644583" y="4431757"/>
+            <a:ext cx="1618881" cy="0"/>
+          </a:xfrm>
+          <a:prstGeom prst="straightConnector1">
+            <a:avLst/>
+          </a:prstGeom>
+          <a:ln cap="rnd" cmpd="dbl">
+            <a:solidFill>
+              <a:schemeClr val="tx1"/>
+            </a:solidFill>
+            <a:prstDash val="sysDot"/>
+            <a:bevel/>
+            <a:headEnd type="none" w="lg" len="lg"/>
+            <a:tailEnd type="stealth" w="lg" len="lg"/>
+          </a:ln>
+        </p:spPr>
+        <p:style>
+          <a:lnRef idx="2">
+            <a:schemeClr val="accent1"/>
+          </a:lnRef>
+          <a:fillRef idx="0">
+            <a:schemeClr val="accent1"/>
+          </a:fillRef>
+          <a:effectRef idx="1">
+            <a:schemeClr val="accent1"/>
+          </a:effectRef>
+          <a:fontRef idx="minor">
+            <a:schemeClr val="tx1"/>
+          </a:fontRef>
+        </p:style>
+      </p:cxnSp>
+      <p:cxnSp>
+        <p:nvCxnSpPr>
+          <p:cNvPr id="24" name="Straight Arrow Connector 23">
+            <a:extLst>
+              <a:ext uri="{FF2B5EF4-FFF2-40B4-BE49-F238E27FC236}">
+                <a16:creationId xmlns:a16="http://schemas.microsoft.com/office/drawing/2014/main" id="{58BA2C9F-E5E9-71F2-43AA-BDFBF65384C7}"/>
+              </a:ext>
+            </a:extLst>
+          </p:cNvPr>
+          <p:cNvCxnSpPr>
+            <a:cxnSpLocks/>
+            <a:endCxn id="9" idx="1"/>
+          </p:cNvCxnSpPr>
+          <p:nvPr/>
+        </p:nvCxnSpPr>
+        <p:spPr>
+          <a:xfrm flipV="1">
+            <a:off x="7274384" y="4431756"/>
+            <a:ext cx="887187" cy="1"/>
+          </a:xfrm>
+          <a:prstGeom prst="straightConnector1">
+            <a:avLst/>
+          </a:prstGeom>
+          <a:ln cap="rnd" cmpd="dbl">
+            <a:solidFill>
+              <a:schemeClr val="tx1"/>
+            </a:solidFill>
+            <a:prstDash val="sysDot"/>
+            <a:bevel/>
+            <a:headEnd type="none" w="lg" len="lg"/>
+            <a:tailEnd type="stealth" w="lg" len="lg"/>
+          </a:ln>
+        </p:spPr>
+        <p:style>
+          <a:lnRef idx="2">
+            <a:schemeClr val="accent1"/>
+          </a:lnRef>
+          <a:fillRef idx="0">
+            <a:schemeClr val="accent1"/>
+          </a:fillRef>
+          <a:effectRef idx="1">
+            <a:schemeClr val="accent1"/>
+          </a:effectRef>
+          <a:fontRef idx="minor">
+            <a:schemeClr val="tx1"/>
+          </a:fontRef>
+        </p:style>
+      </p:cxnSp>
+      <p:cxnSp>
+        <p:nvCxnSpPr>
+          <p:cNvPr id="26" name="Straight Arrow Connector 25">
+            <a:extLst>
+              <a:ext uri="{FF2B5EF4-FFF2-40B4-BE49-F238E27FC236}">
+                <a16:creationId xmlns:a16="http://schemas.microsoft.com/office/drawing/2014/main" id="{7525D0B1-A5EB-D765-7DC8-5E0E5ACDEEA5}"/>
+              </a:ext>
+            </a:extLst>
+          </p:cNvPr>
+          <p:cNvCxnSpPr/>
+          <p:nvPr/>
+        </p:nvCxnSpPr>
+        <p:spPr>
+          <a:xfrm>
+            <a:off x="7274384" y="3293391"/>
+            <a:ext cx="1618881" cy="0"/>
+          </a:xfrm>
+          <a:prstGeom prst="straightConnector1">
+            <a:avLst/>
+          </a:prstGeom>
+          <a:ln cap="rnd" cmpd="dbl">
+            <a:solidFill>
+              <a:schemeClr val="tx1"/>
+            </a:solidFill>
+            <a:prstDash val="sysDot"/>
+            <a:bevel/>
+            <a:headEnd type="none" w="lg" len="lg"/>
+            <a:tailEnd type="stealth" w="lg" len="lg"/>
+          </a:ln>
+        </p:spPr>
+        <p:style>
+          <a:lnRef idx="2">
+            <a:schemeClr val="accent1"/>
+          </a:lnRef>
+          <a:fillRef idx="0">
+            <a:schemeClr val="accent1"/>
+          </a:fillRef>
+          <a:effectRef idx="1">
+            <a:schemeClr val="accent1"/>
+          </a:effectRef>
+          <a:fontRef idx="minor">
+            <a:schemeClr val="tx1"/>
+          </a:fontRef>
+        </p:style>
+      </p:cxnSp>
+      <p:cxnSp>
+        <p:nvCxnSpPr>
+          <p:cNvPr id="27" name="Straight Arrow Connector 26">
+            <a:extLst>
+              <a:ext uri="{FF2B5EF4-FFF2-40B4-BE49-F238E27FC236}">
+                <a16:creationId xmlns:a16="http://schemas.microsoft.com/office/drawing/2014/main" id="{4593A6F5-CFF9-9018-29B7-62183518795C}"/>
+              </a:ext>
+            </a:extLst>
+          </p:cNvPr>
+          <p:cNvCxnSpPr>
+            <a:cxnSpLocks/>
+            <a:stCxn id="6" idx="1"/>
+            <a:endCxn id="11" idx="3"/>
+          </p:cNvCxnSpPr>
+          <p:nvPr/>
+        </p:nvCxnSpPr>
+        <p:spPr>
+          <a:xfrm flipH="1" flipV="1">
+            <a:off x="7470393" y="1339147"/>
+            <a:ext cx="933876" cy="4096"/>
+          </a:xfrm>
+          <a:prstGeom prst="straightConnector1">
+            <a:avLst/>
+          </a:prstGeom>
+          <a:ln cap="rnd" cmpd="dbl">
+            <a:solidFill>
+              <a:schemeClr val="tx1"/>
+            </a:solidFill>
+            <a:prstDash val="sysDot"/>
+            <a:bevel/>
+            <a:headEnd type="none" w="lg" len="lg"/>
+            <a:tailEnd type="stealth" w="lg" len="lg"/>
+          </a:ln>
+        </p:spPr>
+        <p:style>
+          <a:lnRef idx="2">
+            <a:schemeClr val="accent1"/>
+          </a:lnRef>
+          <a:fillRef idx="0">
+            <a:schemeClr val="accent1"/>
+          </a:fillRef>
+          <a:effectRef idx="1">
+            <a:schemeClr val="accent1"/>
+          </a:effectRef>
+          <a:fontRef idx="minor">
+            <a:schemeClr val="tx1"/>
+          </a:fontRef>
+        </p:style>
+      </p:cxnSp>
+      <p:cxnSp>
+        <p:nvCxnSpPr>
+          <p:cNvPr id="30" name="Straight Arrow Connector 29">
+            <a:extLst>
+              <a:ext uri="{FF2B5EF4-FFF2-40B4-BE49-F238E27FC236}">
+                <a16:creationId xmlns:a16="http://schemas.microsoft.com/office/drawing/2014/main" id="{9B2FFF13-3CDF-4C57-8182-3793CCAF537A}"/>
+              </a:ext>
+            </a:extLst>
+          </p:cNvPr>
+          <p:cNvCxnSpPr>
+            <a:cxnSpLocks/>
+            <a:stCxn id="11" idx="1"/>
+          </p:cNvCxnSpPr>
+          <p:nvPr/>
+        </p:nvCxnSpPr>
+        <p:spPr>
+          <a:xfrm flipH="1">
+            <a:off x="3152986" y="1339147"/>
+            <a:ext cx="2110478" cy="0"/>
+          </a:xfrm>
+          <a:prstGeom prst="straightConnector1">
+            <a:avLst/>
+          </a:prstGeom>
+          <a:ln cap="rnd" cmpd="dbl">
+            <a:solidFill>
+              <a:schemeClr val="tx1"/>
+            </a:solidFill>
+            <a:prstDash val="sysDot"/>
+            <a:bevel/>
+            <a:headEnd type="none" w="lg" len="lg"/>
+            <a:tailEnd type="stealth" w="lg" len="lg"/>
+          </a:ln>
+        </p:spPr>
+        <p:style>
+          <a:lnRef idx="2">
+            <a:schemeClr val="accent1"/>
+          </a:lnRef>
+          <a:fillRef idx="0">
+            <a:schemeClr val="accent1"/>
+          </a:fillRef>
+          <a:effectRef idx="1">
+            <a:schemeClr val="accent1"/>
+          </a:effectRef>
+          <a:fontRef idx="minor">
+            <a:schemeClr val="tx1"/>
+          </a:fontRef>
+        </p:style>
+      </p:cxnSp>
+      <p:cxnSp>
+        <p:nvCxnSpPr>
+          <p:cNvPr id="33" name="Straight Arrow Connector 32">
+            <a:extLst>
+              <a:ext uri="{FF2B5EF4-FFF2-40B4-BE49-F238E27FC236}">
+                <a16:creationId xmlns:a16="http://schemas.microsoft.com/office/drawing/2014/main" id="{1F40F633-D056-60FD-27D5-F06658E9D517}"/>
+              </a:ext>
+            </a:extLst>
+          </p:cNvPr>
+          <p:cNvCxnSpPr>
+            <a:cxnSpLocks/>
+          </p:cNvCxnSpPr>
+          <p:nvPr/>
+        </p:nvCxnSpPr>
+        <p:spPr>
+          <a:xfrm>
+            <a:off x="2588922" y="1888922"/>
+            <a:ext cx="0" cy="2164633"/>
+          </a:xfrm>
+          <a:prstGeom prst="straightConnector1">
+            <a:avLst/>
+          </a:prstGeom>
+          <a:ln cap="rnd" cmpd="dbl">
+            <a:solidFill>
+              <a:schemeClr val="tx1"/>
+            </a:solidFill>
+            <a:prstDash val="sysDot"/>
+            <a:bevel/>
+            <a:headEnd type="none" w="lg" len="lg"/>
+            <a:tailEnd type="stealth" w="lg" len="lg"/>
+          </a:ln>
+        </p:spPr>
+        <p:style>
+          <a:lnRef idx="2">
+            <a:schemeClr val="accent1"/>
+          </a:lnRef>
+          <a:fillRef idx="0">
+            <a:schemeClr val="accent1"/>
+          </a:fillRef>
+          <a:effectRef idx="1">
+            <a:schemeClr val="accent1"/>
+          </a:effectRef>
+          <a:fontRef idx="minor">
+            <a:schemeClr val="tx1"/>
+          </a:fontRef>
+        </p:style>
+      </p:cxnSp>
+      <p:cxnSp>
+        <p:nvCxnSpPr>
+          <p:cNvPr id="39" name="Elbow Connector 38">
+            <a:extLst>
+              <a:ext uri="{FF2B5EF4-FFF2-40B4-BE49-F238E27FC236}">
+                <a16:creationId xmlns:a16="http://schemas.microsoft.com/office/drawing/2014/main" id="{6637A4C0-46C0-332A-4EA1-22C62EFBC672}"/>
+              </a:ext>
+            </a:extLst>
+          </p:cNvPr>
+          <p:cNvCxnSpPr>
+            <a:cxnSpLocks/>
+            <a:stCxn id="4" idx="3"/>
+          </p:cNvCxnSpPr>
+          <p:nvPr/>
+        </p:nvCxnSpPr>
+        <p:spPr>
+          <a:xfrm rot="16200000" flipH="1">
+            <a:off x="829168" y="2293801"/>
+            <a:ext cx="2164633" cy="1354875"/>
+          </a:xfrm>
+          <a:prstGeom prst="bentConnector3">
+            <a:avLst>
+              <a:gd name="adj1" fmla="val 67503"/>
+            </a:avLst>
+          </a:prstGeom>
+          <a:ln cap="rnd" cmpd="dbl">
+            <a:solidFill>
+              <a:schemeClr val="tx1"/>
+            </a:solidFill>
+            <a:prstDash val="sysDot"/>
+            <a:bevel/>
+            <a:headEnd type="none" w="lg" len="lg"/>
+            <a:tailEnd type="stealth" w="lg" len="lg"/>
+          </a:ln>
+        </p:spPr>
+        <p:style>
+          <a:lnRef idx="2">
+            <a:schemeClr val="accent1"/>
+          </a:lnRef>
+          <a:fillRef idx="0">
+            <a:schemeClr val="accent1"/>
+          </a:fillRef>
+          <a:effectRef idx="1">
+            <a:schemeClr val="accent1"/>
+          </a:effectRef>
+          <a:fontRef idx="minor">
+            <a:schemeClr val="tx1"/>
+          </a:fontRef>
+        </p:style>
+      </p:cxnSp>
+      <p:cxnSp>
+        <p:nvCxnSpPr>
+          <p:cNvPr id="41" name="Straight Arrow Connector 40">
+            <a:extLst>
+              <a:ext uri="{FF2B5EF4-FFF2-40B4-BE49-F238E27FC236}">
+                <a16:creationId xmlns:a16="http://schemas.microsoft.com/office/drawing/2014/main" id="{3B332A24-13B7-6547-3CEE-78C43751E147}"/>
+              </a:ext>
+            </a:extLst>
+          </p:cNvPr>
+          <p:cNvCxnSpPr>
+            <a:cxnSpLocks/>
+            <a:stCxn id="7" idx="2"/>
+          </p:cNvCxnSpPr>
+          <p:nvPr/>
+        </p:nvCxnSpPr>
+        <p:spPr>
+          <a:xfrm>
+            <a:off x="6268924" y="3675354"/>
+            <a:ext cx="0" cy="378201"/>
+          </a:xfrm>
+          <a:prstGeom prst="straightConnector1">
+            <a:avLst/>
+          </a:prstGeom>
+          <a:ln cap="rnd" cmpd="dbl">
+            <a:solidFill>
+              <a:schemeClr val="tx1"/>
+            </a:solidFill>
+            <a:prstDash val="sysDot"/>
+            <a:bevel/>
+            <a:headEnd type="stealth" w="lg" len="lg"/>
+            <a:tailEnd type="none" w="lg" len="lg"/>
+          </a:ln>
+        </p:spPr>
+        <p:style>
+          <a:lnRef idx="2">
+            <a:schemeClr val="accent1"/>
+          </a:lnRef>
+          <a:fillRef idx="0">
+            <a:schemeClr val="accent1"/>
+          </a:fillRef>
+          <a:effectRef idx="1">
+            <a:schemeClr val="accent1"/>
+          </a:effectRef>
+          <a:fontRef idx="minor">
+            <a:schemeClr val="tx1"/>
+          </a:fontRef>
+        </p:style>
+      </p:cxnSp>
+      <p:cxnSp>
+        <p:nvCxnSpPr>
+          <p:cNvPr id="44" name="Straight Arrow Connector 43">
+            <a:extLst>
+              <a:ext uri="{FF2B5EF4-FFF2-40B4-BE49-F238E27FC236}">
+                <a16:creationId xmlns:a16="http://schemas.microsoft.com/office/drawing/2014/main" id="{C02B4F8A-AC05-2E57-161A-02CDDC61DA8C}"/>
+              </a:ext>
+            </a:extLst>
+          </p:cNvPr>
+          <p:cNvCxnSpPr>
+            <a:cxnSpLocks/>
+            <a:stCxn id="9" idx="0"/>
+            <a:endCxn id="12" idx="2"/>
+          </p:cNvCxnSpPr>
+          <p:nvPr/>
+        </p:nvCxnSpPr>
+        <p:spPr>
+          <a:xfrm flipH="1" flipV="1">
+            <a:off x="9898726" y="3675355"/>
+            <a:ext cx="2175" cy="378200"/>
+          </a:xfrm>
+          <a:prstGeom prst="straightConnector1">
+            <a:avLst/>
+          </a:prstGeom>
+          <a:ln cap="rnd" cmpd="dbl">
+            <a:solidFill>
+              <a:schemeClr val="tx1"/>
+            </a:solidFill>
+            <a:prstDash val="sysDot"/>
+            <a:bevel/>
+            <a:headEnd type="none" w="lg" len="lg"/>
+            <a:tailEnd type="stealth" w="lg" len="lg"/>
+          </a:ln>
+        </p:spPr>
+        <p:style>
+          <a:lnRef idx="2">
+            <a:schemeClr val="accent1"/>
+          </a:lnRef>
+          <a:fillRef idx="0">
+            <a:schemeClr val="accent1"/>
+          </a:fillRef>
+          <a:effectRef idx="1">
+            <a:schemeClr val="accent1"/>
+          </a:effectRef>
+          <a:fontRef idx="minor">
+            <a:schemeClr val="tx1"/>
+          </a:fontRef>
+        </p:style>
+      </p:cxnSp>
+      <p:sp>
+        <p:nvSpPr>
+          <p:cNvPr id="50" name="TextBox 49">
+            <a:extLst>
+              <a:ext uri="{FF2B5EF4-FFF2-40B4-BE49-F238E27FC236}">
+                <a16:creationId xmlns:a16="http://schemas.microsoft.com/office/drawing/2014/main" id="{353D0E4E-78D2-8B7D-584A-C4E9614C8FFA}"/>
+              </a:ext>
+            </a:extLst>
+          </p:cNvPr>
+          <p:cNvSpPr txBox="1"/>
+          <p:nvPr/>
+        </p:nvSpPr>
+        <p:spPr>
+          <a:xfrm>
+            <a:off x="296641" y="155400"/>
+            <a:ext cx="1874812" cy="406112"/>
+          </a:xfrm>
+          <a:prstGeom prst="rect">
+            <a:avLst/>
+          </a:prstGeom>
+          <a:noFill/>
+        </p:spPr>
+        <p:txBody>
+          <a:bodyPr wrap="none" rtlCol="0">
+            <a:spAutoFit/>
+          </a:bodyPr>
+          <a:lstStyle/>
+          <a:p>
+            <a:r>
+              <a:rPr lang="en-US" dirty="0"/>
+              <a:t>Customer Data</a:t>
+            </a:r>
+          </a:p>
+        </p:txBody>
+      </p:sp>
+      <p:cxnSp>
+        <p:nvCxnSpPr>
+          <p:cNvPr id="51" name="Straight Arrow Connector 50">
+            <a:extLst>
+              <a:ext uri="{FF2B5EF4-FFF2-40B4-BE49-F238E27FC236}">
+                <a16:creationId xmlns:a16="http://schemas.microsoft.com/office/drawing/2014/main" id="{068F2238-4C94-27BA-82EC-8AC34219AF87}"/>
+              </a:ext>
+            </a:extLst>
+          </p:cNvPr>
+          <p:cNvCxnSpPr>
+            <a:cxnSpLocks/>
+          </p:cNvCxnSpPr>
+          <p:nvPr/>
+        </p:nvCxnSpPr>
+        <p:spPr>
+          <a:xfrm>
+            <a:off x="1217683" y="445902"/>
+            <a:ext cx="2342" cy="318611"/>
+          </a:xfrm>
+          <a:prstGeom prst="straightConnector1">
+            <a:avLst/>
+          </a:prstGeom>
+          <a:ln cap="rnd" cmpd="dbl">
+            <a:solidFill>
+              <a:schemeClr val="tx1"/>
+            </a:solidFill>
+            <a:prstDash val="sysDot"/>
+            <a:bevel/>
+            <a:headEnd type="none" w="lg" len="lg"/>
+            <a:tailEnd type="stealth" w="lg" len="lg"/>
+          </a:ln>
+        </p:spPr>
+        <p:style>
+          <a:lnRef idx="2">
+            <a:schemeClr val="accent1"/>
+          </a:lnRef>
+          <a:fillRef idx="0">
+            <a:schemeClr val="accent1"/>
+          </a:fillRef>
+          <a:effectRef idx="1">
+            <a:schemeClr val="accent1"/>
+          </a:effectRef>
+          <a:fontRef idx="minor">
+            <a:schemeClr val="tx1"/>
+          </a:fontRef>
+        </p:style>
+      </p:cxnSp>
+      <p:sp>
+        <p:nvSpPr>
+          <p:cNvPr id="57" name="Rounded Rectangle 56">
+            <a:extLst>
+              <a:ext uri="{FF2B5EF4-FFF2-40B4-BE49-F238E27FC236}">
+                <a16:creationId xmlns:a16="http://schemas.microsoft.com/office/drawing/2014/main" id="{9A81CCEE-62AD-37F7-6EC7-BFD8ADFE48AC}"/>
+              </a:ext>
+            </a:extLst>
+          </p:cNvPr>
+          <p:cNvSpPr/>
+          <p:nvPr/>
+        </p:nvSpPr>
+        <p:spPr>
+          <a:xfrm>
+            <a:off x="8779037" y="243048"/>
+            <a:ext cx="3039491" cy="391916"/>
+          </a:xfrm>
+          <a:prstGeom prst="roundRect">
+            <a:avLst>
+              <a:gd name="adj" fmla="val 50000"/>
+            </a:avLst>
+          </a:prstGeom>
+          <a:solidFill>
+            <a:schemeClr val="bg1">
+              <a:alpha val="77245"/>
+            </a:schemeClr>
+          </a:solidFill>
+          <a:ln>
+            <a:noFill/>
+          </a:ln>
+        </p:spPr>
+        <p:style>
+          <a:lnRef idx="2">
+            <a:schemeClr val="accent1">
+              <a:shade val="15000"/>
+            </a:schemeClr>
+          </a:lnRef>
+          <a:fillRef idx="1">
+            <a:schemeClr val="accent1"/>
+          </a:fillRef>
+          <a:effectRef idx="0">
+            <a:schemeClr val="accent1"/>
+          </a:effectRef>
+          <a:fontRef idx="minor">
+            <a:schemeClr val="lt1"/>
+          </a:fontRef>
+        </p:style>
+        <p:txBody>
+          <a:bodyPr rtlCol="0" anchor="ctr"/>
+          <a:lstStyle/>
+          <a:p>
+            <a:r>
+              <a:rPr lang="en-US" sz="2000" b="1" dirty="0">
+                <a:solidFill>
+                  <a:schemeClr val="tx1"/>
+                </a:solidFill>
+              </a:rPr>
+              <a:t>          Service Plane</a:t>
+            </a:r>
+          </a:p>
+        </p:txBody>
+      </p:sp>
+      <p:sp>
+        <p:nvSpPr>
+          <p:cNvPr id="58" name="Rounded Rectangle 57">
+            <a:extLst>
+              <a:ext uri="{FF2B5EF4-FFF2-40B4-BE49-F238E27FC236}">
+                <a16:creationId xmlns:a16="http://schemas.microsoft.com/office/drawing/2014/main" id="{7727D3F5-FF5F-967E-5114-5B6424709309}"/>
+              </a:ext>
+            </a:extLst>
+          </p:cNvPr>
+          <p:cNvSpPr/>
+          <p:nvPr/>
+        </p:nvSpPr>
+        <p:spPr>
+          <a:xfrm>
+            <a:off x="145152" y="4869632"/>
+            <a:ext cx="2156012" cy="391916"/>
+          </a:xfrm>
+          <a:prstGeom prst="roundRect">
+            <a:avLst>
+              <a:gd name="adj" fmla="val 50000"/>
+            </a:avLst>
+          </a:prstGeom>
+          <a:solidFill>
+            <a:schemeClr val="bg1">
+              <a:alpha val="77245"/>
+            </a:schemeClr>
+          </a:solidFill>
+          <a:ln>
+            <a:noFill/>
+          </a:ln>
+        </p:spPr>
+        <p:style>
+          <a:lnRef idx="2">
+            <a:schemeClr val="accent1">
+              <a:shade val="15000"/>
+            </a:schemeClr>
+          </a:lnRef>
+          <a:fillRef idx="1">
+            <a:schemeClr val="accent1"/>
+          </a:fillRef>
+          <a:effectRef idx="0">
+            <a:schemeClr val="accent1"/>
+          </a:effectRef>
+          <a:fontRef idx="minor">
+            <a:schemeClr val="lt1"/>
+          </a:fontRef>
+        </p:style>
+        <p:txBody>
+          <a:bodyPr rtlCol="0" anchor="ctr"/>
+          <a:lstStyle/>
+          <a:p>
+            <a:r>
+              <a:rPr lang="en-US" sz="2000" b="1" dirty="0">
+                <a:solidFill>
+                  <a:schemeClr val="tx1"/>
+                </a:solidFill>
+              </a:rPr>
+              <a:t>Data Flywheel</a:t>
+            </a:r>
+          </a:p>
+        </p:txBody>
+      </p:sp>
+      <p:sp>
+        <p:nvSpPr>
+          <p:cNvPr id="59" name="Rounded Rectangle 58">
+            <a:extLst>
+              <a:ext uri="{FF2B5EF4-FFF2-40B4-BE49-F238E27FC236}">
+                <a16:creationId xmlns:a16="http://schemas.microsoft.com/office/drawing/2014/main" id="{72625E2E-7FFF-BF51-16D3-6C30EBE75186}"/>
+              </a:ext>
+            </a:extLst>
+          </p:cNvPr>
+          <p:cNvSpPr/>
+          <p:nvPr/>
+        </p:nvSpPr>
+        <p:spPr>
+          <a:xfrm>
+            <a:off x="7470393" y="4859996"/>
+            <a:ext cx="4379507" cy="391916"/>
+          </a:xfrm>
+          <a:prstGeom prst="roundRect">
+            <a:avLst>
+              <a:gd name="adj" fmla="val 50000"/>
+            </a:avLst>
+          </a:prstGeom>
+          <a:solidFill>
+            <a:schemeClr val="bg1">
+              <a:alpha val="77245"/>
+            </a:schemeClr>
+          </a:solidFill>
+          <a:ln>
+            <a:noFill/>
+          </a:ln>
+        </p:spPr>
+        <p:style>
+          <a:lnRef idx="2">
+            <a:schemeClr val="accent1">
+              <a:shade val="15000"/>
+            </a:schemeClr>
+          </a:lnRef>
+          <a:fillRef idx="1">
+            <a:schemeClr val="accent1"/>
+          </a:fillRef>
+          <a:effectRef idx="0">
+            <a:schemeClr val="accent1"/>
+          </a:effectRef>
+          <a:fontRef idx="minor">
+            <a:schemeClr val="lt1"/>
+          </a:fontRef>
+        </p:style>
+        <p:txBody>
+          <a:bodyPr rtlCol="0" anchor="ctr"/>
+          <a:lstStyle/>
+          <a:p>
+            <a:r>
+              <a:rPr lang="en-US" sz="2000" b="1" dirty="0">
+                <a:solidFill>
+                  <a:schemeClr val="tx1"/>
+                </a:solidFill>
+              </a:rPr>
+              <a:t>Cust. Training Execution Plane</a:t>
+            </a:r>
+          </a:p>
+        </p:txBody>
+      </p:sp>
+      <p:cxnSp>
+        <p:nvCxnSpPr>
+          <p:cNvPr id="61" name="Elbow Connector 60">
+            <a:extLst>
+              <a:ext uri="{FF2B5EF4-FFF2-40B4-BE49-F238E27FC236}">
+                <a16:creationId xmlns:a16="http://schemas.microsoft.com/office/drawing/2014/main" id="{C8CACFC4-9C8D-D10F-75AE-71F4063DBAEC}"/>
+              </a:ext>
+            </a:extLst>
+          </p:cNvPr>
+          <p:cNvCxnSpPr>
+            <a:cxnSpLocks/>
+            <a:stCxn id="9" idx="3"/>
+            <a:endCxn id="72" idx="2"/>
+          </p:cNvCxnSpPr>
+          <p:nvPr/>
+        </p:nvCxnSpPr>
+        <p:spPr>
+          <a:xfrm flipH="1" flipV="1">
+            <a:off x="9596838" y="2279317"/>
+            <a:ext cx="2043393" cy="2152439"/>
+          </a:xfrm>
+          <a:prstGeom prst="bentConnector3">
+            <a:avLst>
+              <a:gd name="adj1" fmla="val -15152"/>
+            </a:avLst>
+          </a:prstGeom>
+          <a:ln>
+            <a:headEnd type="stealth"/>
+            <a:tailEnd type="none"/>
+          </a:ln>
+        </p:spPr>
+        <p:style>
+          <a:lnRef idx="2">
+            <a:schemeClr val="accent1"/>
+          </a:lnRef>
+          <a:fillRef idx="0">
+            <a:schemeClr val="accent1"/>
+          </a:fillRef>
+          <a:effectRef idx="1">
+            <a:schemeClr val="accent1"/>
+          </a:effectRef>
+          <a:fontRef idx="minor">
+            <a:schemeClr val="tx1"/>
+          </a:fontRef>
+        </p:style>
+      </p:cxnSp>
+      <p:cxnSp>
+        <p:nvCxnSpPr>
+          <p:cNvPr id="64" name="Elbow Connector 63">
+            <a:extLst>
+              <a:ext uri="{FF2B5EF4-FFF2-40B4-BE49-F238E27FC236}">
+                <a16:creationId xmlns:a16="http://schemas.microsoft.com/office/drawing/2014/main" id="{53E357B0-6A26-5DA9-EEBD-4A5B8C794965}"/>
+              </a:ext>
+            </a:extLst>
+          </p:cNvPr>
+          <p:cNvCxnSpPr>
+            <a:cxnSpLocks/>
+            <a:stCxn id="7" idx="0"/>
+            <a:endCxn id="71" idx="2"/>
+          </p:cNvCxnSpPr>
+          <p:nvPr/>
+        </p:nvCxnSpPr>
+        <p:spPr>
+          <a:xfrm rot="5400000" flipH="1" flipV="1">
+            <a:off x="6140116" y="2408127"/>
+            <a:ext cx="639634" cy="382018"/>
+          </a:xfrm>
+          <a:prstGeom prst="bentConnector2">
+            <a:avLst/>
+          </a:prstGeom>
+          <a:ln>
+            <a:tailEnd type="stealth"/>
+          </a:ln>
+        </p:spPr>
+        <p:style>
+          <a:lnRef idx="2">
+            <a:schemeClr val="accent1"/>
+          </a:lnRef>
+          <a:fillRef idx="0">
+            <a:schemeClr val="accent1"/>
+          </a:fillRef>
+          <a:effectRef idx="1">
+            <a:schemeClr val="accent1"/>
+          </a:effectRef>
+          <a:fontRef idx="minor">
+            <a:schemeClr val="tx1"/>
+          </a:fontRef>
+        </p:style>
+      </p:cxnSp>
+      <p:sp>
+        <p:nvSpPr>
+          <p:cNvPr id="71" name="Smiley Face 70">
+            <a:extLst>
+              <a:ext uri="{FF2B5EF4-FFF2-40B4-BE49-F238E27FC236}">
+                <a16:creationId xmlns:a16="http://schemas.microsoft.com/office/drawing/2014/main" id="{98720C87-799B-3A08-DD70-CF6EA29F4682}"/>
+              </a:ext>
+            </a:extLst>
+          </p:cNvPr>
+          <p:cNvSpPr/>
+          <p:nvPr/>
+        </p:nvSpPr>
+        <p:spPr>
+          <a:xfrm>
+            <a:off x="6650942" y="2197446"/>
+            <a:ext cx="163745" cy="163745"/>
+          </a:xfrm>
+          <a:prstGeom prst="smileyFace">
+            <a:avLst/>
+          </a:prstGeom>
+        </p:spPr>
+        <p:style>
+          <a:lnRef idx="2">
+            <a:schemeClr val="accent1">
+              <a:shade val="15000"/>
+            </a:schemeClr>
+          </a:lnRef>
+          <a:fillRef idx="1">
+            <a:schemeClr val="accent1"/>
+          </a:fillRef>
+          <a:effectRef idx="0">
+            <a:schemeClr val="accent1"/>
+          </a:effectRef>
+          <a:fontRef idx="minor">
+            <a:schemeClr val="lt1"/>
+          </a:fontRef>
+        </p:style>
+        <p:txBody>
+          <a:bodyPr rtlCol="0" anchor="ctr"/>
+          <a:lstStyle/>
+          <a:p>
+            <a:pPr algn="ctr"/>
+            <a:endParaRPr lang="en-US"/>
+          </a:p>
+        </p:txBody>
+      </p:sp>
+      <p:sp>
+        <p:nvSpPr>
+          <p:cNvPr id="72" name="Smiley Face 71">
+            <a:extLst>
+              <a:ext uri="{FF2B5EF4-FFF2-40B4-BE49-F238E27FC236}">
+                <a16:creationId xmlns:a16="http://schemas.microsoft.com/office/drawing/2014/main" id="{097FBD54-131E-F1D0-3C07-AE4B695F9117}"/>
+              </a:ext>
+            </a:extLst>
+          </p:cNvPr>
+          <p:cNvSpPr/>
+          <p:nvPr/>
+        </p:nvSpPr>
+        <p:spPr>
+          <a:xfrm rot="10800000">
+            <a:off x="9433093" y="2197445"/>
+            <a:ext cx="163745" cy="163745"/>
+          </a:xfrm>
+          <a:prstGeom prst="smileyFace">
+            <a:avLst/>
+          </a:prstGeom>
+        </p:spPr>
+        <p:style>
+          <a:lnRef idx="2">
+            <a:schemeClr val="accent1">
+              <a:shade val="15000"/>
+            </a:schemeClr>
+          </a:lnRef>
+          <a:fillRef idx="1">
+            <a:schemeClr val="accent1"/>
+          </a:fillRef>
+          <a:effectRef idx="0">
+            <a:schemeClr val="accent1"/>
+          </a:effectRef>
+          <a:fontRef idx="minor">
+            <a:schemeClr val="lt1"/>
+          </a:fontRef>
+        </p:style>
+        <p:txBody>
+          <a:bodyPr rtlCol="0" anchor="ctr"/>
+          <a:lstStyle/>
+          <a:p>
+            <a:pPr algn="ctr"/>
+            <a:endParaRPr lang="en-US"/>
+          </a:p>
+        </p:txBody>
+      </p:sp>
+      <p:grpSp>
+        <p:nvGrpSpPr>
+          <p:cNvPr id="92" name="Group 91">
+            <a:extLst>
+              <a:ext uri="{FF2B5EF4-FFF2-40B4-BE49-F238E27FC236}">
+                <a16:creationId xmlns:a16="http://schemas.microsoft.com/office/drawing/2014/main" id="{1B25DF46-A553-E2D0-4BD5-97AAB0E51646}"/>
+              </a:ext>
+            </a:extLst>
+          </p:cNvPr>
+          <p:cNvGrpSpPr/>
+          <p:nvPr/>
+        </p:nvGrpSpPr>
+        <p:grpSpPr>
+          <a:xfrm>
+            <a:off x="1136209" y="1227429"/>
+            <a:ext cx="8874235" cy="3316044"/>
+            <a:chOff x="1043587" y="1130340"/>
+            <a:chExt cx="8070537" cy="3015725"/>
+          </a:xfrm>
+        </p:grpSpPr>
+        <p:sp>
+          <p:nvSpPr>
+            <p:cNvPr id="82" name="Rectangle 81">
+              <a:extLst>
+                <a:ext uri="{FF2B5EF4-FFF2-40B4-BE49-F238E27FC236}">
+                  <a16:creationId xmlns:a16="http://schemas.microsoft.com/office/drawing/2014/main" id="{C13366EC-C9F9-C4B8-D422-2310D0722871}"/>
+                </a:ext>
+              </a:extLst>
+            </p:cNvPr>
+            <p:cNvSpPr/>
+            <p:nvPr/>
+          </p:nvSpPr>
+          <p:spPr>
+            <a:xfrm>
+              <a:off x="1043587" y="1667621"/>
+              <a:ext cx="203200" cy="203200"/>
+            </a:xfrm>
+            <a:prstGeom prst="rect">
+              <a:avLst/>
+            </a:prstGeom>
+            <a:solidFill>
+              <a:srgbClr val="FDF0EF"/>
+            </a:solidFill>
+            <a:ln>
+              <a:noFill/>
+            </a:ln>
+          </p:spPr>
+          <p:style>
+            <a:lnRef idx="2">
+              <a:schemeClr val="accent1">
+                <a:shade val="15000"/>
+              </a:schemeClr>
+            </a:lnRef>
+            <a:fillRef idx="1">
+              <a:schemeClr val="accent1"/>
+            </a:fillRef>
+            <a:effectRef idx="0">
+              <a:schemeClr val="accent1"/>
+            </a:effectRef>
+            <a:fontRef idx="minor">
+              <a:schemeClr val="lt1"/>
+            </a:fontRef>
+          </p:style>
+          <p:txBody>
+            <a:bodyPr rtlCol="0" anchor="ctr"/>
+            <a:lstStyle/>
+            <a:p>
+              <a:pPr algn="ctr"/>
+              <a:endParaRPr lang="en-US"/>
+            </a:p>
+          </p:txBody>
+        </p:sp>
+        <p:sp>
+          <p:nvSpPr>
+            <p:cNvPr id="83" name="Rectangle 82">
+              <a:extLst>
+                <a:ext uri="{FF2B5EF4-FFF2-40B4-BE49-F238E27FC236}">
+                  <a16:creationId xmlns:a16="http://schemas.microsoft.com/office/drawing/2014/main" id="{62FE1435-66D2-8E5A-55CD-05A73E61F0F2}"/>
+                </a:ext>
+              </a:extLst>
+            </p:cNvPr>
+            <p:cNvSpPr/>
+            <p:nvPr/>
+          </p:nvSpPr>
+          <p:spPr>
+            <a:xfrm>
+              <a:off x="2276647" y="1667621"/>
+              <a:ext cx="203200" cy="203200"/>
+            </a:xfrm>
+            <a:prstGeom prst="rect">
+              <a:avLst/>
+            </a:prstGeom>
+            <a:solidFill>
+              <a:srgbClr val="EEEAEE"/>
+            </a:solidFill>
+            <a:ln>
+              <a:noFill/>
+            </a:ln>
+          </p:spPr>
+          <p:style>
+            <a:lnRef idx="2">
+              <a:schemeClr val="accent1">
+                <a:shade val="15000"/>
+              </a:schemeClr>
+            </a:lnRef>
+            <a:fillRef idx="1">
+              <a:schemeClr val="accent1"/>
+            </a:fillRef>
+            <a:effectRef idx="0">
+              <a:schemeClr val="accent1"/>
+            </a:effectRef>
+            <a:fontRef idx="minor">
+              <a:schemeClr val="lt1"/>
+            </a:fontRef>
+          </p:style>
+          <p:txBody>
+            <a:bodyPr rtlCol="0" anchor="ctr"/>
+            <a:lstStyle/>
+            <a:p>
+              <a:pPr algn="ctr"/>
+              <a:endParaRPr lang="en-US"/>
+            </a:p>
+          </p:txBody>
+        </p:sp>
+        <p:sp>
+          <p:nvSpPr>
+            <p:cNvPr id="84" name="Rectangle 83">
+              <a:extLst>
+                <a:ext uri="{FF2B5EF4-FFF2-40B4-BE49-F238E27FC236}">
+                  <a16:creationId xmlns:a16="http://schemas.microsoft.com/office/drawing/2014/main" id="{D15FF11B-7462-ED38-F97B-B3F557032852}"/>
+                </a:ext>
+              </a:extLst>
+            </p:cNvPr>
+            <p:cNvSpPr/>
+            <p:nvPr/>
+          </p:nvSpPr>
+          <p:spPr>
+            <a:xfrm>
+              <a:off x="4698791" y="1130340"/>
+              <a:ext cx="203200" cy="203200"/>
+            </a:xfrm>
+            <a:prstGeom prst="rect">
+              <a:avLst/>
+            </a:prstGeom>
+            <a:solidFill>
+              <a:srgbClr val="F1F9FD"/>
+            </a:solidFill>
+            <a:ln>
+              <a:noFill/>
+            </a:ln>
+          </p:spPr>
+          <p:style>
+            <a:lnRef idx="2">
+              <a:schemeClr val="accent1">
+                <a:shade val="15000"/>
+              </a:schemeClr>
+            </a:lnRef>
+            <a:fillRef idx="1">
+              <a:schemeClr val="accent1"/>
+            </a:fillRef>
+            <a:effectRef idx="0">
+              <a:schemeClr val="accent1"/>
+            </a:effectRef>
+            <a:fontRef idx="minor">
+              <a:schemeClr val="lt1"/>
+            </a:fontRef>
+          </p:style>
+          <p:txBody>
+            <a:bodyPr rtlCol="0" anchor="ctr"/>
+            <a:lstStyle/>
+            <a:p>
+              <a:pPr algn="ctr"/>
+              <a:endParaRPr lang="en-US"/>
+            </a:p>
+          </p:txBody>
+        </p:sp>
+        <p:sp>
+          <p:nvSpPr>
+            <p:cNvPr id="85" name="Rectangle 84">
+              <a:extLst>
+                <a:ext uri="{FF2B5EF4-FFF2-40B4-BE49-F238E27FC236}">
+                  <a16:creationId xmlns:a16="http://schemas.microsoft.com/office/drawing/2014/main" id="{97B953B6-3C63-783F-37B0-1E2D94ED2423}"/>
+                </a:ext>
+              </a:extLst>
+            </p:cNvPr>
+            <p:cNvSpPr/>
+            <p:nvPr/>
+          </p:nvSpPr>
+          <p:spPr>
+            <a:xfrm>
+              <a:off x="7551812" y="1134065"/>
+              <a:ext cx="203200" cy="203200"/>
+            </a:xfrm>
+            <a:prstGeom prst="rect">
+              <a:avLst/>
+            </a:prstGeom>
+            <a:solidFill>
+              <a:srgbClr val="F1F9FD"/>
+            </a:solidFill>
+            <a:ln>
+              <a:noFill/>
+            </a:ln>
+          </p:spPr>
+          <p:style>
+            <a:lnRef idx="2">
+              <a:schemeClr val="accent1">
+                <a:shade val="15000"/>
+              </a:schemeClr>
+            </a:lnRef>
+            <a:fillRef idx="1">
+              <a:schemeClr val="accent1"/>
+            </a:fillRef>
+            <a:effectRef idx="0">
+              <a:schemeClr val="accent1"/>
+            </a:effectRef>
+            <a:fontRef idx="minor">
+              <a:schemeClr val="lt1"/>
+            </a:fontRef>
+          </p:style>
+          <p:txBody>
+            <a:bodyPr rtlCol="0" anchor="ctr"/>
+            <a:lstStyle/>
+            <a:p>
+              <a:pPr algn="ctr"/>
+              <a:endParaRPr lang="en-US"/>
+            </a:p>
+          </p:txBody>
+        </p:sp>
+        <p:sp>
+          <p:nvSpPr>
+            <p:cNvPr id="86" name="Rectangle 85">
+              <a:extLst>
+                <a:ext uri="{FF2B5EF4-FFF2-40B4-BE49-F238E27FC236}">
+                  <a16:creationId xmlns:a16="http://schemas.microsoft.com/office/drawing/2014/main" id="{2E71ECF6-1FD7-F7C9-69E6-38B4678666E5}"/>
+                </a:ext>
+              </a:extLst>
+            </p:cNvPr>
+            <p:cNvSpPr/>
+            <p:nvPr/>
+          </p:nvSpPr>
+          <p:spPr>
+            <a:xfrm>
+              <a:off x="3227496" y="3942865"/>
+              <a:ext cx="203200" cy="203200"/>
+            </a:xfrm>
+            <a:prstGeom prst="rect">
+              <a:avLst/>
+            </a:prstGeom>
+            <a:solidFill>
+              <a:srgbClr val="F7EBEA"/>
+            </a:solidFill>
+            <a:ln>
+              <a:noFill/>
+            </a:ln>
+          </p:spPr>
+          <p:style>
+            <a:lnRef idx="2">
+              <a:schemeClr val="accent1">
+                <a:shade val="15000"/>
+              </a:schemeClr>
+            </a:lnRef>
+            <a:fillRef idx="1">
+              <a:schemeClr val="accent1"/>
+            </a:fillRef>
+            <a:effectRef idx="0">
+              <a:schemeClr val="accent1"/>
+            </a:effectRef>
+            <a:fontRef idx="minor">
+              <a:schemeClr val="lt1"/>
+            </a:fontRef>
+          </p:style>
+          <p:txBody>
+            <a:bodyPr rtlCol="0" anchor="ctr"/>
+            <a:lstStyle/>
+            <a:p>
+              <a:pPr algn="ctr"/>
+              <a:endParaRPr lang="en-US"/>
+            </a:p>
+          </p:txBody>
+        </p:sp>
+        <p:sp>
+          <p:nvSpPr>
+            <p:cNvPr id="87" name="Rectangle 86">
+              <a:extLst>
+                <a:ext uri="{FF2B5EF4-FFF2-40B4-BE49-F238E27FC236}">
+                  <a16:creationId xmlns:a16="http://schemas.microsoft.com/office/drawing/2014/main" id="{CA5D6EEC-25C7-B1AC-7F24-969ADDAD2CA4}"/>
+                </a:ext>
+              </a:extLst>
+            </p:cNvPr>
+            <p:cNvSpPr/>
+            <p:nvPr/>
+          </p:nvSpPr>
+          <p:spPr>
+            <a:xfrm>
+              <a:off x="5607692" y="3610691"/>
+              <a:ext cx="203200" cy="203200"/>
+            </a:xfrm>
+            <a:prstGeom prst="rect">
+              <a:avLst/>
+            </a:prstGeom>
+            <a:solidFill>
+              <a:srgbClr val="F9F9F9"/>
+            </a:solidFill>
+            <a:ln>
+              <a:noFill/>
+            </a:ln>
+          </p:spPr>
+          <p:style>
+            <a:lnRef idx="2">
+              <a:schemeClr val="accent1">
+                <a:shade val="15000"/>
+              </a:schemeClr>
+            </a:lnRef>
+            <a:fillRef idx="1">
+              <a:schemeClr val="accent1"/>
+            </a:fillRef>
+            <a:effectRef idx="0">
+              <a:schemeClr val="accent1"/>
+            </a:effectRef>
+            <a:fontRef idx="minor">
+              <a:schemeClr val="lt1"/>
+            </a:fontRef>
+          </p:style>
+          <p:txBody>
+            <a:bodyPr rtlCol="0" anchor="ctr"/>
+            <a:lstStyle/>
+            <a:p>
+              <a:pPr algn="ctr"/>
+              <a:endParaRPr lang="en-US"/>
+            </a:p>
+          </p:txBody>
+        </p:sp>
+        <p:sp>
+          <p:nvSpPr>
+            <p:cNvPr id="88" name="Rectangle 87">
+              <a:extLst>
+                <a:ext uri="{FF2B5EF4-FFF2-40B4-BE49-F238E27FC236}">
+                  <a16:creationId xmlns:a16="http://schemas.microsoft.com/office/drawing/2014/main" id="{7E1FA17B-6F2F-DDC6-AA93-4988BA58F3C9}"/>
+                </a:ext>
+              </a:extLst>
+            </p:cNvPr>
+            <p:cNvSpPr/>
+            <p:nvPr/>
+          </p:nvSpPr>
+          <p:spPr>
+            <a:xfrm>
+              <a:off x="6539156" y="2908912"/>
+              <a:ext cx="203200" cy="203200"/>
+            </a:xfrm>
+            <a:prstGeom prst="rect">
+              <a:avLst/>
+            </a:prstGeom>
+            <a:solidFill>
+              <a:srgbClr val="F9F9F9"/>
+            </a:solidFill>
+            <a:ln>
+              <a:noFill/>
+            </a:ln>
+          </p:spPr>
+          <p:style>
+            <a:lnRef idx="2">
+              <a:schemeClr val="accent1">
+                <a:shade val="15000"/>
+              </a:schemeClr>
+            </a:lnRef>
+            <a:fillRef idx="1">
+              <a:schemeClr val="accent1"/>
+            </a:fillRef>
+            <a:effectRef idx="0">
+              <a:schemeClr val="accent1"/>
+            </a:effectRef>
+            <a:fontRef idx="minor">
+              <a:schemeClr val="lt1"/>
+            </a:fontRef>
+          </p:style>
+          <p:txBody>
+            <a:bodyPr rtlCol="0" anchor="ctr"/>
+            <a:lstStyle/>
+            <a:p>
+              <a:pPr algn="ctr"/>
+              <a:endParaRPr lang="en-US"/>
+            </a:p>
+          </p:txBody>
+        </p:sp>
+        <p:sp>
+          <p:nvSpPr>
+            <p:cNvPr id="89" name="Rectangle 88">
+              <a:extLst>
+                <a:ext uri="{FF2B5EF4-FFF2-40B4-BE49-F238E27FC236}">
+                  <a16:creationId xmlns:a16="http://schemas.microsoft.com/office/drawing/2014/main" id="{14A2D4C5-F9E5-66F0-1D47-33A62561D0A2}"/>
+                </a:ext>
+              </a:extLst>
+            </p:cNvPr>
+            <p:cNvSpPr/>
+            <p:nvPr/>
+          </p:nvSpPr>
+          <p:spPr>
+            <a:xfrm>
+              <a:off x="6539156" y="3942865"/>
+              <a:ext cx="203200" cy="203200"/>
+            </a:xfrm>
+            <a:prstGeom prst="rect">
+              <a:avLst/>
+            </a:prstGeom>
+            <a:solidFill>
+              <a:srgbClr val="F9F9F9"/>
+            </a:solidFill>
+            <a:ln>
+              <a:noFill/>
+            </a:ln>
+          </p:spPr>
+          <p:style>
+            <a:lnRef idx="2">
+              <a:schemeClr val="accent1">
+                <a:shade val="15000"/>
+              </a:schemeClr>
+            </a:lnRef>
+            <a:fillRef idx="1">
+              <a:schemeClr val="accent1"/>
+            </a:fillRef>
+            <a:effectRef idx="0">
+              <a:schemeClr val="accent1"/>
+            </a:effectRef>
+            <a:fontRef idx="minor">
+              <a:schemeClr val="lt1"/>
+            </a:fontRef>
+          </p:style>
+          <p:txBody>
+            <a:bodyPr rtlCol="0" anchor="ctr"/>
+            <a:lstStyle/>
+            <a:p>
+              <a:pPr algn="ctr"/>
+              <a:endParaRPr lang="en-US"/>
+            </a:p>
+          </p:txBody>
+        </p:sp>
+        <p:sp>
+          <p:nvSpPr>
+            <p:cNvPr id="90" name="Rectangle 89">
+              <a:extLst>
+                <a:ext uri="{FF2B5EF4-FFF2-40B4-BE49-F238E27FC236}">
+                  <a16:creationId xmlns:a16="http://schemas.microsoft.com/office/drawing/2014/main" id="{8E577C3B-6630-1B77-5E97-D243A1BF4D8C}"/>
+                </a:ext>
+              </a:extLst>
+            </p:cNvPr>
+            <p:cNvSpPr/>
+            <p:nvPr/>
+          </p:nvSpPr>
+          <p:spPr>
+            <a:xfrm>
+              <a:off x="8910924" y="3608669"/>
+              <a:ext cx="203200" cy="203200"/>
+            </a:xfrm>
+            <a:prstGeom prst="rect">
+              <a:avLst/>
+            </a:prstGeom>
+            <a:solidFill>
+              <a:srgbClr val="F9F9F9"/>
+            </a:solidFill>
+            <a:ln>
+              <a:noFill/>
+            </a:ln>
+          </p:spPr>
+          <p:style>
+            <a:lnRef idx="2">
+              <a:schemeClr val="accent1">
+                <a:shade val="15000"/>
+              </a:schemeClr>
+            </a:lnRef>
+            <a:fillRef idx="1">
+              <a:schemeClr val="accent1"/>
+            </a:fillRef>
+            <a:effectRef idx="0">
+              <a:schemeClr val="accent1"/>
+            </a:effectRef>
+            <a:fontRef idx="minor">
+              <a:schemeClr val="lt1"/>
+            </a:fontRef>
+          </p:style>
+          <p:txBody>
+            <a:bodyPr rtlCol="0" anchor="ctr"/>
+            <a:lstStyle/>
+            <a:p>
+              <a:pPr algn="ctr"/>
+              <a:endParaRPr lang="en-US"/>
+            </a:p>
+          </p:txBody>
+        </p:sp>
+        <p:sp>
+          <p:nvSpPr>
+            <p:cNvPr id="91" name="Rectangle 90">
+              <a:extLst>
+                <a:ext uri="{FF2B5EF4-FFF2-40B4-BE49-F238E27FC236}">
+                  <a16:creationId xmlns:a16="http://schemas.microsoft.com/office/drawing/2014/main" id="{56451014-E487-DF05-0D87-D2735BD1FE75}"/>
+                </a:ext>
+              </a:extLst>
+            </p:cNvPr>
+            <p:cNvSpPr/>
+            <p:nvPr/>
+          </p:nvSpPr>
+          <p:spPr>
+            <a:xfrm>
+              <a:off x="5607692" y="2575626"/>
+              <a:ext cx="203200" cy="203200"/>
+            </a:xfrm>
+            <a:prstGeom prst="rect">
+              <a:avLst/>
+            </a:prstGeom>
+            <a:solidFill>
+              <a:srgbClr val="F9F9F9"/>
+            </a:solidFill>
+            <a:ln>
+              <a:noFill/>
+            </a:ln>
+          </p:spPr>
+          <p:style>
+            <a:lnRef idx="2">
+              <a:schemeClr val="accent1">
+                <a:shade val="15000"/>
+              </a:schemeClr>
+            </a:lnRef>
+            <a:fillRef idx="1">
+              <a:schemeClr val="accent1"/>
+            </a:fillRef>
+            <a:effectRef idx="0">
+              <a:schemeClr val="accent1"/>
+            </a:effectRef>
+            <a:fontRef idx="minor">
+              <a:schemeClr val="lt1"/>
+            </a:fontRef>
+          </p:style>
+          <p:txBody>
+            <a:bodyPr rtlCol="0" anchor="ctr"/>
+            <a:lstStyle/>
+            <a:p>
+              <a:pPr algn="ctr"/>
+              <a:endParaRPr lang="en-US"/>
+            </a:p>
+          </p:txBody>
+        </p:sp>
+      </p:grpSp>
+      <p:cxnSp>
+        <p:nvCxnSpPr>
+          <p:cNvPr id="94" name="Straight Arrow Connector 93">
+            <a:extLst>
+              <a:ext uri="{FF2B5EF4-FFF2-40B4-BE49-F238E27FC236}">
+                <a16:creationId xmlns:a16="http://schemas.microsoft.com/office/drawing/2014/main" id="{45BC8C9B-6437-3937-4CAD-C09E57288064}"/>
+              </a:ext>
+            </a:extLst>
+          </p:cNvPr>
+          <p:cNvCxnSpPr>
+            <a:cxnSpLocks/>
+          </p:cNvCxnSpPr>
+          <p:nvPr/>
+        </p:nvCxnSpPr>
+        <p:spPr>
+          <a:xfrm flipH="1" flipV="1">
+            <a:off x="9921838" y="1859201"/>
+            <a:ext cx="2175" cy="1059752"/>
+          </a:xfrm>
+          <a:prstGeom prst="straightConnector1">
+            <a:avLst/>
+          </a:prstGeom>
+          <a:ln cap="rnd" cmpd="dbl">
+            <a:solidFill>
+              <a:schemeClr val="tx1"/>
+            </a:solidFill>
+            <a:prstDash val="sysDot"/>
+            <a:bevel/>
+            <a:headEnd type="none" w="lg" len="lg"/>
+            <a:tailEnd type="stealth" w="lg" len="lg"/>
+          </a:ln>
+        </p:spPr>
+        <p:style>
+          <a:lnRef idx="2">
+            <a:schemeClr val="accent1"/>
+          </a:lnRef>
+          <a:fillRef idx="0">
+            <a:schemeClr val="accent1"/>
+          </a:fillRef>
+          <a:effectRef idx="1">
+            <a:schemeClr val="accent1"/>
+          </a:effectRef>
+          <a:fontRef idx="minor">
+            <a:schemeClr val="tx1"/>
+          </a:fontRef>
+        </p:style>
+      </p:cxnSp>
+    </p:spTree>
+    <p:extLst>
+      <p:ext uri="{BB962C8B-B14F-4D97-AF65-F5344CB8AC3E}">
+        <p14:creationId xmlns:p14="http://schemas.microsoft.com/office/powerpoint/2010/main" val="2399816882"/>
+      </p:ext>
+    </p:extLst>
+  </p:cSld>
+  <p:clrMapOvr>
+    <a:masterClrMapping/>
+  </p:clrMapOvr>
+</p:sld>
+</file>
+
+<file path=ppt/slides/slide3.xml><?xml version="1.0" encoding="utf-8"?>
+<p:sld xmlns:a="http://schemas.openxmlformats.org/drawingml/2006/main" xmlns:r="http://schemas.openxmlformats.org/officeDocument/2006/relationships" xmlns:p="http://schemas.openxmlformats.org/presentationml/2006/main">
+  <p:cSld>
+    <p:spTree>
+      <p:nvGrpSpPr>
+        <p:cNvPr id="1" name="">
+          <a:extLst>
+            <a:ext uri="{FF2B5EF4-FFF2-40B4-BE49-F238E27FC236}">
+              <a16:creationId xmlns:a16="http://schemas.microsoft.com/office/drawing/2014/main" id="{E767B984-943E-4584-054C-B64B1E83CBC1}"/>
+            </a:ext>
+          </a:extLst>
+        </p:cNvPr>
+        <p:cNvGrpSpPr/>
+        <p:nvPr/>
+      </p:nvGrpSpPr>
+      <p:grpSpPr>
+        <a:xfrm>
+          <a:off x="0" y="0"/>
+          <a:ext cx="0" cy="0"/>
+          <a:chOff x="0" y="0"/>
+          <a:chExt cx="0" cy="0"/>
+        </a:xfrm>
+      </p:grpSpPr>
+      <p:sp>
+        <p:nvSpPr>
+          <p:cNvPr id="7" name="Rounded Rectangle 6">
+            <a:extLst>
+              <a:ext uri="{FF2B5EF4-FFF2-40B4-BE49-F238E27FC236}">
+                <a16:creationId xmlns:a16="http://schemas.microsoft.com/office/drawing/2014/main" id="{ECD34311-145D-08A2-F30C-F3466EA57C57}"/>
+              </a:ext>
+            </a:extLst>
+          </p:cNvPr>
+          <p:cNvSpPr/>
+          <p:nvPr/>
+        </p:nvSpPr>
+        <p:spPr>
+          <a:xfrm>
+            <a:off x="5263464" y="2918953"/>
+            <a:ext cx="2010920" cy="756401"/>
+          </a:xfrm>
+          <a:prstGeom prst="roundRect">
+            <a:avLst/>
+          </a:prstGeom>
+          <a:noFill/>
+          <a:ln>
+            <a:solidFill>
+              <a:schemeClr val="tx1"/>
+            </a:solidFill>
+          </a:ln>
+        </p:spPr>
+        <p:style>
+          <a:lnRef idx="2">
+            <a:schemeClr val="accent1">
+              <a:shade val="15000"/>
+            </a:schemeClr>
+          </a:lnRef>
+          <a:fillRef idx="1">
+            <a:schemeClr val="accent1"/>
+          </a:fillRef>
+          <a:effectRef idx="0">
+            <a:schemeClr val="accent1"/>
+          </a:effectRef>
+          <a:fontRef idx="minor">
+            <a:schemeClr val="lt1"/>
+          </a:fontRef>
+        </p:style>
+        <p:txBody>
+          <a:bodyPr rtlCol="0" anchor="ctr"/>
+          <a:lstStyle/>
+          <a:p>
+            <a:pPr algn="ctr"/>
+            <a:r>
+              <a:rPr lang="en-US" dirty="0">
+                <a:solidFill>
+                  <a:schemeClr val="tx1"/>
+                </a:solidFill>
+              </a:rPr>
+              <a:t>Ablation Engine</a:t>
+            </a:r>
+          </a:p>
+        </p:txBody>
+      </p:sp>
+      <p:sp>
+        <p:nvSpPr>
+          <p:cNvPr id="8" name="Rounded Rectangle 7">
+            <a:extLst>
+              <a:ext uri="{FF2B5EF4-FFF2-40B4-BE49-F238E27FC236}">
+                <a16:creationId xmlns:a16="http://schemas.microsoft.com/office/drawing/2014/main" id="{66AF2E0E-ED05-00C2-8862-4D630D735813}"/>
+              </a:ext>
+            </a:extLst>
+          </p:cNvPr>
+          <p:cNvSpPr/>
+          <p:nvPr/>
+        </p:nvSpPr>
+        <p:spPr>
+          <a:xfrm>
+            <a:off x="1633663" y="4053556"/>
+            <a:ext cx="2010920" cy="756401"/>
+          </a:xfrm>
+          <a:prstGeom prst="roundRect">
+            <a:avLst/>
+          </a:prstGeom>
+          <a:noFill/>
+          <a:ln>
+            <a:solidFill>
+              <a:schemeClr val="tx1"/>
+            </a:solidFill>
+          </a:ln>
+        </p:spPr>
+        <p:style>
+          <a:lnRef idx="2">
+            <a:schemeClr val="accent1">
+              <a:shade val="15000"/>
+            </a:schemeClr>
+          </a:lnRef>
+          <a:fillRef idx="1">
+            <a:schemeClr val="accent1"/>
+          </a:fillRef>
+          <a:effectRef idx="0">
+            <a:schemeClr val="accent1"/>
+          </a:effectRef>
+          <a:fontRef idx="minor">
+            <a:schemeClr val="lt1"/>
+          </a:fontRef>
+        </p:style>
+        <p:txBody>
+          <a:bodyPr rtlCol="0" anchor="ctr"/>
+          <a:lstStyle/>
+          <a:p>
+            <a:pPr algn="ctr"/>
+            <a:r>
+              <a:rPr lang="en-US" dirty="0">
+                <a:solidFill>
+                  <a:schemeClr val="tx1"/>
+                </a:solidFill>
+              </a:rPr>
+              <a:t>Data Engine</a:t>
+            </a:r>
+          </a:p>
+          <a:p>
+            <a:pPr algn="ctr"/>
+            <a:r>
+              <a:rPr lang="en-US" dirty="0">
+                <a:solidFill>
+                  <a:schemeClr val="tx1"/>
+                </a:solidFill>
+              </a:rPr>
+              <a:t>(Filter/Lineage)</a:t>
+            </a:r>
+          </a:p>
+        </p:txBody>
+      </p:sp>
+      <p:sp>
+        <p:nvSpPr>
+          <p:cNvPr id="9" name="Rounded Rectangle 8">
+            <a:extLst>
+              <a:ext uri="{FF2B5EF4-FFF2-40B4-BE49-F238E27FC236}">
+                <a16:creationId xmlns:a16="http://schemas.microsoft.com/office/drawing/2014/main" id="{FBEC1E2C-2DDB-3C19-F9FD-E936994AE3D6}"/>
+              </a:ext>
+            </a:extLst>
+          </p:cNvPr>
+          <p:cNvSpPr/>
+          <p:nvPr/>
+        </p:nvSpPr>
+        <p:spPr>
+          <a:xfrm>
+            <a:off x="8161571" y="4053555"/>
+            <a:ext cx="3478660" cy="756401"/>
+          </a:xfrm>
+          <a:prstGeom prst="roundRect">
+            <a:avLst/>
+          </a:prstGeom>
+          <a:noFill/>
+          <a:ln>
+            <a:solidFill>
+              <a:schemeClr val="tx1"/>
+            </a:solidFill>
+          </a:ln>
+        </p:spPr>
+        <p:style>
+          <a:lnRef idx="2">
+            <a:schemeClr val="accent1">
+              <a:shade val="15000"/>
+            </a:schemeClr>
+          </a:lnRef>
+          <a:fillRef idx="1">
+            <a:schemeClr val="accent1"/>
+          </a:fillRef>
+          <a:effectRef idx="0">
+            <a:schemeClr val="accent1"/>
+          </a:effectRef>
+          <a:fontRef idx="minor">
+            <a:schemeClr val="lt1"/>
+          </a:fontRef>
+        </p:style>
+        <p:txBody>
+          <a:bodyPr rtlCol="0" anchor="ctr"/>
+          <a:lstStyle/>
+          <a:p>
+            <a:pPr algn="ctr"/>
+            <a:r>
+              <a:rPr lang="en-US" dirty="0">
+                <a:solidFill>
+                  <a:schemeClr val="tx1"/>
+                </a:solidFill>
+              </a:rPr>
+              <a:t>Incremental Learning Engine</a:t>
+            </a:r>
+          </a:p>
+          <a:p>
+            <a:pPr algn="ctr"/>
+            <a:r>
+              <a:rPr lang="en-US" dirty="0">
+                <a:solidFill>
+                  <a:schemeClr val="tx1"/>
+                </a:solidFill>
+              </a:rPr>
+              <a:t>(CPT/SFT/DPO)</a:t>
+            </a:r>
+          </a:p>
+        </p:txBody>
+      </p:sp>
+      <p:sp>
+        <p:nvSpPr>
+          <p:cNvPr id="10" name="Rounded Rectangle 9">
+            <a:extLst>
+              <a:ext uri="{FF2B5EF4-FFF2-40B4-BE49-F238E27FC236}">
+                <a16:creationId xmlns:a16="http://schemas.microsoft.com/office/drawing/2014/main" id="{59D9BAE0-D83D-5F52-D14D-77356661F0BD}"/>
+              </a:ext>
+            </a:extLst>
+          </p:cNvPr>
+          <p:cNvSpPr/>
+          <p:nvPr/>
+        </p:nvSpPr>
+        <p:spPr>
+          <a:xfrm>
+            <a:off x="5263464" y="4053556"/>
+            <a:ext cx="2010920" cy="756401"/>
+          </a:xfrm>
+          <a:prstGeom prst="roundRect">
+            <a:avLst/>
+          </a:prstGeom>
+          <a:noFill/>
+          <a:ln>
+            <a:solidFill>
+              <a:schemeClr val="tx1"/>
+            </a:solidFill>
+            <a:prstDash val="solid"/>
+          </a:ln>
+        </p:spPr>
+        <p:style>
+          <a:lnRef idx="2">
+            <a:schemeClr val="accent1">
+              <a:shade val="15000"/>
+            </a:schemeClr>
+          </a:lnRef>
+          <a:fillRef idx="1">
+            <a:schemeClr val="accent1"/>
+          </a:fillRef>
+          <a:effectRef idx="0">
+            <a:schemeClr val="accent1"/>
+          </a:effectRef>
+          <a:fontRef idx="minor">
+            <a:schemeClr val="lt1"/>
+          </a:fontRef>
+        </p:style>
+        <p:txBody>
+          <a:bodyPr rtlCol="0" anchor="ctr"/>
+          <a:lstStyle/>
+          <a:p>
+            <a:pPr algn="ctr"/>
+            <a:r>
+              <a:rPr lang="en-US" dirty="0">
+                <a:solidFill>
+                  <a:schemeClr val="tx1"/>
+                </a:solidFill>
+              </a:rPr>
+              <a:t>Blender</a:t>
+            </a:r>
+          </a:p>
+        </p:txBody>
+      </p:sp>
+      <p:sp>
+        <p:nvSpPr>
+          <p:cNvPr id="12" name="Rounded Rectangle 11">
+            <a:extLst>
+              <a:ext uri="{FF2B5EF4-FFF2-40B4-BE49-F238E27FC236}">
+                <a16:creationId xmlns:a16="http://schemas.microsoft.com/office/drawing/2014/main" id="{8ECC5A4C-3C18-9FDE-8315-B378AB4A00E6}"/>
+              </a:ext>
+            </a:extLst>
+          </p:cNvPr>
+          <p:cNvSpPr/>
+          <p:nvPr/>
+        </p:nvSpPr>
+        <p:spPr>
+          <a:xfrm>
+            <a:off x="8893267" y="2918954"/>
+            <a:ext cx="2010920" cy="756401"/>
+          </a:xfrm>
+          <a:prstGeom prst="roundRect">
+            <a:avLst/>
+          </a:prstGeom>
+          <a:noFill/>
+          <a:ln>
+            <a:solidFill>
+              <a:schemeClr val="tx1"/>
+            </a:solidFill>
+            <a:prstDash val="solid"/>
+          </a:ln>
+        </p:spPr>
+        <p:style>
+          <a:lnRef idx="2">
+            <a:schemeClr val="accent1">
+              <a:shade val="15000"/>
+            </a:schemeClr>
+          </a:lnRef>
+          <a:fillRef idx="1">
+            <a:schemeClr val="accent1"/>
+          </a:fillRef>
+          <a:effectRef idx="0">
+            <a:schemeClr val="accent1"/>
+          </a:effectRef>
+          <a:fontRef idx="minor">
+            <a:schemeClr val="lt1"/>
+          </a:fontRef>
+        </p:style>
+        <p:txBody>
+          <a:bodyPr rtlCol="0" anchor="ctr"/>
+          <a:lstStyle/>
+          <a:p>
+            <a:pPr algn="ctr"/>
+            <a:r>
+              <a:rPr lang="en-US" dirty="0">
+                <a:solidFill>
+                  <a:schemeClr val="tx1"/>
+                </a:solidFill>
+              </a:rPr>
+              <a:t>Offline OCE</a:t>
+            </a:r>
+          </a:p>
+        </p:txBody>
+      </p:sp>
+      <p:grpSp>
+        <p:nvGrpSpPr>
+          <p:cNvPr id="18" name="Group 17">
+            <a:extLst>
+              <a:ext uri="{FF2B5EF4-FFF2-40B4-BE49-F238E27FC236}">
+                <a16:creationId xmlns:a16="http://schemas.microsoft.com/office/drawing/2014/main" id="{F739EC5F-AC0D-D1C1-68D8-2596D8AF0024}"/>
+              </a:ext>
+            </a:extLst>
+          </p:cNvPr>
+          <p:cNvGrpSpPr/>
+          <p:nvPr/>
+        </p:nvGrpSpPr>
+        <p:grpSpPr>
+          <a:xfrm>
+            <a:off x="2020425" y="750372"/>
+            <a:ext cx="9423334" cy="1138550"/>
+            <a:chOff x="2020425" y="750372"/>
+            <a:chExt cx="9423334" cy="1138550"/>
+          </a:xfrm>
+        </p:grpSpPr>
+        <p:sp>
+          <p:nvSpPr>
+            <p:cNvPr id="6" name="Rounded Rectangle 5">
+              <a:extLst>
+                <a:ext uri="{FF2B5EF4-FFF2-40B4-BE49-F238E27FC236}">
+                  <a16:creationId xmlns:a16="http://schemas.microsoft.com/office/drawing/2014/main" id="{A9BC0D91-9270-DC13-2181-AF360A94B9EF}"/>
+                </a:ext>
+              </a:extLst>
+            </p:cNvPr>
+            <p:cNvSpPr/>
+            <p:nvPr/>
+          </p:nvSpPr>
+          <p:spPr>
+            <a:xfrm>
+              <a:off x="8404268" y="821773"/>
+              <a:ext cx="3039491" cy="1042939"/>
+            </a:xfrm>
+            <a:prstGeom prst="roundRect">
+              <a:avLst/>
+            </a:prstGeom>
+            <a:noFill/>
+            <a:ln>
+              <a:solidFill>
+                <a:schemeClr val="tx1"/>
+              </a:solidFill>
+            </a:ln>
+          </p:spPr>
+          <p:style>
+            <a:lnRef idx="2">
+              <a:schemeClr val="accent1">
+                <a:shade val="15000"/>
+              </a:schemeClr>
+            </a:lnRef>
+            <a:fillRef idx="1">
+              <a:schemeClr val="accent1"/>
+            </a:fillRef>
+            <a:effectRef idx="0">
+              <a:schemeClr val="accent1"/>
+            </a:effectRef>
+            <a:fontRef idx="minor">
+              <a:schemeClr val="lt1"/>
+            </a:fontRef>
+          </p:style>
+          <p:txBody>
+            <a:bodyPr rtlCol="0" anchor="ctr"/>
+            <a:lstStyle/>
+            <a:p>
+              <a:pPr algn="ctr"/>
+              <a:r>
+                <a:rPr lang="en-US" dirty="0">
+                  <a:solidFill>
+                    <a:schemeClr val="tx1"/>
+                  </a:solidFill>
+                </a:rPr>
+                <a:t>Shadowing/</a:t>
+              </a:r>
+            </a:p>
+            <a:p>
+              <a:pPr algn="ctr"/>
+              <a:r>
+                <a:rPr lang="en-US" dirty="0">
+                  <a:solidFill>
+                    <a:schemeClr val="tx1"/>
+                  </a:solidFill>
+                </a:rPr>
+                <a:t>AB Testing/</a:t>
+              </a:r>
+            </a:p>
+            <a:p>
+              <a:pPr algn="ctr"/>
+              <a:r>
+                <a:rPr lang="en-US" dirty="0">
+                  <a:solidFill>
+                    <a:schemeClr val="tx1"/>
+                  </a:solidFill>
+                </a:rPr>
+                <a:t>Guardrail Policy</a:t>
+              </a:r>
+            </a:p>
+          </p:txBody>
+        </p:sp>
+        <p:sp>
+          <p:nvSpPr>
+            <p:cNvPr id="11" name="Rounded Rectangle 10">
+              <a:extLst>
+                <a:ext uri="{FF2B5EF4-FFF2-40B4-BE49-F238E27FC236}">
+                  <a16:creationId xmlns:a16="http://schemas.microsoft.com/office/drawing/2014/main" id="{6135F01C-95EA-043C-A6C9-FE87770C476A}"/>
+                </a:ext>
+              </a:extLst>
+            </p:cNvPr>
+            <p:cNvSpPr/>
+            <p:nvPr/>
+          </p:nvSpPr>
+          <p:spPr>
+            <a:xfrm>
+              <a:off x="5263464" y="960947"/>
+              <a:ext cx="2206928" cy="756401"/>
+            </a:xfrm>
+            <a:prstGeom prst="roundRect">
+              <a:avLst/>
+            </a:prstGeom>
+            <a:noFill/>
+            <a:ln>
+              <a:solidFill>
+                <a:schemeClr val="tx1"/>
+              </a:solidFill>
+              <a:prstDash val="solid"/>
+            </a:ln>
+          </p:spPr>
+          <p:style>
+            <a:lnRef idx="2">
+              <a:schemeClr val="accent1">
+                <a:shade val="15000"/>
+              </a:schemeClr>
+            </a:lnRef>
+            <a:fillRef idx="1">
+              <a:schemeClr val="accent1"/>
+            </a:fillRef>
+            <a:effectRef idx="0">
+              <a:schemeClr val="accent1"/>
+            </a:effectRef>
+            <a:fontRef idx="minor">
+              <a:schemeClr val="lt1"/>
+            </a:fontRef>
+          </p:style>
+          <p:txBody>
+            <a:bodyPr rtlCol="0" anchor="ctr"/>
+            <a:lstStyle/>
+            <a:p>
+              <a:pPr algn="ctr"/>
+              <a:r>
+                <a:rPr lang="en-US" dirty="0">
+                  <a:solidFill>
+                    <a:schemeClr val="tx1"/>
+                  </a:solidFill>
+                </a:rPr>
+                <a:t>Inference/</a:t>
+              </a:r>
+            </a:p>
+            <a:p>
+              <a:pPr algn="ctr"/>
+              <a:r>
+                <a:rPr lang="en-US" dirty="0">
+                  <a:solidFill>
+                    <a:schemeClr val="tx1"/>
+                  </a:solidFill>
+                </a:rPr>
+                <a:t>Runtime Service</a:t>
+              </a:r>
+            </a:p>
+          </p:txBody>
+        </p:sp>
+        <p:grpSp>
+          <p:nvGrpSpPr>
+            <p:cNvPr id="36" name="Group 35">
+              <a:extLst>
+                <a:ext uri="{FF2B5EF4-FFF2-40B4-BE49-F238E27FC236}">
+                  <a16:creationId xmlns:a16="http://schemas.microsoft.com/office/drawing/2014/main" id="{59AAF799-505E-0CC2-5171-576CE9E760C0}"/>
+                </a:ext>
+              </a:extLst>
+            </p:cNvPr>
+            <p:cNvGrpSpPr/>
+            <p:nvPr/>
+          </p:nvGrpSpPr>
+          <p:grpSpPr>
+            <a:xfrm>
+              <a:off x="2020425" y="750372"/>
+              <a:ext cx="1226867" cy="1138550"/>
+              <a:chOff x="3117593" y="1730157"/>
+              <a:chExt cx="1115755" cy="1035437"/>
+            </a:xfrm>
+          </p:grpSpPr>
+          <p:sp>
+            <p:nvSpPr>
+              <p:cNvPr id="5" name="Can 4">
+                <a:extLst>
+                  <a:ext uri="{FF2B5EF4-FFF2-40B4-BE49-F238E27FC236}">
+                    <a16:creationId xmlns:a16="http://schemas.microsoft.com/office/drawing/2014/main" id="{8A27ADA7-70B1-12DB-910B-2B1E584C6808}"/>
+                  </a:ext>
+                </a:extLst>
+              </p:cNvPr>
+              <p:cNvSpPr/>
+              <p:nvPr/>
+            </p:nvSpPr>
+            <p:spPr>
+              <a:xfrm>
+                <a:off x="3122008" y="1730157"/>
+                <a:ext cx="1025576" cy="1035437"/>
+              </a:xfrm>
+              <a:prstGeom prst="can">
+                <a:avLst/>
+              </a:prstGeom>
+              <a:noFill/>
+              <a:ln>
+                <a:solidFill>
+                  <a:schemeClr val="tx1"/>
+                </a:solidFill>
+              </a:ln>
+            </p:spPr>
+            <p:style>
+              <a:lnRef idx="2">
+                <a:schemeClr val="accent1">
+                  <a:shade val="15000"/>
+                </a:schemeClr>
+              </a:lnRef>
+              <a:fillRef idx="1">
+                <a:schemeClr val="accent1"/>
+              </a:fillRef>
+              <a:effectRef idx="0">
+                <a:schemeClr val="accent1"/>
+              </a:effectRef>
+              <a:fontRef idx="minor">
+                <a:schemeClr val="lt1"/>
+              </a:fontRef>
+            </p:style>
+            <p:txBody>
+              <a:bodyPr rtlCol="0" anchor="ctr"/>
+              <a:lstStyle/>
+              <a:p>
+                <a:pPr algn="ctr"/>
+                <a:endParaRPr lang="en-US" dirty="0"/>
+              </a:p>
+            </p:txBody>
+          </p:sp>
+          <p:sp>
+            <p:nvSpPr>
+              <p:cNvPr id="17" name="TextBox 16">
+                <a:extLst>
+                  <a:ext uri="{FF2B5EF4-FFF2-40B4-BE49-F238E27FC236}">
+                    <a16:creationId xmlns:a16="http://schemas.microsoft.com/office/drawing/2014/main" id="{9FE8D0DB-8FCC-5F72-1622-C7A2CE824559}"/>
+                  </a:ext>
+                </a:extLst>
+              </p:cNvPr>
+              <p:cNvSpPr txBox="1"/>
+              <p:nvPr/>
+            </p:nvSpPr>
+            <p:spPr>
+              <a:xfrm>
+                <a:off x="3117593" y="1996200"/>
+                <a:ext cx="1115755" cy="584775"/>
+              </a:xfrm>
+              <a:prstGeom prst="rect">
+                <a:avLst/>
+              </a:prstGeom>
+              <a:noFill/>
+            </p:spPr>
+            <p:txBody>
+              <a:bodyPr wrap="none" rtlCol="0">
+                <a:spAutoFit/>
+              </a:bodyPr>
+              <a:lstStyle/>
+              <a:p>
+                <a:r>
+                  <a:rPr lang="en-US" sz="1600" dirty="0"/>
+                  <a:t>Online</a:t>
+                </a:r>
+              </a:p>
+              <a:p>
+                <a:r>
+                  <a:rPr lang="en-US" sz="1600" dirty="0"/>
+                  <a:t>Data Store</a:t>
+                </a:r>
+              </a:p>
+            </p:txBody>
+          </p:sp>
+        </p:grpSp>
+      </p:grpSp>
+      <p:grpSp>
+        <p:nvGrpSpPr>
+          <p:cNvPr id="3" name="Group 2">
+            <a:extLst>
+              <a:ext uri="{FF2B5EF4-FFF2-40B4-BE49-F238E27FC236}">
+                <a16:creationId xmlns:a16="http://schemas.microsoft.com/office/drawing/2014/main" id="{7B458487-9888-67F3-44A6-5ACBBC74A9E6}"/>
+              </a:ext>
+            </a:extLst>
+          </p:cNvPr>
+          <p:cNvGrpSpPr/>
+          <p:nvPr/>
+        </p:nvGrpSpPr>
+        <p:grpSpPr>
+          <a:xfrm>
+            <a:off x="296641" y="155400"/>
+            <a:ext cx="2292281" cy="3898155"/>
+            <a:chOff x="296641" y="155400"/>
+            <a:chExt cx="2292281" cy="3898155"/>
+          </a:xfrm>
+        </p:grpSpPr>
+        <p:sp>
+          <p:nvSpPr>
+            <p:cNvPr id="4" name="Can 3">
+              <a:extLst>
+                <a:ext uri="{FF2B5EF4-FFF2-40B4-BE49-F238E27FC236}">
+                  <a16:creationId xmlns:a16="http://schemas.microsoft.com/office/drawing/2014/main" id="{EDD96D33-8828-4EFB-9FCF-5EF1FB2C9F25}"/>
+                </a:ext>
+              </a:extLst>
+            </p:cNvPr>
+            <p:cNvSpPr/>
+            <p:nvPr/>
+          </p:nvSpPr>
+          <p:spPr>
+            <a:xfrm>
+              <a:off x="670193" y="750372"/>
+              <a:ext cx="1127707" cy="1138550"/>
+            </a:xfrm>
+            <a:prstGeom prst="can">
+              <a:avLst/>
+            </a:prstGeom>
+            <a:noFill/>
+            <a:ln>
+              <a:solidFill>
+                <a:schemeClr val="tx1"/>
+              </a:solidFill>
+            </a:ln>
+          </p:spPr>
+          <p:style>
+            <a:lnRef idx="2">
+              <a:schemeClr val="accent1">
+                <a:shade val="15000"/>
+              </a:schemeClr>
+            </a:lnRef>
+            <a:fillRef idx="1">
+              <a:schemeClr val="accent1"/>
+            </a:fillRef>
+            <a:effectRef idx="0">
+              <a:schemeClr val="accent1"/>
+            </a:effectRef>
+            <a:fontRef idx="minor">
+              <a:schemeClr val="lt1"/>
+            </a:fontRef>
+          </p:style>
+          <p:txBody>
+            <a:bodyPr rtlCol="0" anchor="ctr"/>
+            <a:lstStyle/>
+            <a:p>
+              <a:pPr algn="ctr"/>
+              <a:endParaRPr lang="en-US" dirty="0"/>
+            </a:p>
+          </p:txBody>
+        </p:sp>
+        <p:sp>
+          <p:nvSpPr>
+            <p:cNvPr id="16" name="TextBox 15">
+              <a:extLst>
+                <a:ext uri="{FF2B5EF4-FFF2-40B4-BE49-F238E27FC236}">
+                  <a16:creationId xmlns:a16="http://schemas.microsoft.com/office/drawing/2014/main" id="{8DF739B8-D111-1807-5539-AA1832244F3C}"/>
+                </a:ext>
+              </a:extLst>
+            </p:cNvPr>
+            <p:cNvSpPr txBox="1"/>
+            <p:nvPr/>
+          </p:nvSpPr>
+          <p:spPr>
+            <a:xfrm>
+              <a:off x="655336" y="1042910"/>
+              <a:ext cx="1226867" cy="643009"/>
+            </a:xfrm>
+            <a:prstGeom prst="rect">
+              <a:avLst/>
+            </a:prstGeom>
+            <a:noFill/>
+          </p:spPr>
+          <p:txBody>
+            <a:bodyPr wrap="none" rtlCol="0">
+              <a:spAutoFit/>
+            </a:bodyPr>
+            <a:lstStyle/>
+            <a:p>
+              <a:r>
+                <a:rPr lang="en-US" sz="1600" dirty="0"/>
+                <a:t>Offline</a:t>
+              </a:r>
+            </a:p>
+            <a:p>
+              <a:r>
+                <a:rPr lang="en-US" sz="1600" dirty="0"/>
+                <a:t>Data Store</a:t>
+              </a:r>
+            </a:p>
+          </p:txBody>
+        </p:sp>
+        <p:cxnSp>
+          <p:nvCxnSpPr>
+            <p:cNvPr id="39" name="Elbow Connector 38">
+              <a:extLst>
+                <a:ext uri="{FF2B5EF4-FFF2-40B4-BE49-F238E27FC236}">
+                  <a16:creationId xmlns:a16="http://schemas.microsoft.com/office/drawing/2014/main" id="{374C0165-13B5-D1EF-8B62-BF726C4D33AF}"/>
+                </a:ext>
+              </a:extLst>
+            </p:cNvPr>
+            <p:cNvCxnSpPr>
+              <a:cxnSpLocks/>
+              <a:stCxn id="4" idx="3"/>
+            </p:cNvCxnSpPr>
+            <p:nvPr/>
+          </p:nvCxnSpPr>
+          <p:spPr>
+            <a:xfrm rot="16200000" flipH="1">
+              <a:off x="829168" y="2293801"/>
+              <a:ext cx="2164633" cy="1354875"/>
+            </a:xfrm>
+            <a:prstGeom prst="bentConnector3">
+              <a:avLst>
+                <a:gd name="adj1" fmla="val 67503"/>
+              </a:avLst>
+            </a:prstGeom>
+            <a:ln cap="rnd" cmpd="dbl">
+              <a:solidFill>
+                <a:schemeClr val="tx1"/>
+              </a:solidFill>
+              <a:prstDash val="sysDot"/>
+              <a:bevel/>
+              <a:headEnd type="none" w="lg" len="lg"/>
+              <a:tailEnd type="stealth" w="lg" len="lg"/>
+            </a:ln>
+          </p:spPr>
+          <p:style>
+            <a:lnRef idx="2">
+              <a:schemeClr val="accent1"/>
+            </a:lnRef>
+            <a:fillRef idx="0">
+              <a:schemeClr val="accent1"/>
+            </a:fillRef>
+            <a:effectRef idx="1">
+              <a:schemeClr val="accent1"/>
+            </a:effectRef>
+            <a:fontRef idx="minor">
+              <a:schemeClr val="tx1"/>
+            </a:fontRef>
+          </p:style>
+        </p:cxnSp>
+        <p:sp>
+          <p:nvSpPr>
+            <p:cNvPr id="50" name="TextBox 49">
+              <a:extLst>
+                <a:ext uri="{FF2B5EF4-FFF2-40B4-BE49-F238E27FC236}">
+                  <a16:creationId xmlns:a16="http://schemas.microsoft.com/office/drawing/2014/main" id="{1309AFE8-E28D-C6B6-2DE2-2C7667BFF034}"/>
+                </a:ext>
+              </a:extLst>
+            </p:cNvPr>
+            <p:cNvSpPr txBox="1"/>
+            <p:nvPr/>
+          </p:nvSpPr>
+          <p:spPr>
+            <a:xfrm>
+              <a:off x="296641" y="155400"/>
+              <a:ext cx="1874812" cy="406112"/>
+            </a:xfrm>
+            <a:prstGeom prst="rect">
+              <a:avLst/>
+            </a:prstGeom>
+            <a:noFill/>
+          </p:spPr>
+          <p:txBody>
+            <a:bodyPr wrap="none" rtlCol="0">
+              <a:spAutoFit/>
+            </a:bodyPr>
+            <a:lstStyle/>
+            <a:p>
+              <a:r>
+                <a:rPr lang="en-US" dirty="0"/>
+                <a:t>Customer Data</a:t>
+              </a:r>
+            </a:p>
+          </p:txBody>
+        </p:sp>
+        <p:cxnSp>
+          <p:nvCxnSpPr>
+            <p:cNvPr id="51" name="Straight Arrow Connector 50">
+              <a:extLst>
+                <a:ext uri="{FF2B5EF4-FFF2-40B4-BE49-F238E27FC236}">
+                  <a16:creationId xmlns:a16="http://schemas.microsoft.com/office/drawing/2014/main" id="{3975D18B-ED8E-199A-3A36-C7E08AF2975A}"/>
+                </a:ext>
+              </a:extLst>
+            </p:cNvPr>
+            <p:cNvCxnSpPr>
+              <a:cxnSpLocks/>
+            </p:cNvCxnSpPr>
+            <p:nvPr/>
+          </p:nvCxnSpPr>
+          <p:spPr>
+            <a:xfrm>
+              <a:off x="1217683" y="445902"/>
+              <a:ext cx="2342" cy="318611"/>
+            </a:xfrm>
+            <a:prstGeom prst="straightConnector1">
+              <a:avLst/>
+            </a:prstGeom>
+            <a:ln cap="rnd" cmpd="dbl">
+              <a:solidFill>
+                <a:schemeClr val="tx1"/>
+              </a:solidFill>
+              <a:prstDash val="sysDot"/>
+              <a:bevel/>
+              <a:headEnd type="none" w="lg" len="lg"/>
+              <a:tailEnd type="stealth" w="lg" len="lg"/>
+            </a:ln>
+          </p:spPr>
+          <p:style>
+            <a:lnRef idx="2">
+              <a:schemeClr val="accent1"/>
+            </a:lnRef>
+            <a:fillRef idx="0">
+              <a:schemeClr val="accent1"/>
+            </a:fillRef>
+            <a:effectRef idx="1">
+              <a:schemeClr val="accent1"/>
+            </a:effectRef>
+            <a:fontRef idx="minor">
+              <a:schemeClr val="tx1"/>
+            </a:fontRef>
+          </p:style>
+        </p:cxnSp>
+      </p:grpSp>
+      <p:grpSp>
+        <p:nvGrpSpPr>
+          <p:cNvPr id="19" name="Group 18">
+            <a:extLst>
+              <a:ext uri="{FF2B5EF4-FFF2-40B4-BE49-F238E27FC236}">
+                <a16:creationId xmlns:a16="http://schemas.microsoft.com/office/drawing/2014/main" id="{7924EE1B-D146-5468-6EF4-A3ADFB5E1B7F}"/>
+              </a:ext>
+            </a:extLst>
+          </p:cNvPr>
+          <p:cNvGrpSpPr/>
+          <p:nvPr/>
+        </p:nvGrpSpPr>
+        <p:grpSpPr>
+          <a:xfrm>
+            <a:off x="6268924" y="2143795"/>
+            <a:ext cx="5371307" cy="2287961"/>
+            <a:chOff x="6268924" y="2143795"/>
+            <a:chExt cx="5371307" cy="2287961"/>
+          </a:xfrm>
+        </p:grpSpPr>
+        <p:sp>
+          <p:nvSpPr>
+            <p:cNvPr id="77" name="TextBox 76">
+              <a:extLst>
+                <a:ext uri="{FF2B5EF4-FFF2-40B4-BE49-F238E27FC236}">
+                  <a16:creationId xmlns:a16="http://schemas.microsoft.com/office/drawing/2014/main" id="{F5B6FF83-568D-E38C-2111-BD72E693BFD4}"/>
+                </a:ext>
+              </a:extLst>
+            </p:cNvPr>
+            <p:cNvSpPr txBox="1"/>
+            <p:nvPr/>
+          </p:nvSpPr>
+          <p:spPr>
+            <a:xfrm>
+              <a:off x="6650942" y="2143795"/>
+              <a:ext cx="3013496" cy="523220"/>
+            </a:xfrm>
+            <a:custGeom>
+              <a:avLst/>
+              <a:gdLst>
+                <a:gd name="csX0" fmla="*/ 0 w 3013496"/>
+                <a:gd name="csY0" fmla="*/ 0 h 523220"/>
+                <a:gd name="csX1" fmla="*/ 472114 w 3013496"/>
+                <a:gd name="csY1" fmla="*/ 0 h 523220"/>
+                <a:gd name="csX2" fmla="*/ 883959 w 3013496"/>
+                <a:gd name="csY2" fmla="*/ 0 h 523220"/>
+                <a:gd name="csX3" fmla="*/ 1446478 w 3013496"/>
+                <a:gd name="csY3" fmla="*/ 0 h 523220"/>
+                <a:gd name="csX4" fmla="*/ 1918592 w 3013496"/>
+                <a:gd name="csY4" fmla="*/ 0 h 523220"/>
+                <a:gd name="csX5" fmla="*/ 2390707 w 3013496"/>
+                <a:gd name="csY5" fmla="*/ 0 h 523220"/>
+                <a:gd name="csX6" fmla="*/ 3013496 w 3013496"/>
+                <a:gd name="csY6" fmla="*/ 0 h 523220"/>
+                <a:gd name="csX7" fmla="*/ 3013496 w 3013496"/>
+                <a:gd name="csY7" fmla="*/ 523220 h 523220"/>
+                <a:gd name="csX8" fmla="*/ 2511247 w 3013496"/>
+                <a:gd name="csY8" fmla="*/ 523220 h 523220"/>
+                <a:gd name="csX9" fmla="*/ 2099402 w 3013496"/>
+                <a:gd name="csY9" fmla="*/ 523220 h 523220"/>
+                <a:gd name="csX10" fmla="*/ 1597153 w 3013496"/>
+                <a:gd name="csY10" fmla="*/ 523220 h 523220"/>
+                <a:gd name="csX11" fmla="*/ 1094904 w 3013496"/>
+                <a:gd name="csY11" fmla="*/ 523220 h 523220"/>
+                <a:gd name="csX12" fmla="*/ 622789 w 3013496"/>
+                <a:gd name="csY12" fmla="*/ 523220 h 523220"/>
+                <a:gd name="csX13" fmla="*/ 0 w 3013496"/>
+                <a:gd name="csY13" fmla="*/ 523220 h 523220"/>
+                <a:gd name="csX14" fmla="*/ 0 w 3013496"/>
+                <a:gd name="csY14" fmla="*/ 0 h 523220"/>
+              </a:gdLst>
+              <a:ahLst/>
+              <a:cxnLst>
+                <a:cxn ang="0">
+                  <a:pos x="csX0" y="csY0"/>
+                </a:cxn>
+                <a:cxn ang="0">
+                  <a:pos x="csX1" y="csY1"/>
+                </a:cxn>
+                <a:cxn ang="0">
+                  <a:pos x="csX2" y="csY2"/>
+                </a:cxn>
+                <a:cxn ang="0">
+                  <a:pos x="csX3" y="csY3"/>
+                </a:cxn>
+                <a:cxn ang="0">
+                  <a:pos x="csX4" y="csY4"/>
+                </a:cxn>
+                <a:cxn ang="0">
+                  <a:pos x="csX5" y="csY5"/>
+                </a:cxn>
+                <a:cxn ang="0">
+                  <a:pos x="csX6" y="csY6"/>
+                </a:cxn>
+                <a:cxn ang="0">
+                  <a:pos x="csX7" y="csY7"/>
+                </a:cxn>
+                <a:cxn ang="0">
+                  <a:pos x="csX8" y="csY8"/>
+                </a:cxn>
+                <a:cxn ang="0">
+                  <a:pos x="csX9" y="csY9"/>
+                </a:cxn>
+                <a:cxn ang="0">
+                  <a:pos x="csX10" y="csY10"/>
+                </a:cxn>
+                <a:cxn ang="0">
+                  <a:pos x="csX11" y="csY11"/>
+                </a:cxn>
+                <a:cxn ang="0">
+                  <a:pos x="csX12" y="csY12"/>
+                </a:cxn>
+                <a:cxn ang="0">
+                  <a:pos x="csX13" y="csY13"/>
+                </a:cxn>
+                <a:cxn ang="0">
+                  <a:pos x="csX14" y="csY14"/>
+                </a:cxn>
+              </a:cxnLst>
+              <a:rect l="l" t="t" r="r" b="b"/>
+              <a:pathLst>
+                <a:path w="3013496" h="523220" extrusionOk="0">
+                  <a:moveTo>
+                    <a:pt x="0" y="0"/>
+                  </a:moveTo>
+                  <a:cubicBezTo>
+                    <a:pt x="178591" y="-18476"/>
+                    <a:pt x="258274" y="14828"/>
+                    <a:pt x="472114" y="0"/>
+                  </a:cubicBezTo>
+                  <a:cubicBezTo>
+                    <a:pt x="685954" y="-14828"/>
+                    <a:pt x="738703" y="37308"/>
+                    <a:pt x="883959" y="0"/>
+                  </a:cubicBezTo>
+                  <a:cubicBezTo>
+                    <a:pt x="1029216" y="-37308"/>
+                    <a:pt x="1257349" y="751"/>
+                    <a:pt x="1446478" y="0"/>
+                  </a:cubicBezTo>
+                  <a:cubicBezTo>
+                    <a:pt x="1635607" y="-751"/>
+                    <a:pt x="1751149" y="38921"/>
+                    <a:pt x="1918592" y="0"/>
+                  </a:cubicBezTo>
+                  <a:cubicBezTo>
+                    <a:pt x="2086035" y="-38921"/>
+                    <a:pt x="2198579" y="8883"/>
+                    <a:pt x="2390707" y="0"/>
+                  </a:cubicBezTo>
+                  <a:cubicBezTo>
+                    <a:pt x="2582835" y="-8883"/>
+                    <a:pt x="2778145" y="48306"/>
+                    <a:pt x="3013496" y="0"/>
+                  </a:cubicBezTo>
+                  <a:cubicBezTo>
+                    <a:pt x="3041803" y="213097"/>
+                    <a:pt x="3004382" y="279283"/>
+                    <a:pt x="3013496" y="523220"/>
+                  </a:cubicBezTo>
+                  <a:cubicBezTo>
+                    <a:pt x="2816850" y="548616"/>
+                    <a:pt x="2736183" y="483357"/>
+                    <a:pt x="2511247" y="523220"/>
+                  </a:cubicBezTo>
+                  <a:cubicBezTo>
+                    <a:pt x="2286311" y="563083"/>
+                    <a:pt x="2263862" y="513624"/>
+                    <a:pt x="2099402" y="523220"/>
+                  </a:cubicBezTo>
+                  <a:cubicBezTo>
+                    <a:pt x="1934943" y="532816"/>
+                    <a:pt x="1840703" y="475680"/>
+                    <a:pt x="1597153" y="523220"/>
+                  </a:cubicBezTo>
+                  <a:cubicBezTo>
+                    <a:pt x="1353603" y="570760"/>
+                    <a:pt x="1342868" y="486356"/>
+                    <a:pt x="1094904" y="523220"/>
+                  </a:cubicBezTo>
+                  <a:cubicBezTo>
+                    <a:pt x="846940" y="560084"/>
+                    <a:pt x="763760" y="494826"/>
+                    <a:pt x="622789" y="523220"/>
+                  </a:cubicBezTo>
+                  <a:cubicBezTo>
+                    <a:pt x="481818" y="551614"/>
+                    <a:pt x="237513" y="474944"/>
+                    <a:pt x="0" y="523220"/>
+                  </a:cubicBezTo>
+                  <a:cubicBezTo>
+                    <a:pt x="-48283" y="282564"/>
+                    <a:pt x="3191" y="249525"/>
+                    <a:pt x="0" y="0"/>
+                  </a:cubicBezTo>
+                  <a:close/>
+                </a:path>
+              </a:pathLst>
+            </a:custGeom>
+            <a:noFill/>
+            <a:ln>
+              <a:solidFill>
+                <a:schemeClr val="tx1"/>
+              </a:solidFill>
+              <a:prstDash val="dash"/>
+              <a:extLst>
+                <a:ext uri="{C807C97D-BFC1-408E-A445-0C87EB9F89A2}">
+                  <ask:lineSketchStyleProps xmlns:ask="http://schemas.microsoft.com/office/drawing/2018/sketchyshapes" sd="1219033472">
+                    <a:prstGeom prst="rect">
+                      <a:avLst/>
+                    </a:prstGeom>
+                    <ask:type>
+                      <ask:lineSketchScribble/>
+                    </ask:type>
+                  </ask:lineSketchStyleProps>
+                </a:ext>
+              </a:extLst>
+            </a:ln>
+          </p:spPr>
+          <p:txBody>
+            <a:bodyPr wrap="square" rtlCol="0">
+              <a:spAutoFit/>
+            </a:bodyPr>
+            <a:lstStyle/>
+            <a:p>
+              <a:pPr algn="ctr"/>
+              <a:r>
+                <a:rPr lang="en-US" sz="1400" dirty="0"/>
+                <a:t>Core Training Stack (UM/</a:t>
+              </a:r>
+            </a:p>
+            <a:p>
+              <a:pPr algn="ctr"/>
+              <a:r>
+                <a:rPr lang="en-US" sz="1400" dirty="0" err="1"/>
+                <a:t>OmegaT</a:t>
+              </a:r>
+              <a:r>
+                <a:rPr lang="en-US" sz="1400" dirty="0"/>
+                <a:t>/Nemo/Megatron-LM/...)</a:t>
+              </a:r>
+            </a:p>
+          </p:txBody>
+        </p:sp>
+        <p:cxnSp>
+          <p:nvCxnSpPr>
+            <p:cNvPr id="61" name="Elbow Connector 60">
+              <a:extLst>
+                <a:ext uri="{FF2B5EF4-FFF2-40B4-BE49-F238E27FC236}">
+                  <a16:creationId xmlns:a16="http://schemas.microsoft.com/office/drawing/2014/main" id="{A7D8D45A-8021-0255-E3C5-6B29A6B1ED91}"/>
+                </a:ext>
+              </a:extLst>
+            </p:cNvPr>
+            <p:cNvCxnSpPr>
+              <a:cxnSpLocks/>
+              <a:stCxn id="9" idx="3"/>
+              <a:endCxn id="72" idx="2"/>
+            </p:cNvCxnSpPr>
+            <p:nvPr/>
+          </p:nvCxnSpPr>
+          <p:spPr>
+            <a:xfrm flipH="1" flipV="1">
+              <a:off x="9596838" y="2279317"/>
+              <a:ext cx="2043393" cy="2152439"/>
+            </a:xfrm>
+            <a:prstGeom prst="bentConnector3">
+              <a:avLst>
+                <a:gd name="adj1" fmla="val -15152"/>
+              </a:avLst>
+            </a:prstGeom>
+            <a:ln>
+              <a:headEnd type="stealth"/>
+              <a:tailEnd type="none"/>
+            </a:ln>
+          </p:spPr>
+          <p:style>
+            <a:lnRef idx="2">
+              <a:schemeClr val="accent1"/>
+            </a:lnRef>
+            <a:fillRef idx="0">
+              <a:schemeClr val="accent1"/>
+            </a:fillRef>
+            <a:effectRef idx="1">
+              <a:schemeClr val="accent1"/>
+            </a:effectRef>
+            <a:fontRef idx="minor">
+              <a:schemeClr val="tx1"/>
+            </a:fontRef>
+          </p:style>
+        </p:cxnSp>
+        <p:cxnSp>
+          <p:nvCxnSpPr>
+            <p:cNvPr id="64" name="Elbow Connector 63">
+              <a:extLst>
+                <a:ext uri="{FF2B5EF4-FFF2-40B4-BE49-F238E27FC236}">
+                  <a16:creationId xmlns:a16="http://schemas.microsoft.com/office/drawing/2014/main" id="{0D1B261C-47C1-7925-AB56-DAFDCFAC93E0}"/>
+                </a:ext>
+              </a:extLst>
+            </p:cNvPr>
+            <p:cNvCxnSpPr>
+              <a:cxnSpLocks/>
+              <a:stCxn id="7" idx="0"/>
+              <a:endCxn id="71" idx="2"/>
+            </p:cNvCxnSpPr>
+            <p:nvPr/>
+          </p:nvCxnSpPr>
+          <p:spPr>
+            <a:xfrm rot="5400000" flipH="1" flipV="1">
+              <a:off x="6140116" y="2408127"/>
+              <a:ext cx="639634" cy="382018"/>
+            </a:xfrm>
+            <a:prstGeom prst="bentConnector2">
+              <a:avLst/>
+            </a:prstGeom>
+            <a:ln>
+              <a:tailEnd type="stealth"/>
+            </a:ln>
+          </p:spPr>
+          <p:style>
+            <a:lnRef idx="2">
+              <a:schemeClr val="accent1"/>
+            </a:lnRef>
+            <a:fillRef idx="0">
+              <a:schemeClr val="accent1"/>
+            </a:fillRef>
+            <a:effectRef idx="1">
+              <a:schemeClr val="accent1"/>
+            </a:effectRef>
+            <a:fontRef idx="minor">
+              <a:schemeClr val="tx1"/>
+            </a:fontRef>
+          </p:style>
+        </p:cxnSp>
+        <p:sp>
+          <p:nvSpPr>
+            <p:cNvPr id="71" name="Smiley Face 70">
+              <a:extLst>
+                <a:ext uri="{FF2B5EF4-FFF2-40B4-BE49-F238E27FC236}">
+                  <a16:creationId xmlns:a16="http://schemas.microsoft.com/office/drawing/2014/main" id="{3D7C370E-B31E-572A-B3BB-1D30B256E9E5}"/>
+                </a:ext>
+              </a:extLst>
+            </p:cNvPr>
+            <p:cNvSpPr/>
+            <p:nvPr/>
+          </p:nvSpPr>
+          <p:spPr>
+            <a:xfrm>
+              <a:off x="6650942" y="2197446"/>
+              <a:ext cx="163745" cy="163745"/>
+            </a:xfrm>
+            <a:prstGeom prst="smileyFace">
+              <a:avLst/>
+            </a:prstGeom>
+          </p:spPr>
+          <p:style>
+            <a:lnRef idx="2">
+              <a:schemeClr val="accent1">
+                <a:shade val="15000"/>
+              </a:schemeClr>
+            </a:lnRef>
+            <a:fillRef idx="1">
+              <a:schemeClr val="accent1"/>
+            </a:fillRef>
+            <a:effectRef idx="0">
+              <a:schemeClr val="accent1"/>
+            </a:effectRef>
+            <a:fontRef idx="minor">
+              <a:schemeClr val="lt1"/>
+            </a:fontRef>
+          </p:style>
+          <p:txBody>
+            <a:bodyPr rtlCol="0" anchor="ctr"/>
+            <a:lstStyle/>
+            <a:p>
+              <a:pPr algn="ctr"/>
+              <a:endParaRPr lang="en-US"/>
+            </a:p>
+          </p:txBody>
+        </p:sp>
+        <p:sp>
+          <p:nvSpPr>
+            <p:cNvPr id="72" name="Smiley Face 71">
+              <a:extLst>
+                <a:ext uri="{FF2B5EF4-FFF2-40B4-BE49-F238E27FC236}">
+                  <a16:creationId xmlns:a16="http://schemas.microsoft.com/office/drawing/2014/main" id="{6BCCC377-017A-2357-B4C5-8B450426D23B}"/>
+                </a:ext>
+              </a:extLst>
+            </p:cNvPr>
+            <p:cNvSpPr/>
+            <p:nvPr/>
+          </p:nvSpPr>
+          <p:spPr>
+            <a:xfrm rot="10800000">
+              <a:off x="9433093" y="2197445"/>
+              <a:ext cx="163745" cy="163745"/>
+            </a:xfrm>
+            <a:prstGeom prst="smileyFace">
+              <a:avLst/>
+            </a:prstGeom>
+          </p:spPr>
+          <p:style>
+            <a:lnRef idx="2">
+              <a:schemeClr val="accent1">
+                <a:shade val="15000"/>
+              </a:schemeClr>
+            </a:lnRef>
+            <a:fillRef idx="1">
+              <a:schemeClr val="accent1"/>
+            </a:fillRef>
+            <a:effectRef idx="0">
+              <a:schemeClr val="accent1"/>
+            </a:effectRef>
+            <a:fontRef idx="minor">
+              <a:schemeClr val="lt1"/>
+            </a:fontRef>
+          </p:style>
+          <p:txBody>
+            <a:bodyPr rtlCol="0" anchor="ctr"/>
+            <a:lstStyle/>
+            <a:p>
+              <a:pPr algn="ctr"/>
+              <a:endParaRPr lang="en-US"/>
+            </a:p>
+          </p:txBody>
+        </p:sp>
+      </p:grpSp>
+      <p:grpSp>
+        <p:nvGrpSpPr>
+          <p:cNvPr id="20" name="Group 19">
+            <a:extLst>
+              <a:ext uri="{FF2B5EF4-FFF2-40B4-BE49-F238E27FC236}">
+                <a16:creationId xmlns:a16="http://schemas.microsoft.com/office/drawing/2014/main" id="{9A9ED8BB-A8E5-DA68-43FF-BF558245F9D0}"/>
+              </a:ext>
+            </a:extLst>
+          </p:cNvPr>
+          <p:cNvGrpSpPr/>
+          <p:nvPr/>
+        </p:nvGrpSpPr>
+        <p:grpSpPr>
+          <a:xfrm>
+            <a:off x="2588922" y="1339147"/>
+            <a:ext cx="7335091" cy="3092610"/>
+            <a:chOff x="2588922" y="1339147"/>
+            <a:chExt cx="7335091" cy="3092610"/>
+          </a:xfrm>
+        </p:grpSpPr>
+        <p:cxnSp>
+          <p:nvCxnSpPr>
+            <p:cNvPr id="23" name="Straight Arrow Connector 22">
+              <a:extLst>
+                <a:ext uri="{FF2B5EF4-FFF2-40B4-BE49-F238E27FC236}">
+                  <a16:creationId xmlns:a16="http://schemas.microsoft.com/office/drawing/2014/main" id="{F3E4880E-1952-E34B-F2D2-C4BFA4205C64}"/>
+                </a:ext>
+              </a:extLst>
+            </p:cNvPr>
+            <p:cNvCxnSpPr>
+              <a:stCxn id="8" idx="3"/>
+              <a:endCxn id="10" idx="1"/>
+            </p:cNvCxnSpPr>
+            <p:nvPr/>
+          </p:nvCxnSpPr>
+          <p:spPr>
+            <a:xfrm>
+              <a:off x="3644583" y="4431757"/>
+              <a:ext cx="1618881" cy="0"/>
+            </a:xfrm>
+            <a:prstGeom prst="straightConnector1">
+              <a:avLst/>
+            </a:prstGeom>
+            <a:ln cap="rnd" cmpd="dbl">
+              <a:solidFill>
+                <a:schemeClr val="tx1"/>
+              </a:solidFill>
+              <a:prstDash val="sysDot"/>
+              <a:bevel/>
+              <a:headEnd type="none" w="lg" len="lg"/>
+              <a:tailEnd type="stealth" w="lg" len="lg"/>
+            </a:ln>
+          </p:spPr>
+          <p:style>
+            <a:lnRef idx="2">
+              <a:schemeClr val="accent1"/>
+            </a:lnRef>
+            <a:fillRef idx="0">
+              <a:schemeClr val="accent1"/>
+            </a:fillRef>
+            <a:effectRef idx="1">
+              <a:schemeClr val="accent1"/>
+            </a:effectRef>
+            <a:fontRef idx="minor">
+              <a:schemeClr val="tx1"/>
+            </a:fontRef>
+          </p:style>
+        </p:cxnSp>
+        <p:cxnSp>
+          <p:nvCxnSpPr>
+            <p:cNvPr id="24" name="Straight Arrow Connector 23">
+              <a:extLst>
+                <a:ext uri="{FF2B5EF4-FFF2-40B4-BE49-F238E27FC236}">
+                  <a16:creationId xmlns:a16="http://schemas.microsoft.com/office/drawing/2014/main" id="{FC17936E-531B-5ABF-2C87-D359B9E2BC6D}"/>
+                </a:ext>
+              </a:extLst>
+            </p:cNvPr>
+            <p:cNvCxnSpPr>
+              <a:cxnSpLocks/>
+              <a:endCxn id="9" idx="1"/>
+            </p:cNvCxnSpPr>
+            <p:nvPr/>
+          </p:nvCxnSpPr>
+          <p:spPr>
+            <a:xfrm flipV="1">
+              <a:off x="7274384" y="4431756"/>
+              <a:ext cx="887187" cy="1"/>
+            </a:xfrm>
+            <a:prstGeom prst="straightConnector1">
+              <a:avLst/>
+            </a:prstGeom>
+            <a:ln cap="rnd" cmpd="dbl">
+              <a:solidFill>
+                <a:schemeClr val="tx1"/>
+              </a:solidFill>
+              <a:prstDash val="sysDot"/>
+              <a:bevel/>
+              <a:headEnd type="none" w="lg" len="lg"/>
+              <a:tailEnd type="stealth" w="lg" len="lg"/>
+            </a:ln>
+          </p:spPr>
+          <p:style>
+            <a:lnRef idx="2">
+              <a:schemeClr val="accent1"/>
+            </a:lnRef>
+            <a:fillRef idx="0">
+              <a:schemeClr val="accent1"/>
+            </a:fillRef>
+            <a:effectRef idx="1">
+              <a:schemeClr val="accent1"/>
+            </a:effectRef>
+            <a:fontRef idx="minor">
+              <a:schemeClr val="tx1"/>
+            </a:fontRef>
+          </p:style>
+        </p:cxnSp>
+        <p:cxnSp>
+          <p:nvCxnSpPr>
+            <p:cNvPr id="26" name="Straight Arrow Connector 25">
+              <a:extLst>
+                <a:ext uri="{FF2B5EF4-FFF2-40B4-BE49-F238E27FC236}">
+                  <a16:creationId xmlns:a16="http://schemas.microsoft.com/office/drawing/2014/main" id="{DC5ADE19-BCDC-1DF7-3A2C-082AD9301A59}"/>
+                </a:ext>
+              </a:extLst>
+            </p:cNvPr>
+            <p:cNvCxnSpPr/>
+            <p:nvPr/>
+          </p:nvCxnSpPr>
+          <p:spPr>
+            <a:xfrm>
+              <a:off x="7274384" y="3293391"/>
+              <a:ext cx="1618881" cy="0"/>
+            </a:xfrm>
+            <a:prstGeom prst="straightConnector1">
+              <a:avLst/>
+            </a:prstGeom>
+            <a:ln cap="rnd" cmpd="dbl">
+              <a:solidFill>
+                <a:schemeClr val="tx1"/>
+              </a:solidFill>
+              <a:prstDash val="sysDot"/>
+              <a:bevel/>
+              <a:headEnd type="none" w="lg" len="lg"/>
+              <a:tailEnd type="stealth" w="lg" len="lg"/>
+            </a:ln>
+          </p:spPr>
+          <p:style>
+            <a:lnRef idx="2">
+              <a:schemeClr val="accent1"/>
+            </a:lnRef>
+            <a:fillRef idx="0">
+              <a:schemeClr val="accent1"/>
+            </a:fillRef>
+            <a:effectRef idx="1">
+              <a:schemeClr val="accent1"/>
+            </a:effectRef>
+            <a:fontRef idx="minor">
+              <a:schemeClr val="tx1"/>
+            </a:fontRef>
+          </p:style>
+        </p:cxnSp>
+        <p:cxnSp>
+          <p:nvCxnSpPr>
+            <p:cNvPr id="27" name="Straight Arrow Connector 26">
+              <a:extLst>
+                <a:ext uri="{FF2B5EF4-FFF2-40B4-BE49-F238E27FC236}">
+                  <a16:creationId xmlns:a16="http://schemas.microsoft.com/office/drawing/2014/main" id="{C34027C8-DEF4-3FE9-14D2-00592215287D}"/>
+                </a:ext>
+              </a:extLst>
+            </p:cNvPr>
+            <p:cNvCxnSpPr>
+              <a:cxnSpLocks/>
+              <a:stCxn id="6" idx="1"/>
+              <a:endCxn id="11" idx="3"/>
+            </p:cNvCxnSpPr>
+            <p:nvPr/>
+          </p:nvCxnSpPr>
+          <p:spPr>
+            <a:xfrm flipH="1" flipV="1">
+              <a:off x="7470393" y="1339147"/>
+              <a:ext cx="933876" cy="4096"/>
+            </a:xfrm>
+            <a:prstGeom prst="straightConnector1">
+              <a:avLst/>
+            </a:prstGeom>
+            <a:ln cap="rnd" cmpd="dbl">
+              <a:solidFill>
+                <a:schemeClr val="tx1"/>
+              </a:solidFill>
+              <a:prstDash val="sysDot"/>
+              <a:bevel/>
+              <a:headEnd type="none" w="lg" len="lg"/>
+              <a:tailEnd type="stealth" w="lg" len="lg"/>
+            </a:ln>
+          </p:spPr>
+          <p:style>
+            <a:lnRef idx="2">
+              <a:schemeClr val="accent1"/>
+            </a:lnRef>
+            <a:fillRef idx="0">
+              <a:schemeClr val="accent1"/>
+            </a:fillRef>
+            <a:effectRef idx="1">
+              <a:schemeClr val="accent1"/>
+            </a:effectRef>
+            <a:fontRef idx="minor">
+              <a:schemeClr val="tx1"/>
+            </a:fontRef>
+          </p:style>
+        </p:cxnSp>
+        <p:cxnSp>
+          <p:nvCxnSpPr>
+            <p:cNvPr id="30" name="Straight Arrow Connector 29">
+              <a:extLst>
+                <a:ext uri="{FF2B5EF4-FFF2-40B4-BE49-F238E27FC236}">
+                  <a16:creationId xmlns:a16="http://schemas.microsoft.com/office/drawing/2014/main" id="{B594C35B-8F9A-C72D-2C44-87F052B58767}"/>
+                </a:ext>
+              </a:extLst>
+            </p:cNvPr>
+            <p:cNvCxnSpPr>
+              <a:cxnSpLocks/>
+              <a:stCxn id="11" idx="1"/>
+            </p:cNvCxnSpPr>
+            <p:nvPr/>
+          </p:nvCxnSpPr>
+          <p:spPr>
+            <a:xfrm flipH="1">
+              <a:off x="3152986" y="1339147"/>
+              <a:ext cx="2110478" cy="0"/>
+            </a:xfrm>
+            <a:prstGeom prst="straightConnector1">
+              <a:avLst/>
+            </a:prstGeom>
+            <a:ln cap="rnd" cmpd="dbl">
+              <a:solidFill>
+                <a:schemeClr val="tx1"/>
+              </a:solidFill>
+              <a:prstDash val="sysDot"/>
+              <a:bevel/>
+              <a:headEnd type="none" w="lg" len="lg"/>
+              <a:tailEnd type="stealth" w="lg" len="lg"/>
+            </a:ln>
+          </p:spPr>
+          <p:style>
+            <a:lnRef idx="2">
+              <a:schemeClr val="accent1"/>
+            </a:lnRef>
+            <a:fillRef idx="0">
+              <a:schemeClr val="accent1"/>
+            </a:fillRef>
+            <a:effectRef idx="1">
+              <a:schemeClr val="accent1"/>
+            </a:effectRef>
+            <a:fontRef idx="minor">
+              <a:schemeClr val="tx1"/>
+            </a:fontRef>
+          </p:style>
+        </p:cxnSp>
+        <p:cxnSp>
+          <p:nvCxnSpPr>
+            <p:cNvPr id="33" name="Straight Arrow Connector 32">
+              <a:extLst>
+                <a:ext uri="{FF2B5EF4-FFF2-40B4-BE49-F238E27FC236}">
+                  <a16:creationId xmlns:a16="http://schemas.microsoft.com/office/drawing/2014/main" id="{37447F82-893D-BA7E-AE76-D88C5153327E}"/>
+                </a:ext>
+              </a:extLst>
+            </p:cNvPr>
+            <p:cNvCxnSpPr>
+              <a:cxnSpLocks/>
+            </p:cNvCxnSpPr>
+            <p:nvPr/>
+          </p:nvCxnSpPr>
+          <p:spPr>
+            <a:xfrm>
+              <a:off x="2588922" y="1888922"/>
+              <a:ext cx="0" cy="2164633"/>
+            </a:xfrm>
+            <a:prstGeom prst="straightConnector1">
+              <a:avLst/>
+            </a:prstGeom>
+            <a:ln cap="rnd" cmpd="dbl">
+              <a:solidFill>
+                <a:schemeClr val="tx1"/>
+              </a:solidFill>
+              <a:prstDash val="sysDot"/>
+              <a:bevel/>
+              <a:headEnd type="none" w="lg" len="lg"/>
+              <a:tailEnd type="stealth" w="lg" len="lg"/>
+            </a:ln>
+          </p:spPr>
+          <p:style>
+            <a:lnRef idx="2">
+              <a:schemeClr val="accent1"/>
+            </a:lnRef>
+            <a:fillRef idx="0">
+              <a:schemeClr val="accent1"/>
+            </a:fillRef>
+            <a:effectRef idx="1">
+              <a:schemeClr val="accent1"/>
+            </a:effectRef>
+            <a:fontRef idx="minor">
+              <a:schemeClr val="tx1"/>
+            </a:fontRef>
+          </p:style>
+        </p:cxnSp>
+        <p:cxnSp>
+          <p:nvCxnSpPr>
+            <p:cNvPr id="41" name="Straight Arrow Connector 40">
+              <a:extLst>
+                <a:ext uri="{FF2B5EF4-FFF2-40B4-BE49-F238E27FC236}">
+                  <a16:creationId xmlns:a16="http://schemas.microsoft.com/office/drawing/2014/main" id="{0172A04D-89C1-78D6-5E20-C0C92C9C7A25}"/>
+                </a:ext>
+              </a:extLst>
+            </p:cNvPr>
+            <p:cNvCxnSpPr>
+              <a:cxnSpLocks/>
+              <a:stCxn id="7" idx="2"/>
+            </p:cNvCxnSpPr>
+            <p:nvPr/>
+          </p:nvCxnSpPr>
+          <p:spPr>
+            <a:xfrm>
+              <a:off x="6268924" y="3675354"/>
+              <a:ext cx="0" cy="378201"/>
+            </a:xfrm>
+            <a:prstGeom prst="straightConnector1">
+              <a:avLst/>
+            </a:prstGeom>
+            <a:ln cap="rnd" cmpd="dbl">
+              <a:solidFill>
+                <a:schemeClr val="tx1"/>
+              </a:solidFill>
+              <a:prstDash val="sysDot"/>
+              <a:bevel/>
+              <a:headEnd type="stealth" w="lg" len="lg"/>
+              <a:tailEnd type="none" w="lg" len="lg"/>
+            </a:ln>
+          </p:spPr>
+          <p:style>
+            <a:lnRef idx="2">
+              <a:schemeClr val="accent1"/>
+            </a:lnRef>
+            <a:fillRef idx="0">
+              <a:schemeClr val="accent1"/>
+            </a:fillRef>
+            <a:effectRef idx="1">
+              <a:schemeClr val="accent1"/>
+            </a:effectRef>
+            <a:fontRef idx="minor">
+              <a:schemeClr val="tx1"/>
+            </a:fontRef>
+          </p:style>
+        </p:cxnSp>
+        <p:cxnSp>
+          <p:nvCxnSpPr>
+            <p:cNvPr id="44" name="Straight Arrow Connector 43">
+              <a:extLst>
+                <a:ext uri="{FF2B5EF4-FFF2-40B4-BE49-F238E27FC236}">
+                  <a16:creationId xmlns:a16="http://schemas.microsoft.com/office/drawing/2014/main" id="{D6BAC511-CCED-7B8D-E89C-927DAEEF5818}"/>
+                </a:ext>
+              </a:extLst>
+            </p:cNvPr>
+            <p:cNvCxnSpPr>
+              <a:cxnSpLocks/>
+              <a:stCxn id="9" idx="0"/>
+              <a:endCxn id="12" idx="2"/>
+            </p:cNvCxnSpPr>
+            <p:nvPr/>
+          </p:nvCxnSpPr>
+          <p:spPr>
+            <a:xfrm flipH="1" flipV="1">
+              <a:off x="9898726" y="3675355"/>
+              <a:ext cx="2175" cy="378200"/>
+            </a:xfrm>
+            <a:prstGeom prst="straightConnector1">
+              <a:avLst/>
+            </a:prstGeom>
+            <a:ln cap="rnd" cmpd="dbl">
+              <a:solidFill>
+                <a:schemeClr val="tx1"/>
+              </a:solidFill>
+              <a:prstDash val="sysDot"/>
+              <a:bevel/>
+              <a:headEnd type="none" w="lg" len="lg"/>
+              <a:tailEnd type="stealth" w="lg" len="lg"/>
+            </a:ln>
+          </p:spPr>
+          <p:style>
+            <a:lnRef idx="2">
+              <a:schemeClr val="accent1"/>
+            </a:lnRef>
+            <a:fillRef idx="0">
+              <a:schemeClr val="accent1"/>
+            </a:fillRef>
+            <a:effectRef idx="1">
+              <a:schemeClr val="accent1"/>
+            </a:effectRef>
+            <a:fontRef idx="minor">
+              <a:schemeClr val="tx1"/>
+            </a:fontRef>
+          </p:style>
+        </p:cxnSp>
+        <p:cxnSp>
+          <p:nvCxnSpPr>
+            <p:cNvPr id="94" name="Straight Arrow Connector 93">
+              <a:extLst>
+                <a:ext uri="{FF2B5EF4-FFF2-40B4-BE49-F238E27FC236}">
+                  <a16:creationId xmlns:a16="http://schemas.microsoft.com/office/drawing/2014/main" id="{1A88D6A7-3F41-15D4-2D62-DA4A08022750}"/>
+                </a:ext>
+              </a:extLst>
+            </p:cNvPr>
+            <p:cNvCxnSpPr>
+              <a:cxnSpLocks/>
+            </p:cNvCxnSpPr>
+            <p:nvPr/>
+          </p:nvCxnSpPr>
+          <p:spPr>
+            <a:xfrm flipH="1" flipV="1">
+              <a:off x="9921838" y="1859201"/>
+              <a:ext cx="2175" cy="1059752"/>
+            </a:xfrm>
+            <a:prstGeom prst="straightConnector1">
+              <a:avLst/>
+            </a:prstGeom>
+            <a:ln cap="rnd" cmpd="dbl">
+              <a:solidFill>
+                <a:schemeClr val="tx1"/>
+              </a:solidFill>
+              <a:prstDash val="sysDot"/>
+              <a:bevel/>
+              <a:headEnd type="none" w="lg" len="lg"/>
+              <a:tailEnd type="stealth" w="lg" len="lg"/>
+            </a:ln>
+          </p:spPr>
+          <p:style>
+            <a:lnRef idx="2">
+              <a:schemeClr val="accent1"/>
+            </a:lnRef>
+            <a:fillRef idx="0">
+              <a:schemeClr val="accent1"/>
+            </a:fillRef>
+            <a:effectRef idx="1">
+              <a:schemeClr val="accent1"/>
+            </a:effectRef>
+            <a:fontRef idx="minor">
+              <a:schemeClr val="tx1"/>
+            </a:fontRef>
+          </p:style>
+        </p:cxnSp>
+      </p:grpSp>
+      <p:grpSp>
+        <p:nvGrpSpPr>
+          <p:cNvPr id="22" name="Group 21">
+            <a:extLst>
+              <a:ext uri="{FF2B5EF4-FFF2-40B4-BE49-F238E27FC236}">
+                <a16:creationId xmlns:a16="http://schemas.microsoft.com/office/drawing/2014/main" id="{376130B7-B12F-107C-A9EE-3EEC7B8ADC45}"/>
+              </a:ext>
+            </a:extLst>
+          </p:cNvPr>
+          <p:cNvGrpSpPr/>
+          <p:nvPr/>
+        </p:nvGrpSpPr>
+        <p:grpSpPr>
+          <a:xfrm>
+            <a:off x="113496" y="179140"/>
+            <a:ext cx="11736404" cy="5082408"/>
+            <a:chOff x="113496" y="179140"/>
+            <a:chExt cx="11736404" cy="5082408"/>
+          </a:xfrm>
+        </p:grpSpPr>
+        <p:grpSp>
+          <p:nvGrpSpPr>
+            <p:cNvPr id="21" name="Group 20">
+              <a:extLst>
+                <a:ext uri="{FF2B5EF4-FFF2-40B4-BE49-F238E27FC236}">
+                  <a16:creationId xmlns:a16="http://schemas.microsoft.com/office/drawing/2014/main" id="{C7245387-47AA-2C9C-A447-22F5017C4AE8}"/>
+                </a:ext>
+              </a:extLst>
+            </p:cNvPr>
+            <p:cNvGrpSpPr/>
+            <p:nvPr/>
+          </p:nvGrpSpPr>
+          <p:grpSpPr>
+            <a:xfrm>
+              <a:off x="113496" y="179140"/>
+              <a:ext cx="11736404" cy="5082408"/>
+              <a:chOff x="113496" y="179140"/>
+              <a:chExt cx="11736404" cy="5082408"/>
+            </a:xfrm>
+          </p:grpSpPr>
+          <p:sp>
+            <p:nvSpPr>
+              <p:cNvPr id="13" name="Rounded Rectangle 12">
+                <a:extLst>
+                  <a:ext uri="{FF2B5EF4-FFF2-40B4-BE49-F238E27FC236}">
+                    <a16:creationId xmlns:a16="http://schemas.microsoft.com/office/drawing/2014/main" id="{93F6ED90-BFD0-A565-12F4-D79708ED1253}"/>
+                  </a:ext>
+                </a:extLst>
+              </p:cNvPr>
+              <p:cNvSpPr/>
+              <p:nvPr/>
+            </p:nvSpPr>
+            <p:spPr>
+              <a:xfrm>
+                <a:off x="113496" y="179140"/>
+                <a:ext cx="3681170" cy="4886450"/>
+              </a:xfrm>
+              <a:custGeom>
+                <a:avLst/>
+                <a:gdLst>
+                  <a:gd name="csX0" fmla="*/ 0 w 3681170"/>
+                  <a:gd name="csY0" fmla="*/ 277376 h 4886450"/>
+                  <a:gd name="csX1" fmla="*/ 277376 w 3681170"/>
+                  <a:gd name="csY1" fmla="*/ 0 h 4886450"/>
+                  <a:gd name="csX2" fmla="*/ 902660 w 3681170"/>
+                  <a:gd name="csY2" fmla="*/ 0 h 4886450"/>
+                  <a:gd name="csX3" fmla="*/ 1465415 w 3681170"/>
+                  <a:gd name="csY3" fmla="*/ 0 h 4886450"/>
+                  <a:gd name="csX4" fmla="*/ 1996906 w 3681170"/>
+                  <a:gd name="csY4" fmla="*/ 0 h 4886450"/>
+                  <a:gd name="csX5" fmla="*/ 2559661 w 3681170"/>
+                  <a:gd name="csY5" fmla="*/ 0 h 4886450"/>
+                  <a:gd name="csX6" fmla="*/ 3403794 w 3681170"/>
+                  <a:gd name="csY6" fmla="*/ 0 h 4886450"/>
+                  <a:gd name="csX7" fmla="*/ 3681170 w 3681170"/>
+                  <a:gd name="csY7" fmla="*/ 277376 h 4886450"/>
+                  <a:gd name="csX8" fmla="*/ 3681170 w 3681170"/>
+                  <a:gd name="csY8" fmla="*/ 809556 h 4886450"/>
+                  <a:gd name="csX9" fmla="*/ 3681170 w 3681170"/>
+                  <a:gd name="csY9" fmla="*/ 1385053 h 4886450"/>
+                  <a:gd name="csX10" fmla="*/ 3681170 w 3681170"/>
+                  <a:gd name="csY10" fmla="*/ 2003867 h 4886450"/>
+                  <a:gd name="csX11" fmla="*/ 3681170 w 3681170"/>
+                  <a:gd name="csY11" fmla="*/ 2536047 h 4886450"/>
+                  <a:gd name="csX12" fmla="*/ 3681170 w 3681170"/>
+                  <a:gd name="csY12" fmla="*/ 3241495 h 4886450"/>
+                  <a:gd name="csX13" fmla="*/ 3681170 w 3681170"/>
+                  <a:gd name="csY13" fmla="*/ 3860309 h 4886450"/>
+                  <a:gd name="csX14" fmla="*/ 3681170 w 3681170"/>
+                  <a:gd name="csY14" fmla="*/ 4609074 h 4886450"/>
+                  <a:gd name="csX15" fmla="*/ 3403794 w 3681170"/>
+                  <a:gd name="csY15" fmla="*/ 4886450 h 4886450"/>
+                  <a:gd name="csX16" fmla="*/ 2715982 w 3681170"/>
+                  <a:gd name="csY16" fmla="*/ 4886450 h 4886450"/>
+                  <a:gd name="csX17" fmla="*/ 2153227 w 3681170"/>
+                  <a:gd name="csY17" fmla="*/ 4886450 h 4886450"/>
+                  <a:gd name="csX18" fmla="*/ 1527943 w 3681170"/>
+                  <a:gd name="csY18" fmla="*/ 4886450 h 4886450"/>
+                  <a:gd name="csX19" fmla="*/ 996452 w 3681170"/>
+                  <a:gd name="csY19" fmla="*/ 4886450 h 4886450"/>
+                  <a:gd name="csX20" fmla="*/ 277376 w 3681170"/>
+                  <a:gd name="csY20" fmla="*/ 4886450 h 4886450"/>
+                  <a:gd name="csX21" fmla="*/ 0 w 3681170"/>
+                  <a:gd name="csY21" fmla="*/ 4609074 h 4886450"/>
+                  <a:gd name="csX22" fmla="*/ 0 w 3681170"/>
+                  <a:gd name="csY22" fmla="*/ 3903626 h 4886450"/>
+                  <a:gd name="csX23" fmla="*/ 0 w 3681170"/>
+                  <a:gd name="csY23" fmla="*/ 3371446 h 4886450"/>
+                  <a:gd name="csX24" fmla="*/ 0 w 3681170"/>
+                  <a:gd name="csY24" fmla="*/ 2752632 h 4886450"/>
+                  <a:gd name="csX25" fmla="*/ 0 w 3681170"/>
+                  <a:gd name="csY25" fmla="*/ 2090501 h 4886450"/>
+                  <a:gd name="csX26" fmla="*/ 0 w 3681170"/>
+                  <a:gd name="csY26" fmla="*/ 1385053 h 4886450"/>
+                  <a:gd name="csX27" fmla="*/ 0 w 3681170"/>
+                  <a:gd name="csY27" fmla="*/ 277376 h 4886450"/>
+                </a:gdLst>
+                <a:ahLst/>
+                <a:cxnLst>
+                  <a:cxn ang="0">
+                    <a:pos x="csX0" y="csY0"/>
+                  </a:cxn>
+                  <a:cxn ang="0">
+                    <a:pos x="csX1" y="csY1"/>
+                  </a:cxn>
+                  <a:cxn ang="0">
+                    <a:pos x="csX2" y="csY2"/>
+                  </a:cxn>
+                  <a:cxn ang="0">
+                    <a:pos x="csX3" y="csY3"/>
+                  </a:cxn>
+                  <a:cxn ang="0">
+                    <a:pos x="csX4" y="csY4"/>
+                  </a:cxn>
+                  <a:cxn ang="0">
+                    <a:pos x="csX5" y="csY5"/>
+                  </a:cxn>
+                  <a:cxn ang="0">
+                    <a:pos x="csX6" y="csY6"/>
+                  </a:cxn>
+                  <a:cxn ang="0">
+                    <a:pos x="csX7" y="csY7"/>
+                  </a:cxn>
+                  <a:cxn ang="0">
+                    <a:pos x="csX8" y="csY8"/>
+                  </a:cxn>
+                  <a:cxn ang="0">
+                    <a:pos x="csX9" y="csY9"/>
+                  </a:cxn>
+                  <a:cxn ang="0">
+                    <a:pos x="csX10" y="csY10"/>
+                  </a:cxn>
+                  <a:cxn ang="0">
+                    <a:pos x="csX11" y="csY11"/>
+                  </a:cxn>
+                  <a:cxn ang="0">
+                    <a:pos x="csX12" y="csY12"/>
+                  </a:cxn>
+                  <a:cxn ang="0">
+                    <a:pos x="csX13" y="csY13"/>
+                  </a:cxn>
+                  <a:cxn ang="0">
+                    <a:pos x="csX14" y="csY14"/>
+                  </a:cxn>
+                  <a:cxn ang="0">
+                    <a:pos x="csX15" y="csY15"/>
+                  </a:cxn>
+                  <a:cxn ang="0">
+                    <a:pos x="csX16" y="csY16"/>
+                  </a:cxn>
+                  <a:cxn ang="0">
+                    <a:pos x="csX17" y="csY17"/>
+                  </a:cxn>
+                  <a:cxn ang="0">
+                    <a:pos x="csX18" y="csY18"/>
+                  </a:cxn>
+                  <a:cxn ang="0">
+                    <a:pos x="csX19" y="csY19"/>
+                  </a:cxn>
+                  <a:cxn ang="0">
+                    <a:pos x="csX20" y="csY20"/>
+                  </a:cxn>
+                  <a:cxn ang="0">
+                    <a:pos x="csX21" y="csY21"/>
+                  </a:cxn>
+                  <a:cxn ang="0">
+                    <a:pos x="csX22" y="csY22"/>
+                  </a:cxn>
+                  <a:cxn ang="0">
+                    <a:pos x="csX23" y="csY23"/>
+                  </a:cxn>
+                  <a:cxn ang="0">
+                    <a:pos x="csX24" y="csY24"/>
+                  </a:cxn>
+                  <a:cxn ang="0">
+                    <a:pos x="csX25" y="csY25"/>
+                  </a:cxn>
+                  <a:cxn ang="0">
+                    <a:pos x="csX26" y="csY26"/>
+                  </a:cxn>
+                  <a:cxn ang="0">
+                    <a:pos x="csX27" y="csY27"/>
+                  </a:cxn>
+                </a:cxnLst>
+                <a:rect l="l" t="t" r="r" b="b"/>
+                <a:pathLst>
+                  <a:path w="3681170" h="4886450" fill="none" extrusionOk="0">
+                    <a:moveTo>
+                      <a:pt x="0" y="277376"/>
+                    </a:moveTo>
+                    <a:cubicBezTo>
+                      <a:pt x="-2382" y="131610"/>
+                      <a:pt x="114005" y="-32059"/>
+                      <a:pt x="277376" y="0"/>
+                    </a:cubicBezTo>
+                    <a:cubicBezTo>
+                      <a:pt x="482998" y="-19818"/>
+                      <a:pt x="590090" y="1395"/>
+                      <a:pt x="902660" y="0"/>
+                    </a:cubicBezTo>
+                    <a:cubicBezTo>
+                      <a:pt x="1215230" y="-1395"/>
+                      <a:pt x="1198704" y="-26082"/>
+                      <a:pt x="1465415" y="0"/>
+                    </a:cubicBezTo>
+                    <a:cubicBezTo>
+                      <a:pt x="1732126" y="26082"/>
+                      <a:pt x="1804049" y="-795"/>
+                      <a:pt x="1996906" y="0"/>
+                    </a:cubicBezTo>
+                    <a:cubicBezTo>
+                      <a:pt x="2189763" y="795"/>
+                      <a:pt x="2290560" y="27988"/>
+                      <a:pt x="2559661" y="0"/>
+                    </a:cubicBezTo>
+                    <a:cubicBezTo>
+                      <a:pt x="2828762" y="-27988"/>
+                      <a:pt x="3068028" y="-16970"/>
+                      <a:pt x="3403794" y="0"/>
+                    </a:cubicBezTo>
+                    <a:cubicBezTo>
+                      <a:pt x="3575267" y="-4839"/>
+                      <a:pt x="3677616" y="148803"/>
+                      <a:pt x="3681170" y="277376"/>
+                    </a:cubicBezTo>
+                    <a:cubicBezTo>
+                      <a:pt x="3675914" y="413158"/>
+                      <a:pt x="3687449" y="682561"/>
+                      <a:pt x="3681170" y="809556"/>
+                    </a:cubicBezTo>
+                    <a:cubicBezTo>
+                      <a:pt x="3674891" y="936551"/>
+                      <a:pt x="3656324" y="1211219"/>
+                      <a:pt x="3681170" y="1385053"/>
+                    </a:cubicBezTo>
+                    <a:cubicBezTo>
+                      <a:pt x="3706016" y="1558887"/>
+                      <a:pt x="3679381" y="1866662"/>
+                      <a:pt x="3681170" y="2003867"/>
+                    </a:cubicBezTo>
+                    <a:cubicBezTo>
+                      <a:pt x="3682959" y="2141072"/>
+                      <a:pt x="3697198" y="2280725"/>
+                      <a:pt x="3681170" y="2536047"/>
+                    </a:cubicBezTo>
+                    <a:cubicBezTo>
+                      <a:pt x="3665142" y="2791369"/>
+                      <a:pt x="3689146" y="3063644"/>
+                      <a:pt x="3681170" y="3241495"/>
+                    </a:cubicBezTo>
+                    <a:cubicBezTo>
+                      <a:pt x="3673194" y="3419346"/>
+                      <a:pt x="3707910" y="3582484"/>
+                      <a:pt x="3681170" y="3860309"/>
+                    </a:cubicBezTo>
+                    <a:cubicBezTo>
+                      <a:pt x="3654430" y="4138134"/>
+                      <a:pt x="3698136" y="4338688"/>
+                      <a:pt x="3681170" y="4609074"/>
+                    </a:cubicBezTo>
+                    <a:cubicBezTo>
+                      <a:pt x="3662154" y="4740508"/>
+                      <a:pt x="3566323" y="4876347"/>
+                      <a:pt x="3403794" y="4886450"/>
+                    </a:cubicBezTo>
+                    <a:cubicBezTo>
+                      <a:pt x="3189474" y="4915631"/>
+                      <a:pt x="2911552" y="4857163"/>
+                      <a:pt x="2715982" y="4886450"/>
+                    </a:cubicBezTo>
+                    <a:cubicBezTo>
+                      <a:pt x="2520412" y="4915737"/>
+                      <a:pt x="2397115" y="4865802"/>
+                      <a:pt x="2153227" y="4886450"/>
+                    </a:cubicBezTo>
+                    <a:cubicBezTo>
+                      <a:pt x="1909340" y="4907098"/>
+                      <a:pt x="1836319" y="4867010"/>
+                      <a:pt x="1527943" y="4886450"/>
+                    </a:cubicBezTo>
+                    <a:cubicBezTo>
+                      <a:pt x="1219567" y="4905890"/>
+                      <a:pt x="1232835" y="4903876"/>
+                      <a:pt x="996452" y="4886450"/>
+                    </a:cubicBezTo>
+                    <a:cubicBezTo>
+                      <a:pt x="760069" y="4869024"/>
+                      <a:pt x="556389" y="4920066"/>
+                      <a:pt x="277376" y="4886450"/>
+                    </a:cubicBezTo>
+                    <a:cubicBezTo>
+                      <a:pt x="134591" y="4849902"/>
+                      <a:pt x="-10165" y="4744197"/>
+                      <a:pt x="0" y="4609074"/>
+                    </a:cubicBezTo>
+                    <a:cubicBezTo>
+                      <a:pt x="5921" y="4353501"/>
+                      <a:pt x="-4072" y="4165107"/>
+                      <a:pt x="0" y="3903626"/>
+                    </a:cubicBezTo>
+                    <a:cubicBezTo>
+                      <a:pt x="4072" y="3642145"/>
+                      <a:pt x="18162" y="3573699"/>
+                      <a:pt x="0" y="3371446"/>
+                    </a:cubicBezTo>
+                    <a:cubicBezTo>
+                      <a:pt x="-18162" y="3169193"/>
+                      <a:pt x="947" y="2933425"/>
+                      <a:pt x="0" y="2752632"/>
+                    </a:cubicBezTo>
+                    <a:cubicBezTo>
+                      <a:pt x="-947" y="2571839"/>
+                      <a:pt x="-26918" y="2357410"/>
+                      <a:pt x="0" y="2090501"/>
+                    </a:cubicBezTo>
+                    <a:cubicBezTo>
+                      <a:pt x="26918" y="1823592"/>
+                      <a:pt x="-6843" y="1635630"/>
+                      <a:pt x="0" y="1385053"/>
+                    </a:cubicBezTo>
+                    <a:cubicBezTo>
+                      <a:pt x="6843" y="1134476"/>
+                      <a:pt x="-30945" y="608287"/>
+                      <a:pt x="0" y="277376"/>
+                    </a:cubicBezTo>
+                    <a:close/>
+                  </a:path>
+                  <a:path w="3681170" h="4886450" stroke="0" extrusionOk="0">
+                    <a:moveTo>
+                      <a:pt x="0" y="277376"/>
+                    </a:moveTo>
+                    <a:cubicBezTo>
+                      <a:pt x="-27355" y="107312"/>
+                      <a:pt x="120859" y="1248"/>
+                      <a:pt x="277376" y="0"/>
+                    </a:cubicBezTo>
+                    <a:cubicBezTo>
+                      <a:pt x="481496" y="27229"/>
+                      <a:pt x="735329" y="-5509"/>
+                      <a:pt x="965188" y="0"/>
+                    </a:cubicBezTo>
+                    <a:cubicBezTo>
+                      <a:pt x="1195047" y="5509"/>
+                      <a:pt x="1384983" y="-3805"/>
+                      <a:pt x="1559207" y="0"/>
+                    </a:cubicBezTo>
+                    <a:cubicBezTo>
+                      <a:pt x="1733431" y="3805"/>
+                      <a:pt x="1894247" y="-14241"/>
+                      <a:pt x="2121963" y="0"/>
+                    </a:cubicBezTo>
+                    <a:cubicBezTo>
+                      <a:pt x="2349679" y="14241"/>
+                      <a:pt x="2501809" y="22840"/>
+                      <a:pt x="2778510" y="0"/>
+                    </a:cubicBezTo>
+                    <a:cubicBezTo>
+                      <a:pt x="3055211" y="-22840"/>
+                      <a:pt x="3176106" y="10708"/>
+                      <a:pt x="3403794" y="0"/>
+                    </a:cubicBezTo>
+                    <a:cubicBezTo>
+                      <a:pt x="3575691" y="-30442"/>
+                      <a:pt x="3661472" y="141496"/>
+                      <a:pt x="3681170" y="277376"/>
+                    </a:cubicBezTo>
+                    <a:cubicBezTo>
+                      <a:pt x="3703248" y="437584"/>
+                      <a:pt x="3691417" y="754179"/>
+                      <a:pt x="3681170" y="896190"/>
+                    </a:cubicBezTo>
+                    <a:cubicBezTo>
+                      <a:pt x="3670923" y="1038201"/>
+                      <a:pt x="3674583" y="1190638"/>
+                      <a:pt x="3681170" y="1385053"/>
+                    </a:cubicBezTo>
+                    <a:cubicBezTo>
+                      <a:pt x="3687757" y="1579468"/>
+                      <a:pt x="3700939" y="1832329"/>
+                      <a:pt x="3681170" y="2003867"/>
+                    </a:cubicBezTo>
+                    <a:cubicBezTo>
+                      <a:pt x="3661401" y="2175405"/>
+                      <a:pt x="3668510" y="2375401"/>
+                      <a:pt x="3681170" y="2622681"/>
+                    </a:cubicBezTo>
+                    <a:cubicBezTo>
+                      <a:pt x="3693830" y="2869961"/>
+                      <a:pt x="3703660" y="2923250"/>
+                      <a:pt x="3681170" y="3198178"/>
+                    </a:cubicBezTo>
+                    <a:cubicBezTo>
+                      <a:pt x="3658680" y="3473106"/>
+                      <a:pt x="3647919" y="3590011"/>
+                      <a:pt x="3681170" y="3903626"/>
+                    </a:cubicBezTo>
+                    <a:cubicBezTo>
+                      <a:pt x="3714421" y="4217241"/>
+                      <a:pt x="3669488" y="4373022"/>
+                      <a:pt x="3681170" y="4609074"/>
+                    </a:cubicBezTo>
+                    <a:cubicBezTo>
+                      <a:pt x="3663055" y="4765240"/>
+                      <a:pt x="3551675" y="4882786"/>
+                      <a:pt x="3403794" y="4886450"/>
+                    </a:cubicBezTo>
+                    <a:cubicBezTo>
+                      <a:pt x="3208466" y="4885396"/>
+                      <a:pt x="2964667" y="4878518"/>
+                      <a:pt x="2747246" y="4886450"/>
+                    </a:cubicBezTo>
+                    <a:cubicBezTo>
+                      <a:pt x="2529825" y="4894382"/>
+                      <a:pt x="2249307" y="4883734"/>
+                      <a:pt x="2121963" y="4886450"/>
+                    </a:cubicBezTo>
+                    <a:cubicBezTo>
+                      <a:pt x="1994619" y="4889166"/>
+                      <a:pt x="1806976" y="4889284"/>
+                      <a:pt x="1590472" y="4886450"/>
+                    </a:cubicBezTo>
+                    <a:cubicBezTo>
+                      <a:pt x="1373968" y="4883616"/>
+                      <a:pt x="1203623" y="4900068"/>
+                      <a:pt x="1027716" y="4886450"/>
+                    </a:cubicBezTo>
+                    <a:cubicBezTo>
+                      <a:pt x="851809" y="4872832"/>
+                      <a:pt x="551365" y="4906009"/>
+                      <a:pt x="277376" y="4886450"/>
+                    </a:cubicBezTo>
+                    <a:cubicBezTo>
+                      <a:pt x="141528" y="4882780"/>
+                      <a:pt x="1970" y="4780971"/>
+                      <a:pt x="0" y="4609074"/>
+                    </a:cubicBezTo>
+                    <a:cubicBezTo>
+                      <a:pt x="-18540" y="4414515"/>
+                      <a:pt x="16711" y="4197945"/>
+                      <a:pt x="0" y="4076894"/>
+                    </a:cubicBezTo>
+                    <a:cubicBezTo>
+                      <a:pt x="-16711" y="3955843"/>
+                      <a:pt x="16179" y="3745725"/>
+                      <a:pt x="0" y="3588031"/>
+                    </a:cubicBezTo>
+                    <a:cubicBezTo>
+                      <a:pt x="-16179" y="3430337"/>
+                      <a:pt x="-8111" y="3324562"/>
+                      <a:pt x="0" y="3099168"/>
+                    </a:cubicBezTo>
+                    <a:cubicBezTo>
+                      <a:pt x="8111" y="2873774"/>
+                      <a:pt x="21471" y="2639673"/>
+                      <a:pt x="0" y="2480354"/>
+                    </a:cubicBezTo>
+                    <a:cubicBezTo>
+                      <a:pt x="-21471" y="2321035"/>
+                      <a:pt x="-19940" y="2141130"/>
+                      <a:pt x="0" y="1948174"/>
+                    </a:cubicBezTo>
+                    <a:cubicBezTo>
+                      <a:pt x="19940" y="1755218"/>
+                      <a:pt x="-3809" y="1608928"/>
+                      <a:pt x="0" y="1286043"/>
+                    </a:cubicBezTo>
+                    <a:cubicBezTo>
+                      <a:pt x="3809" y="963158"/>
+                      <a:pt x="40026" y="756601"/>
+                      <a:pt x="0" y="277376"/>
+                    </a:cubicBezTo>
+                    <a:close/>
+                  </a:path>
+                </a:pathLst>
+              </a:custGeom>
+              <a:solidFill>
+                <a:srgbClr val="C00000">
+                  <a:alpha val="6998"/>
+                </a:srgbClr>
+              </a:solidFill>
+              <a:ln>
+                <a:solidFill>
+                  <a:srgbClr val="F7EBEA"/>
+                </a:solidFill>
+                <a:extLst>
+                  <a:ext uri="{C807C97D-BFC1-408E-A445-0C87EB9F89A2}">
+                    <ask:lineSketchStyleProps xmlns:ask="http://schemas.microsoft.com/office/drawing/2018/sketchyshapes" sd="1219033472">
+                      <a:prstGeom prst="roundRect">
+                        <a:avLst>
+                          <a:gd name="adj" fmla="val 7535"/>
+                        </a:avLst>
+                      </a:prstGeom>
+                      <ask:type>
+                        <ask:lineSketchFreehand/>
+                      </ask:type>
+                    </ask:lineSketchStyleProps>
+                  </a:ext>
+                </a:extLst>
+              </a:ln>
+            </p:spPr>
+            <p:style>
+              <a:lnRef idx="2">
+                <a:schemeClr val="accent1">
+                  <a:shade val="15000"/>
+                </a:schemeClr>
+              </a:lnRef>
+              <a:fillRef idx="1">
+                <a:schemeClr val="accent1"/>
+              </a:fillRef>
+              <a:effectRef idx="0">
+                <a:schemeClr val="accent1"/>
+              </a:effectRef>
+              <a:fontRef idx="minor">
+                <a:schemeClr val="lt1"/>
+              </a:fontRef>
+            </p:style>
+            <p:txBody>
+              <a:bodyPr rtlCol="0" anchor="ctr"/>
+              <a:lstStyle/>
+              <a:p>
+                <a:pPr algn="ctr"/>
+                <a:endParaRPr lang="en-US" dirty="0"/>
+              </a:p>
+            </p:txBody>
+          </p:sp>
+          <p:sp>
+            <p:nvSpPr>
+              <p:cNvPr id="15" name="Rounded Rectangle 14">
+                <a:extLst>
+                  <a:ext uri="{FF2B5EF4-FFF2-40B4-BE49-F238E27FC236}">
+                    <a16:creationId xmlns:a16="http://schemas.microsoft.com/office/drawing/2014/main" id="{02EAF1E6-84FD-FA08-4196-7105842DB574}"/>
+                  </a:ext>
+                </a:extLst>
+              </p:cNvPr>
+              <p:cNvSpPr/>
+              <p:nvPr/>
+            </p:nvSpPr>
+            <p:spPr>
+              <a:xfrm>
+                <a:off x="1897060" y="272324"/>
+                <a:ext cx="9952839" cy="1802678"/>
+              </a:xfrm>
+              <a:prstGeom prst="roundRect">
+                <a:avLst>
+                  <a:gd name="adj" fmla="val 13170"/>
+                </a:avLst>
+              </a:prstGeom>
+              <a:solidFill>
+                <a:schemeClr val="accent4">
+                  <a:alpha val="6998"/>
+                </a:schemeClr>
+              </a:solidFill>
+              <a:ln>
+                <a:noFill/>
+              </a:ln>
+            </p:spPr>
+            <p:style>
+              <a:lnRef idx="2">
+                <a:schemeClr val="accent1">
+                  <a:shade val="15000"/>
+                </a:schemeClr>
+              </a:lnRef>
+              <a:fillRef idx="1">
+                <a:schemeClr val="accent1"/>
+              </a:fillRef>
+              <a:effectRef idx="0">
+                <a:schemeClr val="accent1"/>
+              </a:effectRef>
+              <a:fontRef idx="minor">
+                <a:schemeClr val="lt1"/>
+              </a:fontRef>
+            </p:style>
+            <p:txBody>
+              <a:bodyPr rtlCol="0" anchor="ctr"/>
+              <a:lstStyle/>
+              <a:p>
+                <a:pPr algn="ctr"/>
+                <a:endParaRPr lang="en-US"/>
+              </a:p>
+            </p:txBody>
+          </p:sp>
+          <p:sp>
+            <p:nvSpPr>
+              <p:cNvPr id="14" name="Rounded Rectangle 13">
+                <a:extLst>
+                  <a:ext uri="{FF2B5EF4-FFF2-40B4-BE49-F238E27FC236}">
+                    <a16:creationId xmlns:a16="http://schemas.microsoft.com/office/drawing/2014/main" id="{5112F258-1787-C39D-E24C-6EB046317871}"/>
+                  </a:ext>
+                </a:extLst>
+              </p:cNvPr>
+              <p:cNvSpPr/>
+              <p:nvPr/>
+            </p:nvSpPr>
+            <p:spPr>
+              <a:xfrm>
+                <a:off x="1533625" y="2724687"/>
+                <a:ext cx="10316273" cy="2527225"/>
+              </a:xfrm>
+              <a:custGeom>
+                <a:avLst/>
+                <a:gdLst>
+                  <a:gd name="csX0" fmla="*/ 0 w 10316273"/>
+                  <a:gd name="csY0" fmla="*/ 421213 h 2527225"/>
+                  <a:gd name="csX1" fmla="*/ 421213 w 10316273"/>
+                  <a:gd name="csY1" fmla="*/ 0 h 2527225"/>
+                  <a:gd name="csX2" fmla="*/ 918590 w 10316273"/>
+                  <a:gd name="csY2" fmla="*/ 0 h 2527225"/>
+                  <a:gd name="csX3" fmla="*/ 1226490 w 10316273"/>
+                  <a:gd name="csY3" fmla="*/ 0 h 2527225"/>
+                  <a:gd name="csX4" fmla="*/ 2008082 w 10316273"/>
+                  <a:gd name="csY4" fmla="*/ 0 h 2527225"/>
+                  <a:gd name="csX5" fmla="*/ 2600198 w 10316273"/>
+                  <a:gd name="csY5" fmla="*/ 0 h 2527225"/>
+                  <a:gd name="csX6" fmla="*/ 3381790 w 10316273"/>
+                  <a:gd name="csY6" fmla="*/ 0 h 2527225"/>
+                  <a:gd name="csX7" fmla="*/ 3879167 w 10316273"/>
+                  <a:gd name="csY7" fmla="*/ 0 h 2527225"/>
+                  <a:gd name="csX8" fmla="*/ 4281806 w 10316273"/>
+                  <a:gd name="csY8" fmla="*/ 0 h 2527225"/>
+                  <a:gd name="csX9" fmla="*/ 4873921 w 10316273"/>
+                  <a:gd name="csY9" fmla="*/ 0 h 2527225"/>
+                  <a:gd name="csX10" fmla="*/ 5560775 w 10316273"/>
+                  <a:gd name="csY10" fmla="*/ 0 h 2527225"/>
+                  <a:gd name="csX11" fmla="*/ 6342367 w 10316273"/>
+                  <a:gd name="csY11" fmla="*/ 0 h 2527225"/>
+                  <a:gd name="csX12" fmla="*/ 7029221 w 10316273"/>
+                  <a:gd name="csY12" fmla="*/ 0 h 2527225"/>
+                  <a:gd name="csX13" fmla="*/ 7810814 w 10316273"/>
+                  <a:gd name="csY13" fmla="*/ 0 h 2527225"/>
+                  <a:gd name="csX14" fmla="*/ 8497668 w 10316273"/>
+                  <a:gd name="csY14" fmla="*/ 0 h 2527225"/>
+                  <a:gd name="csX15" fmla="*/ 8900306 w 10316273"/>
+                  <a:gd name="csY15" fmla="*/ 0 h 2527225"/>
+                  <a:gd name="csX16" fmla="*/ 9895060 w 10316273"/>
+                  <a:gd name="csY16" fmla="*/ 0 h 2527225"/>
+                  <a:gd name="csX17" fmla="*/ 10316273 w 10316273"/>
+                  <a:gd name="csY17" fmla="*/ 421213 h 2527225"/>
+                  <a:gd name="csX18" fmla="*/ 10316273 w 10316273"/>
+                  <a:gd name="csY18" fmla="*/ 999661 h 2527225"/>
+                  <a:gd name="csX19" fmla="*/ 10316273 w 10316273"/>
+                  <a:gd name="csY19" fmla="*/ 1527564 h 2527225"/>
+                  <a:gd name="csX20" fmla="*/ 10316273 w 10316273"/>
+                  <a:gd name="csY20" fmla="*/ 2106012 h 2527225"/>
+                  <a:gd name="csX21" fmla="*/ 9895060 w 10316273"/>
+                  <a:gd name="csY21" fmla="*/ 2527225 h 2527225"/>
+                  <a:gd name="csX22" fmla="*/ 9113468 w 10316273"/>
+                  <a:gd name="csY22" fmla="*/ 2527225 h 2527225"/>
+                  <a:gd name="csX23" fmla="*/ 8331875 w 10316273"/>
+                  <a:gd name="csY23" fmla="*/ 2527225 h 2527225"/>
+                  <a:gd name="csX24" fmla="*/ 7929237 w 10316273"/>
+                  <a:gd name="csY24" fmla="*/ 2527225 h 2527225"/>
+                  <a:gd name="csX25" fmla="*/ 7147644 w 10316273"/>
+                  <a:gd name="csY25" fmla="*/ 2527225 h 2527225"/>
+                  <a:gd name="csX26" fmla="*/ 6745006 w 10316273"/>
+                  <a:gd name="csY26" fmla="*/ 2527225 h 2527225"/>
+                  <a:gd name="csX27" fmla="*/ 6058152 w 10316273"/>
+                  <a:gd name="csY27" fmla="*/ 2527225 h 2527225"/>
+                  <a:gd name="csX28" fmla="*/ 5276560 w 10316273"/>
+                  <a:gd name="csY28" fmla="*/ 2527225 h 2527225"/>
+                  <a:gd name="csX29" fmla="*/ 4968660 w 10316273"/>
+                  <a:gd name="csY29" fmla="*/ 2527225 h 2527225"/>
+                  <a:gd name="csX30" fmla="*/ 4187067 w 10316273"/>
+                  <a:gd name="csY30" fmla="*/ 2527225 h 2527225"/>
+                  <a:gd name="csX31" fmla="*/ 3405475 w 10316273"/>
+                  <a:gd name="csY31" fmla="*/ 2527225 h 2527225"/>
+                  <a:gd name="csX32" fmla="*/ 3097575 w 10316273"/>
+                  <a:gd name="csY32" fmla="*/ 2527225 h 2527225"/>
+                  <a:gd name="csX33" fmla="*/ 2505459 w 10316273"/>
+                  <a:gd name="csY33" fmla="*/ 2527225 h 2527225"/>
+                  <a:gd name="csX34" fmla="*/ 2008082 w 10316273"/>
+                  <a:gd name="csY34" fmla="*/ 2527225 h 2527225"/>
+                  <a:gd name="csX35" fmla="*/ 1510705 w 10316273"/>
+                  <a:gd name="csY35" fmla="*/ 2527225 h 2527225"/>
+                  <a:gd name="csX36" fmla="*/ 1013328 w 10316273"/>
+                  <a:gd name="csY36" fmla="*/ 2527225 h 2527225"/>
+                  <a:gd name="csX37" fmla="*/ 421213 w 10316273"/>
+                  <a:gd name="csY37" fmla="*/ 2527225 h 2527225"/>
+                  <a:gd name="csX38" fmla="*/ 0 w 10316273"/>
+                  <a:gd name="csY38" fmla="*/ 2106012 h 2527225"/>
+                  <a:gd name="csX39" fmla="*/ 0 w 10316273"/>
+                  <a:gd name="csY39" fmla="*/ 1544412 h 2527225"/>
+                  <a:gd name="csX40" fmla="*/ 0 w 10316273"/>
+                  <a:gd name="csY40" fmla="*/ 1016509 h 2527225"/>
+                  <a:gd name="csX41" fmla="*/ 0 w 10316273"/>
+                  <a:gd name="csY41" fmla="*/ 421213 h 2527225"/>
+                </a:gdLst>
+                <a:ahLst/>
+                <a:cxnLst>
+                  <a:cxn ang="0">
+                    <a:pos x="csX0" y="csY0"/>
+                  </a:cxn>
+                  <a:cxn ang="0">
+                    <a:pos x="csX1" y="csY1"/>
+                  </a:cxn>
+                  <a:cxn ang="0">
+                    <a:pos x="csX2" y="csY2"/>
+                  </a:cxn>
+                  <a:cxn ang="0">
+                    <a:pos x="csX3" y="csY3"/>
+                  </a:cxn>
+                  <a:cxn ang="0">
+                    <a:pos x="csX4" y="csY4"/>
+                  </a:cxn>
+                  <a:cxn ang="0">
+                    <a:pos x="csX5" y="csY5"/>
+                  </a:cxn>
+                  <a:cxn ang="0">
+                    <a:pos x="csX6" y="csY6"/>
+                  </a:cxn>
+                  <a:cxn ang="0">
+                    <a:pos x="csX7" y="csY7"/>
+                  </a:cxn>
+                  <a:cxn ang="0">
+                    <a:pos x="csX8" y="csY8"/>
+                  </a:cxn>
+                  <a:cxn ang="0">
+                    <a:pos x="csX9" y="csY9"/>
+                  </a:cxn>
+                  <a:cxn ang="0">
+                    <a:pos x="csX10" y="csY10"/>
+                  </a:cxn>
+                  <a:cxn ang="0">
+                    <a:pos x="csX11" y="csY11"/>
+                  </a:cxn>
+                  <a:cxn ang="0">
+                    <a:pos x="csX12" y="csY12"/>
+                  </a:cxn>
+                  <a:cxn ang="0">
+                    <a:pos x="csX13" y="csY13"/>
+                  </a:cxn>
+                  <a:cxn ang="0">
+                    <a:pos x="csX14" y="csY14"/>
+                  </a:cxn>
+                  <a:cxn ang="0">
+                    <a:pos x="csX15" y="csY15"/>
+                  </a:cxn>
+                  <a:cxn ang="0">
+                    <a:pos x="csX16" y="csY16"/>
+                  </a:cxn>
+                  <a:cxn ang="0">
+                    <a:pos x="csX17" y="csY17"/>
+                  </a:cxn>
+                  <a:cxn ang="0">
+                    <a:pos x="csX18" y="csY18"/>
+                  </a:cxn>
+                  <a:cxn ang="0">
+                    <a:pos x="csX19" y="csY19"/>
+                  </a:cxn>
+                  <a:cxn ang="0">
+                    <a:pos x="csX20" y="csY20"/>
+                  </a:cxn>
+                  <a:cxn ang="0">
+                    <a:pos x="csX21" y="csY21"/>
+                  </a:cxn>
+                  <a:cxn ang="0">
+                    <a:pos x="csX22" y="csY22"/>
+                  </a:cxn>
+                  <a:cxn ang="0">
+                    <a:pos x="csX23" y="csY23"/>
+                  </a:cxn>
+                  <a:cxn ang="0">
+                    <a:pos x="csX24" y="csY24"/>
+                  </a:cxn>
+                  <a:cxn ang="0">
+                    <a:pos x="csX25" y="csY25"/>
+                  </a:cxn>
+                  <a:cxn ang="0">
+                    <a:pos x="csX26" y="csY26"/>
+                  </a:cxn>
+                  <a:cxn ang="0">
+                    <a:pos x="csX27" y="csY27"/>
+                  </a:cxn>
+                  <a:cxn ang="0">
+                    <a:pos x="csX28" y="csY28"/>
+                  </a:cxn>
+                  <a:cxn ang="0">
+                    <a:pos x="csX29" y="csY29"/>
+                  </a:cxn>
+                  <a:cxn ang="0">
+                    <a:pos x="csX30" y="csY30"/>
+                  </a:cxn>
+                  <a:cxn ang="0">
+                    <a:pos x="csX31" y="csY31"/>
+                  </a:cxn>
+                  <a:cxn ang="0">
+                    <a:pos x="csX32" y="csY32"/>
+                  </a:cxn>
+                  <a:cxn ang="0">
+                    <a:pos x="csX33" y="csY33"/>
+                  </a:cxn>
+                  <a:cxn ang="0">
+                    <a:pos x="csX34" y="csY34"/>
+                  </a:cxn>
+                  <a:cxn ang="0">
+                    <a:pos x="csX35" y="csY35"/>
+                  </a:cxn>
+                  <a:cxn ang="0">
+                    <a:pos x="csX36" y="csY36"/>
+                  </a:cxn>
+                  <a:cxn ang="0">
+                    <a:pos x="csX37" y="csY37"/>
+                  </a:cxn>
+                  <a:cxn ang="0">
+                    <a:pos x="csX38" y="csY38"/>
+                  </a:cxn>
+                  <a:cxn ang="0">
+                    <a:pos x="csX39" y="csY39"/>
+                  </a:cxn>
+                  <a:cxn ang="0">
+                    <a:pos x="csX40" y="csY40"/>
+                  </a:cxn>
+                  <a:cxn ang="0">
+                    <a:pos x="csX41" y="csY41"/>
+                  </a:cxn>
+                </a:cxnLst>
+                <a:rect l="l" t="t" r="r" b="b"/>
+                <a:pathLst>
+                  <a:path w="10316273" h="2527225" fill="none" extrusionOk="0">
+                    <a:moveTo>
+                      <a:pt x="0" y="421213"/>
+                    </a:moveTo>
+                    <a:cubicBezTo>
+                      <a:pt x="51669" y="197441"/>
+                      <a:pt x="141022" y="17401"/>
+                      <a:pt x="421213" y="0"/>
+                    </a:cubicBezTo>
+                    <a:cubicBezTo>
+                      <a:pt x="594885" y="-24275"/>
+                      <a:pt x="695638" y="26976"/>
+                      <a:pt x="918590" y="0"/>
+                    </a:cubicBezTo>
+                    <a:cubicBezTo>
+                      <a:pt x="1141542" y="-26976"/>
+                      <a:pt x="1109971" y="18389"/>
+                      <a:pt x="1226490" y="0"/>
+                    </a:cubicBezTo>
+                    <a:cubicBezTo>
+                      <a:pt x="1343009" y="-18389"/>
+                      <a:pt x="1680361" y="25761"/>
+                      <a:pt x="2008082" y="0"/>
+                    </a:cubicBezTo>
+                    <a:cubicBezTo>
+                      <a:pt x="2335803" y="-25761"/>
+                      <a:pt x="2438399" y="23755"/>
+                      <a:pt x="2600198" y="0"/>
+                    </a:cubicBezTo>
+                    <a:cubicBezTo>
+                      <a:pt x="2761997" y="-23755"/>
+                      <a:pt x="3214636" y="93775"/>
+                      <a:pt x="3381790" y="0"/>
+                    </a:cubicBezTo>
+                    <a:cubicBezTo>
+                      <a:pt x="3548944" y="-93775"/>
+                      <a:pt x="3761836" y="31522"/>
+                      <a:pt x="3879167" y="0"/>
+                    </a:cubicBezTo>
+                    <a:cubicBezTo>
+                      <a:pt x="3996498" y="-31522"/>
+                      <a:pt x="4089565" y="32560"/>
+                      <a:pt x="4281806" y="0"/>
+                    </a:cubicBezTo>
+                    <a:cubicBezTo>
+                      <a:pt x="4474047" y="-32560"/>
+                      <a:pt x="4727404" y="13273"/>
+                      <a:pt x="4873921" y="0"/>
+                    </a:cubicBezTo>
+                    <a:cubicBezTo>
+                      <a:pt x="5020439" y="-13273"/>
+                      <a:pt x="5244867" y="78989"/>
+                      <a:pt x="5560775" y="0"/>
+                    </a:cubicBezTo>
+                    <a:cubicBezTo>
+                      <a:pt x="5876683" y="-78989"/>
+                      <a:pt x="6130897" y="38074"/>
+                      <a:pt x="6342367" y="0"/>
+                    </a:cubicBezTo>
+                    <a:cubicBezTo>
+                      <a:pt x="6553837" y="-38074"/>
+                      <a:pt x="6688108" y="69510"/>
+                      <a:pt x="7029221" y="0"/>
+                    </a:cubicBezTo>
+                    <a:cubicBezTo>
+                      <a:pt x="7370334" y="-69510"/>
+                      <a:pt x="7543316" y="81914"/>
+                      <a:pt x="7810814" y="0"/>
+                    </a:cubicBezTo>
+                    <a:cubicBezTo>
+                      <a:pt x="8078312" y="-81914"/>
+                      <a:pt x="8161840" y="6457"/>
+                      <a:pt x="8497668" y="0"/>
+                    </a:cubicBezTo>
+                    <a:cubicBezTo>
+                      <a:pt x="8833496" y="-6457"/>
+                      <a:pt x="8769077" y="44030"/>
+                      <a:pt x="8900306" y="0"/>
+                    </a:cubicBezTo>
+                    <a:cubicBezTo>
+                      <a:pt x="9031535" y="-44030"/>
+                      <a:pt x="9679429" y="78718"/>
+                      <a:pt x="9895060" y="0"/>
+                    </a:cubicBezTo>
+                    <a:cubicBezTo>
+                      <a:pt x="10141354" y="2105"/>
+                      <a:pt x="10345572" y="233534"/>
+                      <a:pt x="10316273" y="421213"/>
+                    </a:cubicBezTo>
+                    <a:cubicBezTo>
+                      <a:pt x="10334182" y="599830"/>
+                      <a:pt x="10260369" y="880741"/>
+                      <a:pt x="10316273" y="999661"/>
+                    </a:cubicBezTo>
+                    <a:cubicBezTo>
+                      <a:pt x="10372177" y="1118581"/>
+                      <a:pt x="10275617" y="1285408"/>
+                      <a:pt x="10316273" y="1527564"/>
+                    </a:cubicBezTo>
+                    <a:cubicBezTo>
+                      <a:pt x="10356929" y="1769720"/>
+                      <a:pt x="10249670" y="1972884"/>
+                      <a:pt x="10316273" y="2106012"/>
+                    </a:cubicBezTo>
+                    <a:cubicBezTo>
+                      <a:pt x="10352401" y="2313759"/>
+                      <a:pt x="10179570" y="2483341"/>
+                      <a:pt x="9895060" y="2527225"/>
+                    </a:cubicBezTo>
+                    <a:cubicBezTo>
+                      <a:pt x="9705636" y="2543820"/>
+                      <a:pt x="9401348" y="2510440"/>
+                      <a:pt x="9113468" y="2527225"/>
+                    </a:cubicBezTo>
+                    <a:cubicBezTo>
+                      <a:pt x="8825588" y="2544010"/>
+                      <a:pt x="8590653" y="2527020"/>
+                      <a:pt x="8331875" y="2527225"/>
+                    </a:cubicBezTo>
+                    <a:cubicBezTo>
+                      <a:pt x="8073097" y="2527430"/>
+                      <a:pt x="8023038" y="2482627"/>
+                      <a:pt x="7929237" y="2527225"/>
+                    </a:cubicBezTo>
+                    <a:cubicBezTo>
+                      <a:pt x="7835436" y="2571823"/>
+                      <a:pt x="7312929" y="2466538"/>
+                      <a:pt x="7147644" y="2527225"/>
+                    </a:cubicBezTo>
+                    <a:cubicBezTo>
+                      <a:pt x="6982359" y="2587912"/>
+                      <a:pt x="6913830" y="2525705"/>
+                      <a:pt x="6745006" y="2527225"/>
+                    </a:cubicBezTo>
+                    <a:cubicBezTo>
+                      <a:pt x="6576182" y="2528745"/>
+                      <a:pt x="6237367" y="2525023"/>
+                      <a:pt x="6058152" y="2527225"/>
+                    </a:cubicBezTo>
+                    <a:cubicBezTo>
+                      <a:pt x="5878937" y="2529427"/>
+                      <a:pt x="5478096" y="2450476"/>
+                      <a:pt x="5276560" y="2527225"/>
+                    </a:cubicBezTo>
+                    <a:cubicBezTo>
+                      <a:pt x="5075024" y="2603974"/>
+                      <a:pt x="5041307" y="2503253"/>
+                      <a:pt x="4968660" y="2527225"/>
+                    </a:cubicBezTo>
+                    <a:cubicBezTo>
+                      <a:pt x="4896013" y="2551197"/>
+                      <a:pt x="4388701" y="2465481"/>
+                      <a:pt x="4187067" y="2527225"/>
+                    </a:cubicBezTo>
+                    <a:cubicBezTo>
+                      <a:pt x="3985433" y="2588969"/>
+                      <a:pt x="3603599" y="2485440"/>
+                      <a:pt x="3405475" y="2527225"/>
+                    </a:cubicBezTo>
+                    <a:cubicBezTo>
+                      <a:pt x="3207351" y="2569010"/>
+                      <a:pt x="3168852" y="2511164"/>
+                      <a:pt x="3097575" y="2527225"/>
+                    </a:cubicBezTo>
+                    <a:cubicBezTo>
+                      <a:pt x="3026298" y="2543286"/>
+                      <a:pt x="2687707" y="2476276"/>
+                      <a:pt x="2505459" y="2527225"/>
+                    </a:cubicBezTo>
+                    <a:cubicBezTo>
+                      <a:pt x="2323211" y="2578174"/>
+                      <a:pt x="2155111" y="2498137"/>
+                      <a:pt x="2008082" y="2527225"/>
+                    </a:cubicBezTo>
+                    <a:cubicBezTo>
+                      <a:pt x="1861053" y="2556313"/>
+                      <a:pt x="1749454" y="2469366"/>
+                      <a:pt x="1510705" y="2527225"/>
+                    </a:cubicBezTo>
+                    <a:cubicBezTo>
+                      <a:pt x="1271956" y="2585084"/>
+                      <a:pt x="1200846" y="2514079"/>
+                      <a:pt x="1013328" y="2527225"/>
+                    </a:cubicBezTo>
+                    <a:cubicBezTo>
+                      <a:pt x="825810" y="2540371"/>
+                      <a:pt x="710100" y="2502683"/>
+                      <a:pt x="421213" y="2527225"/>
+                    </a:cubicBezTo>
+                    <a:cubicBezTo>
+                      <a:pt x="197323" y="2475324"/>
+                      <a:pt x="-2300" y="2333565"/>
+                      <a:pt x="0" y="2106012"/>
+                    </a:cubicBezTo>
+                    <a:cubicBezTo>
+                      <a:pt x="-53514" y="1893537"/>
+                      <a:pt x="13293" y="1808911"/>
+                      <a:pt x="0" y="1544412"/>
+                    </a:cubicBezTo>
+                    <a:cubicBezTo>
+                      <a:pt x="-13293" y="1279913"/>
+                      <a:pt x="19314" y="1153245"/>
+                      <a:pt x="0" y="1016509"/>
+                    </a:cubicBezTo>
+                    <a:cubicBezTo>
+                      <a:pt x="-19314" y="879773"/>
+                      <a:pt x="63383" y="568095"/>
+                      <a:pt x="0" y="421213"/>
+                    </a:cubicBezTo>
+                    <a:close/>
+                  </a:path>
+                  <a:path w="10316273" h="2527225" stroke="0" extrusionOk="0">
+                    <a:moveTo>
+                      <a:pt x="0" y="421213"/>
+                    </a:moveTo>
+                    <a:cubicBezTo>
+                      <a:pt x="-30517" y="169759"/>
+                      <a:pt x="169406" y="7197"/>
+                      <a:pt x="421213" y="0"/>
+                    </a:cubicBezTo>
+                    <a:cubicBezTo>
+                      <a:pt x="762070" y="-37070"/>
+                      <a:pt x="983768" y="50349"/>
+                      <a:pt x="1202805" y="0"/>
+                    </a:cubicBezTo>
+                    <a:cubicBezTo>
+                      <a:pt x="1421842" y="-50349"/>
+                      <a:pt x="1492711" y="13786"/>
+                      <a:pt x="1700182" y="0"/>
+                    </a:cubicBezTo>
+                    <a:cubicBezTo>
+                      <a:pt x="1907653" y="-13786"/>
+                      <a:pt x="1961557" y="26407"/>
+                      <a:pt x="2102821" y="0"/>
+                    </a:cubicBezTo>
+                    <a:cubicBezTo>
+                      <a:pt x="2244085" y="-26407"/>
+                      <a:pt x="2561592" y="71793"/>
+                      <a:pt x="2789675" y="0"/>
+                    </a:cubicBezTo>
+                    <a:cubicBezTo>
+                      <a:pt x="3017758" y="-71793"/>
+                      <a:pt x="3162127" y="58117"/>
+                      <a:pt x="3287052" y="0"/>
+                    </a:cubicBezTo>
+                    <a:cubicBezTo>
+                      <a:pt x="3411977" y="-58117"/>
+                      <a:pt x="3690737" y="61456"/>
+                      <a:pt x="4068644" y="0"/>
+                    </a:cubicBezTo>
+                    <a:cubicBezTo>
+                      <a:pt x="4446551" y="-61456"/>
+                      <a:pt x="4344043" y="18433"/>
+                      <a:pt x="4471283" y="0"/>
+                    </a:cubicBezTo>
+                    <a:cubicBezTo>
+                      <a:pt x="4598523" y="-18433"/>
+                      <a:pt x="4925927" y="62641"/>
+                      <a:pt x="5252875" y="0"/>
+                    </a:cubicBezTo>
+                    <a:cubicBezTo>
+                      <a:pt x="5579823" y="-62641"/>
+                      <a:pt x="5477464" y="20399"/>
+                      <a:pt x="5560775" y="0"/>
+                    </a:cubicBezTo>
+                    <a:cubicBezTo>
+                      <a:pt x="5644086" y="-20399"/>
+                      <a:pt x="5988154" y="11283"/>
+                      <a:pt x="6152890" y="0"/>
+                    </a:cubicBezTo>
+                    <a:cubicBezTo>
+                      <a:pt x="6317627" y="-11283"/>
+                      <a:pt x="6491509" y="28199"/>
+                      <a:pt x="6745006" y="0"/>
+                    </a:cubicBezTo>
+                    <a:cubicBezTo>
+                      <a:pt x="6998503" y="-28199"/>
+                      <a:pt x="7093597" y="31347"/>
+                      <a:pt x="7242383" y="0"/>
+                    </a:cubicBezTo>
+                    <a:cubicBezTo>
+                      <a:pt x="7391169" y="-31347"/>
+                      <a:pt x="7653382" y="8363"/>
+                      <a:pt x="8023975" y="0"/>
+                    </a:cubicBezTo>
+                    <a:cubicBezTo>
+                      <a:pt x="8394568" y="-8363"/>
+                      <a:pt x="8562267" y="60961"/>
+                      <a:pt x="8805568" y="0"/>
+                    </a:cubicBezTo>
+                    <a:cubicBezTo>
+                      <a:pt x="9048869" y="-60961"/>
+                      <a:pt x="9037505" y="4037"/>
+                      <a:pt x="9208206" y="0"/>
+                    </a:cubicBezTo>
+                    <a:cubicBezTo>
+                      <a:pt x="9378907" y="-4037"/>
+                      <a:pt x="9643337" y="15666"/>
+                      <a:pt x="9895060" y="0"/>
+                    </a:cubicBezTo>
+                    <a:cubicBezTo>
+                      <a:pt x="10103083" y="-50159"/>
+                      <a:pt x="10319985" y="138376"/>
+                      <a:pt x="10316273" y="421213"/>
+                    </a:cubicBezTo>
+                    <a:cubicBezTo>
+                      <a:pt x="10370052" y="541271"/>
+                      <a:pt x="10267542" y="780949"/>
+                      <a:pt x="10316273" y="999661"/>
+                    </a:cubicBezTo>
+                    <a:cubicBezTo>
+                      <a:pt x="10365004" y="1218373"/>
+                      <a:pt x="10277465" y="1285620"/>
+                      <a:pt x="10316273" y="1527564"/>
+                    </a:cubicBezTo>
+                    <a:cubicBezTo>
+                      <a:pt x="10355081" y="1769508"/>
+                      <a:pt x="10288624" y="1949729"/>
+                      <a:pt x="10316273" y="2106012"/>
+                    </a:cubicBezTo>
+                    <a:cubicBezTo>
+                      <a:pt x="10345560" y="2332445"/>
+                      <a:pt x="10131548" y="2563856"/>
+                      <a:pt x="9895060" y="2527225"/>
+                    </a:cubicBezTo>
+                    <a:cubicBezTo>
+                      <a:pt x="9732707" y="2561845"/>
+                      <a:pt x="9650439" y="2520924"/>
+                      <a:pt x="9492422" y="2527225"/>
+                    </a:cubicBezTo>
+                    <a:cubicBezTo>
+                      <a:pt x="9334405" y="2533526"/>
+                      <a:pt x="9324242" y="2498991"/>
+                      <a:pt x="9184521" y="2527225"/>
+                    </a:cubicBezTo>
+                    <a:cubicBezTo>
+                      <a:pt x="9044800" y="2555459"/>
+                      <a:pt x="8981433" y="2495479"/>
+                      <a:pt x="8876621" y="2527225"/>
+                    </a:cubicBezTo>
+                    <a:cubicBezTo>
+                      <a:pt x="8771809" y="2558971"/>
+                      <a:pt x="8504762" y="2474306"/>
+                      <a:pt x="8284506" y="2527225"/>
+                    </a:cubicBezTo>
+                    <a:cubicBezTo>
+                      <a:pt x="8064250" y="2580144"/>
+                      <a:pt x="8037944" y="2479809"/>
+                      <a:pt x="7881868" y="2527225"/>
+                    </a:cubicBezTo>
+                    <a:cubicBezTo>
+                      <a:pt x="7725792" y="2574641"/>
+                      <a:pt x="7371608" y="2515575"/>
+                      <a:pt x="7195014" y="2527225"/>
+                    </a:cubicBezTo>
+                    <a:cubicBezTo>
+                      <a:pt x="7018420" y="2538875"/>
+                      <a:pt x="6990983" y="2484193"/>
+                      <a:pt x="6792375" y="2527225"/>
+                    </a:cubicBezTo>
+                    <a:cubicBezTo>
+                      <a:pt x="6593767" y="2570257"/>
+                      <a:pt x="6390629" y="2482726"/>
+                      <a:pt x="6105521" y="2527225"/>
+                    </a:cubicBezTo>
+                    <a:cubicBezTo>
+                      <a:pt x="5820413" y="2571724"/>
+                      <a:pt x="5869722" y="2515119"/>
+                      <a:pt x="5797621" y="2527225"/>
+                    </a:cubicBezTo>
+                    <a:cubicBezTo>
+                      <a:pt x="5725520" y="2539331"/>
+                      <a:pt x="5410820" y="2472178"/>
+                      <a:pt x="5110767" y="2527225"/>
+                    </a:cubicBezTo>
+                    <a:cubicBezTo>
+                      <a:pt x="4810714" y="2582272"/>
+                      <a:pt x="4847454" y="2517669"/>
+                      <a:pt x="4708129" y="2527225"/>
+                    </a:cubicBezTo>
+                    <a:cubicBezTo>
+                      <a:pt x="4568804" y="2536781"/>
+                      <a:pt x="4471706" y="2517152"/>
+                      <a:pt x="4400229" y="2527225"/>
+                    </a:cubicBezTo>
+                    <a:cubicBezTo>
+                      <a:pt x="4328752" y="2537298"/>
+                      <a:pt x="4165276" y="2482620"/>
+                      <a:pt x="3997590" y="2527225"/>
+                    </a:cubicBezTo>
+                    <a:cubicBezTo>
+                      <a:pt x="3829904" y="2571830"/>
+                      <a:pt x="3472110" y="2489610"/>
+                      <a:pt x="3310736" y="2527225"/>
+                    </a:cubicBezTo>
+                    <a:cubicBezTo>
+                      <a:pt x="3149362" y="2564840"/>
+                      <a:pt x="3004242" y="2492067"/>
+                      <a:pt x="2908098" y="2527225"/>
+                    </a:cubicBezTo>
+                    <a:cubicBezTo>
+                      <a:pt x="2811954" y="2562383"/>
+                      <a:pt x="2694697" y="2497771"/>
+                      <a:pt x="2600198" y="2527225"/>
+                    </a:cubicBezTo>
+                    <a:cubicBezTo>
+                      <a:pt x="2505699" y="2556679"/>
+                      <a:pt x="2314371" y="2517868"/>
+                      <a:pt x="2197559" y="2527225"/>
+                    </a:cubicBezTo>
+                    <a:cubicBezTo>
+                      <a:pt x="2080747" y="2536582"/>
+                      <a:pt x="1846770" y="2496742"/>
+                      <a:pt x="1700182" y="2527225"/>
+                    </a:cubicBezTo>
+                    <a:cubicBezTo>
+                      <a:pt x="1553594" y="2557708"/>
+                      <a:pt x="1237905" y="2460531"/>
+                      <a:pt x="1108067" y="2527225"/>
+                    </a:cubicBezTo>
+                    <a:cubicBezTo>
+                      <a:pt x="978230" y="2593919"/>
+                      <a:pt x="651726" y="2500802"/>
+                      <a:pt x="421213" y="2527225"/>
+                    </a:cubicBezTo>
+                    <a:cubicBezTo>
+                      <a:pt x="211858" y="2587052"/>
+                      <a:pt x="20932" y="2348380"/>
+                      <a:pt x="0" y="2106012"/>
+                    </a:cubicBezTo>
+                    <a:cubicBezTo>
+                      <a:pt x="-48283" y="1906135"/>
+                      <a:pt x="66219" y="1800603"/>
+                      <a:pt x="0" y="1544412"/>
+                    </a:cubicBezTo>
+                    <a:cubicBezTo>
+                      <a:pt x="-66219" y="1288221"/>
+                      <a:pt x="30460" y="1216228"/>
+                      <a:pt x="0" y="965965"/>
+                    </a:cubicBezTo>
+                    <a:cubicBezTo>
+                      <a:pt x="-30460" y="715702"/>
+                      <a:pt x="41895" y="562396"/>
+                      <a:pt x="0" y="421213"/>
+                    </a:cubicBezTo>
+                    <a:close/>
+                  </a:path>
+                </a:pathLst>
+              </a:custGeom>
+              <a:solidFill>
+                <a:schemeClr val="bg1">
+                  <a:lumMod val="65000"/>
+                  <a:alpha val="6998"/>
+                </a:schemeClr>
+              </a:solidFill>
+              <a:ln>
+                <a:solidFill>
+                  <a:schemeClr val="bg1">
+                    <a:lumMod val="85000"/>
+                  </a:schemeClr>
+                </a:solidFill>
+                <a:extLst>
+                  <a:ext uri="{C807C97D-BFC1-408E-A445-0C87EB9F89A2}">
+                    <ask:lineSketchStyleProps xmlns:ask="http://schemas.microsoft.com/office/drawing/2018/sketchyshapes" sd="1219033472">
+                      <a:prstGeom prst="roundRect">
+                        <a:avLst/>
+                      </a:prstGeom>
+                      <ask:type>
+                        <ask:lineSketchScribble/>
+                      </ask:type>
+                    </ask:lineSketchStyleProps>
+                  </a:ext>
+                </a:extLst>
+              </a:ln>
+            </p:spPr>
+            <p:style>
+              <a:lnRef idx="2">
+                <a:schemeClr val="accent1">
+                  <a:shade val="15000"/>
+                </a:schemeClr>
+              </a:lnRef>
+              <a:fillRef idx="1">
+                <a:schemeClr val="accent1"/>
+              </a:fillRef>
+              <a:effectRef idx="0">
+                <a:schemeClr val="accent1"/>
+              </a:effectRef>
+              <a:fontRef idx="minor">
+                <a:schemeClr val="lt1"/>
+              </a:fontRef>
+            </p:style>
+            <p:txBody>
+              <a:bodyPr rtlCol="0" anchor="ctr"/>
+              <a:lstStyle/>
+              <a:p>
+                <a:pPr algn="ctr"/>
+                <a:endParaRPr lang="en-US"/>
+              </a:p>
+            </p:txBody>
+          </p:sp>
+          <p:sp>
+            <p:nvSpPr>
+              <p:cNvPr id="57" name="Rounded Rectangle 56">
+                <a:extLst>
+                  <a:ext uri="{FF2B5EF4-FFF2-40B4-BE49-F238E27FC236}">
+                    <a16:creationId xmlns:a16="http://schemas.microsoft.com/office/drawing/2014/main" id="{E5BC69D6-E194-96E6-103A-24E531475352}"/>
+                  </a:ext>
+                </a:extLst>
+              </p:cNvPr>
+              <p:cNvSpPr/>
+              <p:nvPr/>
+            </p:nvSpPr>
+            <p:spPr>
+              <a:xfrm>
+                <a:off x="8779037" y="243048"/>
+                <a:ext cx="3039491" cy="391916"/>
+              </a:xfrm>
+              <a:prstGeom prst="roundRect">
+                <a:avLst>
+                  <a:gd name="adj" fmla="val 50000"/>
+                </a:avLst>
+              </a:prstGeom>
+              <a:solidFill>
+                <a:schemeClr val="bg1">
+                  <a:alpha val="77245"/>
+                </a:schemeClr>
+              </a:solidFill>
+              <a:ln>
+                <a:noFill/>
+              </a:ln>
+            </p:spPr>
+            <p:style>
+              <a:lnRef idx="2">
+                <a:schemeClr val="accent1">
+                  <a:shade val="15000"/>
+                </a:schemeClr>
+              </a:lnRef>
+              <a:fillRef idx="1">
+                <a:schemeClr val="accent1"/>
+              </a:fillRef>
+              <a:effectRef idx="0">
+                <a:schemeClr val="accent1"/>
+              </a:effectRef>
+              <a:fontRef idx="minor">
+                <a:schemeClr val="lt1"/>
+              </a:fontRef>
+            </p:style>
+            <p:txBody>
+              <a:bodyPr rtlCol="0" anchor="ctr"/>
+              <a:lstStyle/>
+              <a:p>
+                <a:r>
+                  <a:rPr lang="en-US" sz="2000" b="1" dirty="0">
+                    <a:solidFill>
+                      <a:schemeClr val="tx1"/>
+                    </a:solidFill>
+                  </a:rPr>
+                  <a:t>          Service Plane</a:t>
+                </a:r>
+              </a:p>
+            </p:txBody>
+          </p:sp>
+          <p:sp>
+            <p:nvSpPr>
+              <p:cNvPr id="58" name="Rounded Rectangle 57">
+                <a:extLst>
+                  <a:ext uri="{FF2B5EF4-FFF2-40B4-BE49-F238E27FC236}">
+                    <a16:creationId xmlns:a16="http://schemas.microsoft.com/office/drawing/2014/main" id="{36A816B4-CFCD-6768-4C63-ED6ED0BC81AB}"/>
+                  </a:ext>
+                </a:extLst>
+              </p:cNvPr>
+              <p:cNvSpPr/>
+              <p:nvPr/>
+            </p:nvSpPr>
+            <p:spPr>
+              <a:xfrm>
+                <a:off x="145152" y="4869632"/>
+                <a:ext cx="2156012" cy="391916"/>
+              </a:xfrm>
+              <a:prstGeom prst="roundRect">
+                <a:avLst>
+                  <a:gd name="adj" fmla="val 50000"/>
+                </a:avLst>
+              </a:prstGeom>
+              <a:solidFill>
+                <a:schemeClr val="bg1">
+                  <a:alpha val="77245"/>
+                </a:schemeClr>
+              </a:solidFill>
+              <a:ln>
+                <a:noFill/>
+              </a:ln>
+            </p:spPr>
+            <p:style>
+              <a:lnRef idx="2">
+                <a:schemeClr val="accent1">
+                  <a:shade val="15000"/>
+                </a:schemeClr>
+              </a:lnRef>
+              <a:fillRef idx="1">
+                <a:schemeClr val="accent1"/>
+              </a:fillRef>
+              <a:effectRef idx="0">
+                <a:schemeClr val="accent1"/>
+              </a:effectRef>
+              <a:fontRef idx="minor">
+                <a:schemeClr val="lt1"/>
+              </a:fontRef>
+            </p:style>
+            <p:txBody>
+              <a:bodyPr rtlCol="0" anchor="ctr"/>
+              <a:lstStyle/>
+              <a:p>
+                <a:r>
+                  <a:rPr lang="en-US" sz="2000" b="1" dirty="0">
+                    <a:solidFill>
+                      <a:schemeClr val="tx1"/>
+                    </a:solidFill>
+                  </a:rPr>
+                  <a:t>Data Flywheel</a:t>
+                </a:r>
+              </a:p>
+            </p:txBody>
+          </p:sp>
+          <p:sp>
+            <p:nvSpPr>
+              <p:cNvPr id="59" name="Rounded Rectangle 58">
+                <a:extLst>
+                  <a:ext uri="{FF2B5EF4-FFF2-40B4-BE49-F238E27FC236}">
+                    <a16:creationId xmlns:a16="http://schemas.microsoft.com/office/drawing/2014/main" id="{E8F01AFA-79FB-D75E-8793-4DD3F99B0BA3}"/>
+                  </a:ext>
+                </a:extLst>
+              </p:cNvPr>
+              <p:cNvSpPr/>
+              <p:nvPr/>
+            </p:nvSpPr>
+            <p:spPr>
+              <a:xfrm>
+                <a:off x="7470393" y="4859996"/>
+                <a:ext cx="4379507" cy="391916"/>
+              </a:xfrm>
+              <a:prstGeom prst="roundRect">
+                <a:avLst>
+                  <a:gd name="adj" fmla="val 50000"/>
+                </a:avLst>
+              </a:prstGeom>
+              <a:solidFill>
+                <a:schemeClr val="bg1">
+                  <a:alpha val="77245"/>
+                </a:schemeClr>
+              </a:solidFill>
+              <a:ln>
+                <a:noFill/>
+              </a:ln>
+            </p:spPr>
+            <p:style>
+              <a:lnRef idx="2">
+                <a:schemeClr val="accent1">
+                  <a:shade val="15000"/>
+                </a:schemeClr>
+              </a:lnRef>
+              <a:fillRef idx="1">
+                <a:schemeClr val="accent1"/>
+              </a:fillRef>
+              <a:effectRef idx="0">
+                <a:schemeClr val="accent1"/>
+              </a:effectRef>
+              <a:fontRef idx="minor">
+                <a:schemeClr val="lt1"/>
+              </a:fontRef>
+            </p:style>
+            <p:txBody>
+              <a:bodyPr rtlCol="0" anchor="ctr"/>
+              <a:lstStyle/>
+              <a:p>
+                <a:r>
+                  <a:rPr lang="en-US" sz="2000" b="1" dirty="0">
+                    <a:solidFill>
+                      <a:schemeClr val="tx1"/>
+                    </a:solidFill>
+                  </a:rPr>
+                  <a:t>Cust. Training Execution Plane</a:t>
+                </a:r>
+              </a:p>
+            </p:txBody>
+          </p:sp>
+        </p:grpSp>
+        <p:grpSp>
+          <p:nvGrpSpPr>
+            <p:cNvPr id="92" name="Group 91">
+              <a:extLst>
+                <a:ext uri="{FF2B5EF4-FFF2-40B4-BE49-F238E27FC236}">
+                  <a16:creationId xmlns:a16="http://schemas.microsoft.com/office/drawing/2014/main" id="{CC0507F7-7396-8571-6F61-33577215C7A5}"/>
+                </a:ext>
+              </a:extLst>
+            </p:cNvPr>
+            <p:cNvGrpSpPr/>
+            <p:nvPr/>
+          </p:nvGrpSpPr>
+          <p:grpSpPr>
+            <a:xfrm>
+              <a:off x="1136209" y="1227429"/>
+              <a:ext cx="8874235" cy="3316044"/>
+              <a:chOff x="1043587" y="1130340"/>
+              <a:chExt cx="8070537" cy="3015725"/>
+            </a:xfrm>
+          </p:grpSpPr>
+          <p:sp>
+            <p:nvSpPr>
+              <p:cNvPr id="82" name="Rectangle 81">
+                <a:extLst>
+                  <a:ext uri="{FF2B5EF4-FFF2-40B4-BE49-F238E27FC236}">
+                    <a16:creationId xmlns:a16="http://schemas.microsoft.com/office/drawing/2014/main" id="{1F1A98C9-8F5A-9DAC-097A-BCD7A7F04CF4}"/>
+                  </a:ext>
+                </a:extLst>
+              </p:cNvPr>
+              <p:cNvSpPr/>
+              <p:nvPr/>
+            </p:nvSpPr>
+            <p:spPr>
+              <a:xfrm>
+                <a:off x="1043587" y="1667621"/>
+                <a:ext cx="203200" cy="203200"/>
+              </a:xfrm>
+              <a:prstGeom prst="rect">
+                <a:avLst/>
+              </a:prstGeom>
+              <a:solidFill>
+                <a:srgbClr val="FDF0EF"/>
+              </a:solidFill>
+              <a:ln>
+                <a:noFill/>
+              </a:ln>
+            </p:spPr>
+            <p:style>
+              <a:lnRef idx="2">
+                <a:schemeClr val="accent1">
+                  <a:shade val="15000"/>
+                </a:schemeClr>
+              </a:lnRef>
+              <a:fillRef idx="1">
+                <a:schemeClr val="accent1"/>
+              </a:fillRef>
+              <a:effectRef idx="0">
+                <a:schemeClr val="accent1"/>
+              </a:effectRef>
+              <a:fontRef idx="minor">
+                <a:schemeClr val="lt1"/>
+              </a:fontRef>
+            </p:style>
+            <p:txBody>
+              <a:bodyPr rtlCol="0" anchor="ctr"/>
+              <a:lstStyle/>
+              <a:p>
+                <a:pPr algn="ctr"/>
+                <a:endParaRPr lang="en-US"/>
+              </a:p>
+            </p:txBody>
+          </p:sp>
+          <p:sp>
+            <p:nvSpPr>
+              <p:cNvPr id="83" name="Rectangle 82">
+                <a:extLst>
+                  <a:ext uri="{FF2B5EF4-FFF2-40B4-BE49-F238E27FC236}">
+                    <a16:creationId xmlns:a16="http://schemas.microsoft.com/office/drawing/2014/main" id="{B8B36E09-B5A4-5D34-3D59-9A3582AC91EE}"/>
+                  </a:ext>
+                </a:extLst>
+              </p:cNvPr>
+              <p:cNvSpPr/>
+              <p:nvPr/>
+            </p:nvSpPr>
+            <p:spPr>
+              <a:xfrm>
+                <a:off x="2276647" y="1667621"/>
+                <a:ext cx="203200" cy="203200"/>
+              </a:xfrm>
+              <a:prstGeom prst="rect">
+                <a:avLst/>
+              </a:prstGeom>
+              <a:solidFill>
+                <a:srgbClr val="EEEAEE"/>
+              </a:solidFill>
+              <a:ln>
+                <a:noFill/>
+              </a:ln>
+            </p:spPr>
+            <p:style>
+              <a:lnRef idx="2">
+                <a:schemeClr val="accent1">
+                  <a:shade val="15000"/>
+                </a:schemeClr>
+              </a:lnRef>
+              <a:fillRef idx="1">
+                <a:schemeClr val="accent1"/>
+              </a:fillRef>
+              <a:effectRef idx="0">
+                <a:schemeClr val="accent1"/>
+              </a:effectRef>
+              <a:fontRef idx="minor">
+                <a:schemeClr val="lt1"/>
+              </a:fontRef>
+            </p:style>
+            <p:txBody>
+              <a:bodyPr rtlCol="0" anchor="ctr"/>
+              <a:lstStyle/>
+              <a:p>
+                <a:pPr algn="ctr"/>
+                <a:endParaRPr lang="en-US"/>
+              </a:p>
+            </p:txBody>
+          </p:sp>
+          <p:sp>
+            <p:nvSpPr>
+              <p:cNvPr id="84" name="Rectangle 83">
+                <a:extLst>
+                  <a:ext uri="{FF2B5EF4-FFF2-40B4-BE49-F238E27FC236}">
+                    <a16:creationId xmlns:a16="http://schemas.microsoft.com/office/drawing/2014/main" id="{90607639-0473-5DCE-A260-01A0100A2A84}"/>
+                  </a:ext>
+                </a:extLst>
+              </p:cNvPr>
+              <p:cNvSpPr/>
+              <p:nvPr/>
+            </p:nvSpPr>
+            <p:spPr>
+              <a:xfrm>
+                <a:off x="4698791" y="1130340"/>
+                <a:ext cx="203200" cy="203200"/>
+              </a:xfrm>
+              <a:prstGeom prst="rect">
+                <a:avLst/>
+              </a:prstGeom>
+              <a:solidFill>
+                <a:srgbClr val="F1F9FD"/>
+              </a:solidFill>
+              <a:ln>
+                <a:noFill/>
+              </a:ln>
+            </p:spPr>
+            <p:style>
+              <a:lnRef idx="2">
+                <a:schemeClr val="accent1">
+                  <a:shade val="15000"/>
+                </a:schemeClr>
+              </a:lnRef>
+              <a:fillRef idx="1">
+                <a:schemeClr val="accent1"/>
+              </a:fillRef>
+              <a:effectRef idx="0">
+                <a:schemeClr val="accent1"/>
+              </a:effectRef>
+              <a:fontRef idx="minor">
+                <a:schemeClr val="lt1"/>
+              </a:fontRef>
+            </p:style>
+            <p:txBody>
+              <a:bodyPr rtlCol="0" anchor="ctr"/>
+              <a:lstStyle/>
+              <a:p>
+                <a:pPr algn="ctr"/>
+                <a:endParaRPr lang="en-US"/>
+              </a:p>
+            </p:txBody>
+          </p:sp>
+          <p:sp>
+            <p:nvSpPr>
+              <p:cNvPr id="85" name="Rectangle 84">
+                <a:extLst>
+                  <a:ext uri="{FF2B5EF4-FFF2-40B4-BE49-F238E27FC236}">
+                    <a16:creationId xmlns:a16="http://schemas.microsoft.com/office/drawing/2014/main" id="{0056197A-755A-67C9-298F-B673822F3F4C}"/>
+                  </a:ext>
+                </a:extLst>
+              </p:cNvPr>
+              <p:cNvSpPr/>
+              <p:nvPr/>
+            </p:nvSpPr>
+            <p:spPr>
+              <a:xfrm>
+                <a:off x="7551812" y="1134065"/>
+                <a:ext cx="203200" cy="203200"/>
+              </a:xfrm>
+              <a:prstGeom prst="rect">
+                <a:avLst/>
+              </a:prstGeom>
+              <a:solidFill>
+                <a:srgbClr val="F1F9FD"/>
+              </a:solidFill>
+              <a:ln>
+                <a:noFill/>
+              </a:ln>
+            </p:spPr>
+            <p:style>
+              <a:lnRef idx="2">
+                <a:schemeClr val="accent1">
+                  <a:shade val="15000"/>
+                </a:schemeClr>
+              </a:lnRef>
+              <a:fillRef idx="1">
+                <a:schemeClr val="accent1"/>
+              </a:fillRef>
+              <a:effectRef idx="0">
+                <a:schemeClr val="accent1"/>
+              </a:effectRef>
+              <a:fontRef idx="minor">
+                <a:schemeClr val="lt1"/>
+              </a:fontRef>
+            </p:style>
+            <p:txBody>
+              <a:bodyPr rtlCol="0" anchor="ctr"/>
+              <a:lstStyle/>
+              <a:p>
+                <a:pPr algn="ctr"/>
+                <a:endParaRPr lang="en-US"/>
+              </a:p>
+            </p:txBody>
+          </p:sp>
+          <p:sp>
+            <p:nvSpPr>
+              <p:cNvPr id="86" name="Rectangle 85">
+                <a:extLst>
+                  <a:ext uri="{FF2B5EF4-FFF2-40B4-BE49-F238E27FC236}">
+                    <a16:creationId xmlns:a16="http://schemas.microsoft.com/office/drawing/2014/main" id="{8E822933-62AC-7417-21B5-E46FB4159A43}"/>
+                  </a:ext>
+                </a:extLst>
+              </p:cNvPr>
+              <p:cNvSpPr/>
+              <p:nvPr/>
+            </p:nvSpPr>
+            <p:spPr>
+              <a:xfrm>
+                <a:off x="3227496" y="3942865"/>
+                <a:ext cx="203200" cy="203200"/>
+              </a:xfrm>
+              <a:prstGeom prst="rect">
+                <a:avLst/>
+              </a:prstGeom>
+              <a:solidFill>
+                <a:srgbClr val="F7EBEA"/>
+              </a:solidFill>
+              <a:ln>
+                <a:noFill/>
+              </a:ln>
+            </p:spPr>
+            <p:style>
+              <a:lnRef idx="2">
+                <a:schemeClr val="accent1">
+                  <a:shade val="15000"/>
+                </a:schemeClr>
+              </a:lnRef>
+              <a:fillRef idx="1">
+                <a:schemeClr val="accent1"/>
+              </a:fillRef>
+              <a:effectRef idx="0">
+                <a:schemeClr val="accent1"/>
+              </a:effectRef>
+              <a:fontRef idx="minor">
+                <a:schemeClr val="lt1"/>
+              </a:fontRef>
+            </p:style>
+            <p:txBody>
+              <a:bodyPr rtlCol="0" anchor="ctr"/>
+              <a:lstStyle/>
+              <a:p>
+                <a:pPr algn="ctr"/>
+                <a:endParaRPr lang="en-US"/>
+              </a:p>
+            </p:txBody>
+          </p:sp>
+          <p:sp>
+            <p:nvSpPr>
+              <p:cNvPr id="87" name="Rectangle 86">
+                <a:extLst>
+                  <a:ext uri="{FF2B5EF4-FFF2-40B4-BE49-F238E27FC236}">
+                    <a16:creationId xmlns:a16="http://schemas.microsoft.com/office/drawing/2014/main" id="{DA3A0EB3-184E-BB9F-0B62-6BF0A218DA0C}"/>
+                  </a:ext>
+                </a:extLst>
+              </p:cNvPr>
+              <p:cNvSpPr/>
+              <p:nvPr/>
+            </p:nvSpPr>
+            <p:spPr>
+              <a:xfrm>
+                <a:off x="5607692" y="3610691"/>
+                <a:ext cx="203200" cy="203200"/>
+              </a:xfrm>
+              <a:prstGeom prst="rect">
+                <a:avLst/>
+              </a:prstGeom>
+              <a:solidFill>
+                <a:srgbClr val="F9F9F9"/>
+              </a:solidFill>
+              <a:ln>
+                <a:noFill/>
+              </a:ln>
+            </p:spPr>
+            <p:style>
+              <a:lnRef idx="2">
+                <a:schemeClr val="accent1">
+                  <a:shade val="15000"/>
+                </a:schemeClr>
+              </a:lnRef>
+              <a:fillRef idx="1">
+                <a:schemeClr val="accent1"/>
+              </a:fillRef>
+              <a:effectRef idx="0">
+                <a:schemeClr val="accent1"/>
+              </a:effectRef>
+              <a:fontRef idx="minor">
+                <a:schemeClr val="lt1"/>
+              </a:fontRef>
+            </p:style>
+            <p:txBody>
+              <a:bodyPr rtlCol="0" anchor="ctr"/>
+              <a:lstStyle/>
+              <a:p>
+                <a:pPr algn="ctr"/>
+                <a:endParaRPr lang="en-US"/>
+              </a:p>
+            </p:txBody>
+          </p:sp>
+          <p:sp>
+            <p:nvSpPr>
+              <p:cNvPr id="88" name="Rectangle 87">
+                <a:extLst>
+                  <a:ext uri="{FF2B5EF4-FFF2-40B4-BE49-F238E27FC236}">
+                    <a16:creationId xmlns:a16="http://schemas.microsoft.com/office/drawing/2014/main" id="{140AA577-0589-CC4D-038F-B87C4F116241}"/>
+                  </a:ext>
+                </a:extLst>
+              </p:cNvPr>
+              <p:cNvSpPr/>
+              <p:nvPr/>
+            </p:nvSpPr>
+            <p:spPr>
+              <a:xfrm>
+                <a:off x="6539156" y="2908912"/>
+                <a:ext cx="203200" cy="203200"/>
+              </a:xfrm>
+              <a:prstGeom prst="rect">
+                <a:avLst/>
+              </a:prstGeom>
+              <a:solidFill>
+                <a:srgbClr val="F9F9F9"/>
+              </a:solidFill>
+              <a:ln>
+                <a:noFill/>
+              </a:ln>
+            </p:spPr>
+            <p:style>
+              <a:lnRef idx="2">
+                <a:schemeClr val="accent1">
+                  <a:shade val="15000"/>
+                </a:schemeClr>
+              </a:lnRef>
+              <a:fillRef idx="1">
+                <a:schemeClr val="accent1"/>
+              </a:fillRef>
+              <a:effectRef idx="0">
+                <a:schemeClr val="accent1"/>
+              </a:effectRef>
+              <a:fontRef idx="minor">
+                <a:schemeClr val="lt1"/>
+              </a:fontRef>
+            </p:style>
+            <p:txBody>
+              <a:bodyPr rtlCol="0" anchor="ctr"/>
+              <a:lstStyle/>
+              <a:p>
+                <a:pPr algn="ctr"/>
+                <a:endParaRPr lang="en-US"/>
+              </a:p>
+            </p:txBody>
+          </p:sp>
+          <p:sp>
+            <p:nvSpPr>
+              <p:cNvPr id="89" name="Rectangle 88">
+                <a:extLst>
+                  <a:ext uri="{FF2B5EF4-FFF2-40B4-BE49-F238E27FC236}">
+                    <a16:creationId xmlns:a16="http://schemas.microsoft.com/office/drawing/2014/main" id="{33537241-8035-9CE5-4FF9-19C53C36FCB2}"/>
+                  </a:ext>
+                </a:extLst>
+              </p:cNvPr>
+              <p:cNvSpPr/>
+              <p:nvPr/>
+            </p:nvSpPr>
+            <p:spPr>
+              <a:xfrm>
+                <a:off x="6539156" y="3942865"/>
+                <a:ext cx="203200" cy="203200"/>
+              </a:xfrm>
+              <a:prstGeom prst="rect">
+                <a:avLst/>
+              </a:prstGeom>
+              <a:solidFill>
+                <a:srgbClr val="F9F9F9"/>
+              </a:solidFill>
+              <a:ln>
+                <a:noFill/>
+              </a:ln>
+            </p:spPr>
+            <p:style>
+              <a:lnRef idx="2">
+                <a:schemeClr val="accent1">
+                  <a:shade val="15000"/>
+                </a:schemeClr>
+              </a:lnRef>
+              <a:fillRef idx="1">
+                <a:schemeClr val="accent1"/>
+              </a:fillRef>
+              <a:effectRef idx="0">
+                <a:schemeClr val="accent1"/>
+              </a:effectRef>
+              <a:fontRef idx="minor">
+                <a:schemeClr val="lt1"/>
+              </a:fontRef>
+            </p:style>
+            <p:txBody>
+              <a:bodyPr rtlCol="0" anchor="ctr"/>
+              <a:lstStyle/>
+              <a:p>
+                <a:pPr algn="ctr"/>
+                <a:endParaRPr lang="en-US"/>
+              </a:p>
+            </p:txBody>
+          </p:sp>
+          <p:sp>
+            <p:nvSpPr>
+              <p:cNvPr id="90" name="Rectangle 89">
+                <a:extLst>
+                  <a:ext uri="{FF2B5EF4-FFF2-40B4-BE49-F238E27FC236}">
+                    <a16:creationId xmlns:a16="http://schemas.microsoft.com/office/drawing/2014/main" id="{37028251-F686-F1F8-0DA7-92CF1F25E335}"/>
+                  </a:ext>
+                </a:extLst>
+              </p:cNvPr>
+              <p:cNvSpPr/>
+              <p:nvPr/>
+            </p:nvSpPr>
+            <p:spPr>
+              <a:xfrm>
+                <a:off x="8910924" y="3608669"/>
+                <a:ext cx="203200" cy="203200"/>
+              </a:xfrm>
+              <a:prstGeom prst="rect">
+                <a:avLst/>
+              </a:prstGeom>
+              <a:solidFill>
+                <a:srgbClr val="F9F9F9"/>
+              </a:solidFill>
+              <a:ln>
+                <a:noFill/>
+              </a:ln>
+            </p:spPr>
+            <p:style>
+              <a:lnRef idx="2">
+                <a:schemeClr val="accent1">
+                  <a:shade val="15000"/>
+                </a:schemeClr>
+              </a:lnRef>
+              <a:fillRef idx="1">
+                <a:schemeClr val="accent1"/>
+              </a:fillRef>
+              <a:effectRef idx="0">
+                <a:schemeClr val="accent1"/>
+              </a:effectRef>
+              <a:fontRef idx="minor">
+                <a:schemeClr val="lt1"/>
+              </a:fontRef>
+            </p:style>
+            <p:txBody>
+              <a:bodyPr rtlCol="0" anchor="ctr"/>
+              <a:lstStyle/>
+              <a:p>
+                <a:pPr algn="ctr"/>
+                <a:endParaRPr lang="en-US"/>
+              </a:p>
+            </p:txBody>
+          </p:sp>
+          <p:sp>
+            <p:nvSpPr>
+              <p:cNvPr id="91" name="Rectangle 90">
+                <a:extLst>
+                  <a:ext uri="{FF2B5EF4-FFF2-40B4-BE49-F238E27FC236}">
+                    <a16:creationId xmlns:a16="http://schemas.microsoft.com/office/drawing/2014/main" id="{F55D8693-C6E1-D8C3-DA43-A13061B5D4E9}"/>
+                  </a:ext>
+                </a:extLst>
+              </p:cNvPr>
+              <p:cNvSpPr/>
+              <p:nvPr/>
+            </p:nvSpPr>
+            <p:spPr>
+              <a:xfrm>
+                <a:off x="5607692" y="2575626"/>
+                <a:ext cx="203200" cy="203200"/>
+              </a:xfrm>
+              <a:prstGeom prst="rect">
+                <a:avLst/>
+              </a:prstGeom>
+              <a:solidFill>
+                <a:srgbClr val="F9F9F9"/>
+              </a:solidFill>
+              <a:ln>
+                <a:noFill/>
+              </a:ln>
+            </p:spPr>
+            <p:style>
+              <a:lnRef idx="2">
+                <a:schemeClr val="accent1">
+                  <a:shade val="15000"/>
+                </a:schemeClr>
+              </a:lnRef>
+              <a:fillRef idx="1">
+                <a:schemeClr val="accent1"/>
+              </a:fillRef>
+              <a:effectRef idx="0">
+                <a:schemeClr val="accent1"/>
+              </a:effectRef>
+              <a:fontRef idx="minor">
+                <a:schemeClr val="lt1"/>
+              </a:fontRef>
+            </p:style>
+            <p:txBody>
+              <a:bodyPr rtlCol="0" anchor="ctr"/>
+              <a:lstStyle/>
+              <a:p>
+                <a:pPr algn="ctr"/>
+                <a:endParaRPr lang="en-US"/>
+              </a:p>
+            </p:txBody>
+          </p:sp>
+        </p:grpSp>
+      </p:grpSp>
+    </p:spTree>
+    <p:extLst>
+      <p:ext uri="{BB962C8B-B14F-4D97-AF65-F5344CB8AC3E}">
+        <p14:creationId xmlns:p14="http://schemas.microsoft.com/office/powerpoint/2010/main" val="1393666453"/>
+      </p:ext>
+    </p:extLst>
+  </p:cSld>
+  <p:clrMapOvr>
+    <a:masterClrMapping/>
+  </p:clrMapOvr>
+  <p:timing>
+    <p:tnLst>
+      <p:par>
+        <p:cTn id="1" dur="indefinite" restart="never" nodeType="tmRoot">
+          <p:childTnLst>
+            <p:seq concurrent="1" nextAc="seek">
+              <p:cTn id="2" dur="indefinite" nodeType="mainSeq">
+                <p:childTnLst>
+                  <p:par>
+                    <p:cTn id="3" fill="hold">
+                      <p:stCondLst>
+                        <p:cond delay="indefinite"/>
+                      </p:stCondLst>
+                      <p:childTnLst>
+                        <p:par>
+                          <p:cTn id="4" fill="hold">
+                            <p:stCondLst>
+                              <p:cond delay="0"/>
+                            </p:stCondLst>
+                            <p:childTnLst>
+                              <p:par>
+                                <p:cTn id="5" presetID="1" presetClass="entr" presetSubtype="0" fill="hold" nodeType="clickEffect">
+                                  <p:stCondLst>
+                                    <p:cond delay="0"/>
+                                  </p:stCondLst>
+                                  <p:childTnLst>
+                                    <p:set>
+                                      <p:cBhvr>
+                                        <p:cTn id="6" dur="1" fill="hold">
+                                          <p:stCondLst>
+                                            <p:cond delay="0"/>
+                                          </p:stCondLst>
+                                        </p:cTn>
+                                        <p:tgtEl>
+                                          <p:spTgt spid="19"/>
+                                        </p:tgtEl>
+                                        <p:attrNameLst>
+                                          <p:attrName>style.visibility</p:attrName>
+                                        </p:attrNameLst>
+                                      </p:cBhvr>
+                                      <p:to>
+                                        <p:strVal val="visible"/>
+                                      </p:to>
+                                    </p:set>
+                                  </p:childTnLst>
+                                </p:cTn>
+                              </p:par>
+                            </p:childTnLst>
+                          </p:cTn>
+                        </p:par>
+                      </p:childTnLst>
+                    </p:cTn>
+                  </p:par>
+                  <p:par>
+                    <p:cTn id="7" fill="hold">
+                      <p:stCondLst>
+                        <p:cond delay="indefinite"/>
+                      </p:stCondLst>
+                      <p:childTnLst>
+                        <p:par>
+                          <p:cTn id="8" fill="hold">
+                            <p:stCondLst>
+                              <p:cond delay="0"/>
+                            </p:stCondLst>
+                            <p:childTnLst>
+                              <p:par>
+                                <p:cTn id="9" presetID="1" presetClass="entr" presetSubtype="0" fill="hold" grpId="0" nodeType="clickEffect">
+                                  <p:stCondLst>
+                                    <p:cond delay="0"/>
+                                  </p:stCondLst>
+                                  <p:childTnLst>
+                                    <p:set>
+                                      <p:cBhvr>
+                                        <p:cTn id="10" dur="1" fill="hold">
+                                          <p:stCondLst>
+                                            <p:cond delay="0"/>
+                                          </p:stCondLst>
+                                        </p:cTn>
+                                        <p:tgtEl>
+                                          <p:spTgt spid="9"/>
+                                        </p:tgtEl>
+                                        <p:attrNameLst>
+                                          <p:attrName>style.visibility</p:attrName>
+                                        </p:attrNameLst>
+                                      </p:cBhvr>
+                                      <p:to>
+                                        <p:strVal val="visible"/>
+                                      </p:to>
+                                    </p:set>
+                                  </p:childTnLst>
+                                </p:cTn>
+                              </p:par>
+                              <p:par>
+                                <p:cTn id="11" presetID="1" presetClass="entr" presetSubtype="0" fill="hold" grpId="0" nodeType="withEffect">
+                                  <p:stCondLst>
+                                    <p:cond delay="0"/>
+                                  </p:stCondLst>
+                                  <p:childTnLst>
+                                    <p:set>
+                                      <p:cBhvr>
+                                        <p:cTn id="12" dur="1" fill="hold">
+                                          <p:stCondLst>
+                                            <p:cond delay="0"/>
+                                          </p:stCondLst>
+                                        </p:cTn>
+                                        <p:tgtEl>
+                                          <p:spTgt spid="12"/>
+                                        </p:tgtEl>
+                                        <p:attrNameLst>
+                                          <p:attrName>style.visibility</p:attrName>
+                                        </p:attrNameLst>
+                                      </p:cBhvr>
+                                      <p:to>
+                                        <p:strVal val="visible"/>
+                                      </p:to>
+                                    </p:set>
+                                  </p:childTnLst>
+                                </p:cTn>
+                              </p:par>
+                            </p:childTnLst>
+                          </p:cTn>
+                        </p:par>
+                      </p:childTnLst>
+                    </p:cTn>
+                  </p:par>
+                  <p:par>
+                    <p:cTn id="13" fill="hold">
+                      <p:stCondLst>
+                        <p:cond delay="indefinite"/>
+                      </p:stCondLst>
+                      <p:childTnLst>
+                        <p:par>
+                          <p:cTn id="14" fill="hold">
+                            <p:stCondLst>
+                              <p:cond delay="0"/>
+                            </p:stCondLst>
+                            <p:childTnLst>
+                              <p:par>
+                                <p:cTn id="15" presetID="1" presetClass="entr" presetSubtype="0" fill="hold" grpId="0" nodeType="clickEffect">
+                                  <p:stCondLst>
+                                    <p:cond delay="0"/>
+                                  </p:stCondLst>
+                                  <p:childTnLst>
+                                    <p:set>
+                                      <p:cBhvr>
+                                        <p:cTn id="16" dur="1" fill="hold">
+                                          <p:stCondLst>
+                                            <p:cond delay="0"/>
+                                          </p:stCondLst>
+                                        </p:cTn>
+                                        <p:tgtEl>
+                                          <p:spTgt spid="10"/>
+                                        </p:tgtEl>
+                                        <p:attrNameLst>
+                                          <p:attrName>style.visibility</p:attrName>
+                                        </p:attrNameLst>
+                                      </p:cBhvr>
+                                      <p:to>
+                                        <p:strVal val="visible"/>
+                                      </p:to>
+                                    </p:set>
+                                  </p:childTnLst>
+                                </p:cTn>
+                              </p:par>
+                              <p:par>
+                                <p:cTn id="17" presetID="1" presetClass="entr" presetSubtype="0" fill="hold" grpId="0" nodeType="withEffect">
+                                  <p:stCondLst>
+                                    <p:cond delay="0"/>
+                                  </p:stCondLst>
+                                  <p:childTnLst>
+                                    <p:set>
+                                      <p:cBhvr>
+                                        <p:cTn id="18" dur="1" fill="hold">
+                                          <p:stCondLst>
+                                            <p:cond delay="0"/>
+                                          </p:stCondLst>
+                                        </p:cTn>
+                                        <p:tgtEl>
+                                          <p:spTgt spid="8"/>
+                                        </p:tgtEl>
+                                        <p:attrNameLst>
+                                          <p:attrName>style.visibility</p:attrName>
+                                        </p:attrNameLst>
+                                      </p:cBhvr>
+                                      <p:to>
+                                        <p:strVal val="visible"/>
+                                      </p:to>
+                                    </p:set>
+                                  </p:childTnLst>
+                                </p:cTn>
+                              </p:par>
+                            </p:childTnLst>
+                          </p:cTn>
+                        </p:par>
+                      </p:childTnLst>
+                    </p:cTn>
+                  </p:par>
+                  <p:par>
+                    <p:cTn id="19" fill="hold">
+                      <p:stCondLst>
+                        <p:cond delay="indefinite"/>
+                      </p:stCondLst>
+                      <p:childTnLst>
+                        <p:par>
+                          <p:cTn id="20" fill="hold">
+                            <p:stCondLst>
+                              <p:cond delay="0"/>
+                            </p:stCondLst>
+                            <p:childTnLst>
+                              <p:par>
+                                <p:cTn id="21" presetID="1" presetClass="entr" presetSubtype="0" fill="hold" nodeType="clickEffect">
+                                  <p:stCondLst>
+                                    <p:cond delay="0"/>
+                                  </p:stCondLst>
+                                  <p:childTnLst>
+                                    <p:set>
+                                      <p:cBhvr>
+                                        <p:cTn id="22" dur="1" fill="hold">
+                                          <p:stCondLst>
+                                            <p:cond delay="0"/>
+                                          </p:stCondLst>
+                                        </p:cTn>
+                                        <p:tgtEl>
+                                          <p:spTgt spid="3"/>
+                                        </p:tgtEl>
+                                        <p:attrNameLst>
+                                          <p:attrName>style.visibility</p:attrName>
+                                        </p:attrNameLst>
+                                      </p:cBhvr>
+                                      <p:to>
+                                        <p:strVal val="visible"/>
+                                      </p:to>
+                                    </p:set>
+                                  </p:childTnLst>
+                                </p:cTn>
+                              </p:par>
+                            </p:childTnLst>
+                          </p:cTn>
+                        </p:par>
+                      </p:childTnLst>
+                    </p:cTn>
+                  </p:par>
+                  <p:par>
+                    <p:cTn id="23" fill="hold">
+                      <p:stCondLst>
+                        <p:cond delay="indefinite"/>
+                      </p:stCondLst>
+                      <p:childTnLst>
+                        <p:par>
+                          <p:cTn id="24" fill="hold">
+                            <p:stCondLst>
+                              <p:cond delay="0"/>
+                            </p:stCondLst>
+                            <p:childTnLst>
+                              <p:par>
+                                <p:cTn id="25" presetID="1" presetClass="entr" presetSubtype="0" fill="hold" nodeType="clickEffect">
+                                  <p:stCondLst>
+                                    <p:cond delay="0"/>
+                                  </p:stCondLst>
+                                  <p:childTnLst>
+                                    <p:set>
+                                      <p:cBhvr>
+                                        <p:cTn id="26" dur="1" fill="hold">
+                                          <p:stCondLst>
+                                            <p:cond delay="0"/>
+                                          </p:stCondLst>
+                                        </p:cTn>
+                                        <p:tgtEl>
+                                          <p:spTgt spid="18"/>
+                                        </p:tgtEl>
+                                        <p:attrNameLst>
+                                          <p:attrName>style.visibility</p:attrName>
+                                        </p:attrNameLst>
+                                      </p:cBhvr>
+                                      <p:to>
+                                        <p:strVal val="visible"/>
+                                      </p:to>
+                                    </p:set>
+                                  </p:childTnLst>
+                                </p:cTn>
+                              </p:par>
+                            </p:childTnLst>
+                          </p:cTn>
+                        </p:par>
+                      </p:childTnLst>
+                    </p:cTn>
+                  </p:par>
+                  <p:par>
+                    <p:cTn id="27" fill="hold">
+                      <p:stCondLst>
+                        <p:cond delay="indefinite"/>
+                      </p:stCondLst>
+                      <p:childTnLst>
+                        <p:par>
+                          <p:cTn id="28" fill="hold">
+                            <p:stCondLst>
+                              <p:cond delay="0"/>
+                            </p:stCondLst>
+                            <p:childTnLst>
+                              <p:par>
+                                <p:cTn id="29" presetID="1" presetClass="entr" presetSubtype="0" fill="hold" nodeType="clickEffect">
+                                  <p:stCondLst>
+                                    <p:cond delay="0"/>
+                                  </p:stCondLst>
+                                  <p:childTnLst>
+                                    <p:set>
+                                      <p:cBhvr>
+                                        <p:cTn id="30" dur="1" fill="hold">
+                                          <p:stCondLst>
+                                            <p:cond delay="0"/>
+                                          </p:stCondLst>
+                                        </p:cTn>
+                                        <p:tgtEl>
+                                          <p:spTgt spid="20"/>
+                                        </p:tgtEl>
+                                        <p:attrNameLst>
+                                          <p:attrName>style.visibility</p:attrName>
+                                        </p:attrNameLst>
+                                      </p:cBhvr>
+                                      <p:to>
+                                        <p:strVal val="visible"/>
+                                      </p:to>
+                                    </p:set>
+                                  </p:childTnLst>
+                                </p:cTn>
+                              </p:par>
+                            </p:childTnLst>
+                          </p:cTn>
+                        </p:par>
+                      </p:childTnLst>
+                    </p:cTn>
+                  </p:par>
+                  <p:par>
+                    <p:cTn id="31" fill="hold">
+                      <p:stCondLst>
+                        <p:cond delay="indefinite"/>
+                      </p:stCondLst>
+                      <p:childTnLst>
+                        <p:par>
+                          <p:cTn id="32" fill="hold">
+                            <p:stCondLst>
+                              <p:cond delay="0"/>
+                            </p:stCondLst>
+                            <p:childTnLst>
+                              <p:par>
+                                <p:cTn id="33" presetID="1" presetClass="entr" presetSubtype="0" fill="hold" nodeType="clickEffect">
+                                  <p:stCondLst>
+                                    <p:cond delay="0"/>
+                                  </p:stCondLst>
+                                  <p:childTnLst>
+                                    <p:set>
+                                      <p:cBhvr>
+                                        <p:cTn id="34" dur="1" fill="hold">
+                                          <p:stCondLst>
+                                            <p:cond delay="0"/>
+                                          </p:stCondLst>
+                                        </p:cTn>
+                                        <p:tgtEl>
+                                          <p:spTgt spid="22"/>
+                                        </p:tgtEl>
+                                        <p:attrNameLst>
+                                          <p:attrName>style.visibility</p:attrName>
+                                        </p:attrNameLst>
+                                      </p:cBhvr>
+                                      <p:to>
+                                        <p:strVal val="visible"/>
+                                      </p:to>
+                                    </p:set>
+                                  </p:childTnLst>
+                                </p:cTn>
+                              </p:par>
+                            </p:childTnLst>
+                          </p:cTn>
+                        </p:par>
+                      </p:childTnLst>
+                    </p:cTn>
+                  </p:par>
+                </p:childTnLst>
+              </p:cTn>
+              <p:prevCondLst>
+                <p:cond evt="onPrev" delay="0">
+                  <p:tgtEl>
+                    <p:sldTgt/>
+                  </p:tgtEl>
+                </p:cond>
+              </p:prevCondLst>
+              <p:nextCondLst>
+                <p:cond evt="onNext" delay="0">
+                  <p:tgtEl>
+                    <p:sldTgt/>
+                  </p:tgtEl>
+                </p:cond>
+              </p:nextCondLst>
+            </p:seq>
+          </p:childTnLst>
+        </p:cTn>
+      </p:par>
+    </p:tnLst>
+    <p:bldLst>
+      <p:bldP spid="8" grpId="0" animBg="1"/>
+      <p:bldP spid="9" grpId="0" animBg="1"/>
+      <p:bldP spid="10" grpId="0" animBg="1"/>
+      <p:bldP spid="12" grpId="0" animBg="1"/>
+    </p:bldLst>
+  </p:timing>
+</p:sld>
+</file>
+
+<file path=ppt/slides/slide4.xml><?xml version="1.0" encoding="utf-8"?>
+<p:sld xmlns:a="http://schemas.openxmlformats.org/drawingml/2006/main" xmlns:r="http://schemas.openxmlformats.org/officeDocument/2006/relationships" xmlns:p="http://schemas.openxmlformats.org/presentationml/2006/main">
+  <p:cSld>
+    <p:spTree>
+      <p:nvGrpSpPr>
+        <p:cNvPr id="1" name=""/>
+        <p:cNvGrpSpPr/>
+        <p:nvPr/>
+      </p:nvGrpSpPr>
+      <p:grpSpPr>
+        <a:xfrm>
+          <a:off x="0" y="0"/>
+          <a:ext cx="0" cy="0"/>
+          <a:chOff x="0" y="0"/>
+          <a:chExt cx="0" cy="0"/>
+        </a:xfrm>
+      </p:grpSpPr>
+      <p:pic>
+        <p:nvPicPr>
+          <p:cNvPr id="1026" name="Picture 2">
+            <a:extLst>
+              <a:ext uri="{FF2B5EF4-FFF2-40B4-BE49-F238E27FC236}">
+                <a16:creationId xmlns:a16="http://schemas.microsoft.com/office/drawing/2014/main" id="{8F9F2159-AC8F-81FA-D015-BEAAC2F61803}"/>
+              </a:ext>
+            </a:extLst>
+          </p:cNvPr>
+          <p:cNvPicPr>
+            <a:picLocks noChangeAspect="1" noChangeArrowheads="1"/>
+          </p:cNvPicPr>
+          <p:nvPr/>
+        </p:nvPicPr>
+        <p:blipFill>
+          <a:blip r:embed="rId2">
+            <a:extLst>
+              <a:ext uri="{28A0092B-C50C-407E-A947-70E740481C1C}">
+                <a14:useLocalDpi xmlns:a14="http://schemas.microsoft.com/office/drawing/2010/main" val="0"/>
+              </a:ext>
+            </a:extLst>
+          </a:blip>
+          <a:srcRect/>
+          <a:stretch>
+            <a:fillRect/>
+          </a:stretch>
+        </p:blipFill>
+        <p:spPr bwMode="auto">
+          <a:xfrm>
+            <a:off x="1285875" y="0"/>
+            <a:ext cx="9620250" cy="6858000"/>
+          </a:xfrm>
+          <a:prstGeom prst="rect">
+            <a:avLst/>
+          </a:prstGeom>
+          <a:noFill/>
+          <a:extLst>
+            <a:ext uri="{909E8E84-426E-40DD-AFC4-6F175D3DCCD1}">
+              <a14:hiddenFill xmlns:a14="http://schemas.microsoft.com/office/drawing/2010/main">
+                <a:solidFill>
+                  <a:srgbClr val="FFFFFF"/>
+                </a:solidFill>
+              </a14:hiddenFill>
+            </a:ext>
+          </a:extLst>
+        </p:spPr>
+      </p:pic>
+    </p:spTree>
+    <p:extLst>
+      <p:ext uri="{BB962C8B-B14F-4D97-AF65-F5344CB8AC3E}">
+        <p14:creationId xmlns:p14="http://schemas.microsoft.com/office/powerpoint/2010/main" val="1623352434"/>
       </p:ext>
     </p:extLst>
   </p:cSld>
